--- a/examples/report-slides/visual-authoring/deck.pptx
+++ b/examples/report-slides/visual-authoring/deck.pptx
@@ -3696,10 +3696,139 @@
           </a:fontRef>
         </p:style>
         <p:txBody>
-          <a:bodyPr rtlCol="0" anchor="ctr"/>
-          <a:lstStyle/>
-          <a:p>
-            <a:pPr algn="ctr"/>
+          <a:bodyPr rtlCol="0" anchor="t" wrap="none" lIns="0" rIns="0" tIns="325120" bIns="0"/>
+          <a:lstStyle/>
+          <a:p>
+            <a:pPr algn="ctr">
+              <a:lnSpc>
+                <a:spcPts val="1152"/>
+              </a:lnSpc>
+              <a:spcBef>
+                <a:spcPts val="0"/>
+              </a:spcBef>
+              <a:spcAft>
+                <a:spcPts val="0"/>
+              </a:spcAft>
+            </a:pPr>
+            <a:r>
+              <a:rPr sz="1200" b="1">
+                <a:solidFill>
+                  <a:srgbClr val="6E899D"/>
+                </a:solidFill>
+                <a:latin typeface="Arial"/>
+              </a:rPr>
+              <a:t>01</a:t>
+            </a:r>
+          </a:p>
+          <a:p>
+            <a:pPr algn="ctr">
+              <a:lnSpc>
+                <a:spcPts val="1728"/>
+              </a:lnSpc>
+              <a:spcBef>
+                <a:spcPts val="7328"/>
+              </a:spcBef>
+              <a:spcAft>
+                <a:spcPts val="0"/>
+              </a:spcAft>
+            </a:pPr>
+            <a:r>
+              <a:rPr sz="1800" b="1">
+                <a:solidFill>
+                  <a:srgbClr val="15334A"/>
+                </a:solidFill>
+                <a:latin typeface="Arial"/>
+              </a:rPr>
+              <a:t>Data sources</a:t>
+            </a:r>
+          </a:p>
+          <a:p>
+            <a:pPr algn="ctr">
+              <a:lnSpc>
+                <a:spcPts val="1344"/>
+              </a:lnSpc>
+              <a:spcBef>
+                <a:spcPts val="1712"/>
+              </a:spcBef>
+              <a:spcAft>
+                <a:spcPts val="0"/>
+              </a:spcAft>
+            </a:pPr>
+            <a:r>
+              <a:rPr sz="1400">
+                <a:solidFill>
+                  <a:srgbClr val="557085"/>
+                </a:solidFill>
+                <a:latin typeface="Arial"/>
+              </a:rPr>
+              <a:t>Raw inputs &amp;</a:t>
+            </a:r>
+          </a:p>
+          <a:p>
+            <a:pPr algn="ctr">
+              <a:lnSpc>
+                <a:spcPts val="1344"/>
+              </a:lnSpc>
+              <a:spcBef>
+                <a:spcPts val="336"/>
+              </a:spcBef>
+              <a:spcAft>
+                <a:spcPts val="0"/>
+              </a:spcAft>
+            </a:pPr>
+            <a:r>
+              <a:rPr sz="1400">
+                <a:solidFill>
+                  <a:srgbClr val="557085"/>
+                </a:solidFill>
+                <a:latin typeface="Arial"/>
+              </a:rPr>
+              <a:t>metadata</a:t>
+            </a:r>
+          </a:p>
+          <a:p>
+            <a:pPr algn="ctr">
+              <a:lnSpc>
+                <a:spcPts val="960"/>
+              </a:lnSpc>
+              <a:spcBef>
+                <a:spcPts val="3456"/>
+              </a:spcBef>
+              <a:spcAft>
+                <a:spcPts val="0"/>
+              </a:spcAft>
+            </a:pPr>
+            <a:r>
+              <a:rPr sz="1000" b="1">
+                <a:solidFill>
+                  <a:srgbClr val="7892A4"/>
+                </a:solidFill>
+                <a:latin typeface="Arial"/>
+              </a:rPr>
+              <a:t>OUTPUT</a:t>
+            </a:r>
+          </a:p>
+          <a:p>
+            <a:pPr algn="r">
+              <a:lnSpc>
+                <a:spcPts val="1056"/>
+              </a:lnSpc>
+              <a:spcBef>
+                <a:spcPts val="0"/>
+              </a:spcBef>
+              <a:spcAft>
+                <a:spcPts val="0"/>
+              </a:spcAft>
+            </a:pPr>
+            <a:r>
+              <a:rPr sz="1100" b="1">
+                <a:solidFill>
+                  <a:srgbClr val="4F86A3"/>
+                </a:solidFill>
+                <a:latin typeface="Arial"/>
+              </a:rPr>
+              <a:t>DATASET</a:t>
+            </a:r>
           </a:p>
         </p:txBody>
       </p:sp>
@@ -3953,10 +4082,161 @@
           </a:fontRef>
         </p:style>
         <p:txBody>
-          <a:bodyPr rtlCol="0" anchor="ctr"/>
-          <a:lstStyle/>
-          <a:p>
-            <a:pPr algn="ctr"/>
+          <a:bodyPr rtlCol="0" anchor="t" wrap="none" lIns="0" rIns="0" tIns="325120" bIns="0"/>
+          <a:lstStyle/>
+          <a:p>
+            <a:pPr algn="ctr">
+              <a:lnSpc>
+                <a:spcPts val="1152"/>
+              </a:lnSpc>
+              <a:spcBef>
+                <a:spcPts val="0"/>
+              </a:spcBef>
+              <a:spcAft>
+                <a:spcPts val="0"/>
+              </a:spcAft>
+            </a:pPr>
+            <a:r>
+              <a:rPr sz="1200" b="1">
+                <a:solidFill>
+                  <a:srgbClr val="6E899D"/>
+                </a:solidFill>
+                <a:latin typeface="Arial"/>
+              </a:rPr>
+              <a:t>02</a:t>
+            </a:r>
+          </a:p>
+          <a:p>
+            <a:pPr algn="ctr">
+              <a:lnSpc>
+                <a:spcPts val="1632"/>
+              </a:lnSpc>
+              <a:spcBef>
+                <a:spcPts val="6928"/>
+              </a:spcBef>
+              <a:spcAft>
+                <a:spcPts val="0"/>
+              </a:spcAft>
+            </a:pPr>
+            <a:r>
+              <a:rPr sz="1700" b="1">
+                <a:solidFill>
+                  <a:srgbClr val="15334A"/>
+                </a:solidFill>
+                <a:latin typeface="Arial"/>
+              </a:rPr>
+              <a:t>Feature</a:t>
+            </a:r>
+          </a:p>
+          <a:p>
+            <a:pPr algn="ctr">
+              <a:lnSpc>
+                <a:spcPts val="1632"/>
+              </a:lnSpc>
+              <a:spcBef>
+                <a:spcPts val="128"/>
+              </a:spcBef>
+              <a:spcAft>
+                <a:spcPts val="0"/>
+              </a:spcAft>
+            </a:pPr>
+            <a:r>
+              <a:rPr sz="1700" b="1">
+                <a:solidFill>
+                  <a:srgbClr val="15334A"/>
+                </a:solidFill>
+                <a:latin typeface="Arial"/>
+              </a:rPr>
+              <a:t>processing</a:t>
+            </a:r>
+          </a:p>
+          <a:p>
+            <a:pPr algn="ctr">
+              <a:lnSpc>
+                <a:spcPts val="1344"/>
+              </a:lnSpc>
+              <a:spcBef>
+                <a:spcPts val="1568"/>
+              </a:spcBef>
+              <a:spcAft>
+                <a:spcPts val="0"/>
+              </a:spcAft>
+            </a:pPr>
+            <a:r>
+              <a:rPr sz="1400">
+                <a:solidFill>
+                  <a:srgbClr val="557085"/>
+                </a:solidFill>
+                <a:latin typeface="Arial"/>
+              </a:rPr>
+              <a:t>Normalize, encode</a:t>
+            </a:r>
+          </a:p>
+          <a:p>
+            <a:pPr algn="ctr">
+              <a:lnSpc>
+                <a:spcPts val="1344"/>
+              </a:lnSpc>
+              <a:spcBef>
+                <a:spcPts val="336"/>
+              </a:spcBef>
+              <a:spcAft>
+                <a:spcPts val="0"/>
+              </a:spcAft>
+            </a:pPr>
+            <a:r>
+              <a:rPr sz="1400">
+                <a:solidFill>
+                  <a:srgbClr val="557085"/>
+                </a:solidFill>
+                <a:latin typeface="Arial"/>
+              </a:rPr>
+              <a:t>and split</a:t>
+            </a:r>
+          </a:p>
+          <a:p>
+            <a:pPr algn="ctr">
+              <a:lnSpc>
+                <a:spcPts val="960"/>
+              </a:lnSpc>
+              <a:spcBef>
+                <a:spcPts val="2336"/>
+              </a:spcBef>
+              <a:spcAft>
+                <a:spcPts val="0"/>
+              </a:spcAft>
+            </a:pPr>
+            <a:r>
+              <a:rPr sz="1000" b="1">
+                <a:solidFill>
+                  <a:srgbClr val="7892A4"/>
+                </a:solidFill>
+                <a:latin typeface="Arial"/>
+              </a:rPr>
+              <a:t>OUTPUT</a:t>
+            </a:r>
+          </a:p>
+          <a:p>
+            <a:pPr algn="r">
+              <a:lnSpc>
+                <a:spcPts val="1056"/>
+              </a:lnSpc>
+              <a:spcBef>
+                <a:spcPts val="0"/>
+              </a:spcBef>
+              <a:spcAft>
+                <a:spcPts val="0"/>
+              </a:spcAft>
+            </a:pPr>
+            <a:r>
+              <a:rPr sz="1100" b="1">
+                <a:solidFill>
+                  <a:srgbClr val="4F9A9A"/>
+                </a:solidFill>
+                <a:latin typeface="Arial"/>
+              </a:rPr>
+              <a:t>FEATURE SET</a:t>
+            </a:r>
           </a:p>
         </p:txBody>
       </p:sp>
@@ -4228,10 +4508,139 @@
           </a:fontRef>
         </p:style>
         <p:txBody>
-          <a:bodyPr rtlCol="0" anchor="ctr"/>
-          <a:lstStyle/>
-          <a:p>
-            <a:pPr algn="ctr"/>
+          <a:bodyPr rtlCol="0" anchor="t" wrap="none" lIns="0" rIns="0" tIns="325120" bIns="0"/>
+          <a:lstStyle/>
+          <a:p>
+            <a:pPr algn="ctr">
+              <a:lnSpc>
+                <a:spcPts val="1152"/>
+              </a:lnSpc>
+              <a:spcBef>
+                <a:spcPts val="0"/>
+              </a:spcBef>
+              <a:spcAft>
+                <a:spcPts val="0"/>
+              </a:spcAft>
+            </a:pPr>
+            <a:r>
+              <a:rPr sz="1200" b="1">
+                <a:solidFill>
+                  <a:srgbClr val="6E899D"/>
+                </a:solidFill>
+                <a:latin typeface="Arial"/>
+              </a:rPr>
+              <a:t>03</a:t>
+            </a:r>
+          </a:p>
+          <a:p>
+            <a:pPr algn="ctr">
+              <a:lnSpc>
+                <a:spcPts val="1728"/>
+              </a:lnSpc>
+              <a:spcBef>
+                <a:spcPts val="7328"/>
+              </a:spcBef>
+              <a:spcAft>
+                <a:spcPts val="0"/>
+              </a:spcAft>
+            </a:pPr>
+            <a:r>
+              <a:rPr sz="1800" b="1">
+                <a:solidFill>
+                  <a:srgbClr val="15334A"/>
+                </a:solidFill>
+                <a:latin typeface="Arial"/>
+              </a:rPr>
+              <a:t>Model training</a:t>
+            </a:r>
+          </a:p>
+          <a:p>
+            <a:pPr algn="ctr">
+              <a:lnSpc>
+                <a:spcPts val="1344"/>
+              </a:lnSpc>
+              <a:spcBef>
+                <a:spcPts val="1712"/>
+              </a:spcBef>
+              <a:spcAft>
+                <a:spcPts val="0"/>
+              </a:spcAft>
+            </a:pPr>
+            <a:r>
+              <a:rPr sz="1400">
+                <a:solidFill>
+                  <a:srgbClr val="557085"/>
+                </a:solidFill>
+                <a:latin typeface="Arial"/>
+              </a:rPr>
+              <a:t>Fit model</a:t>
+            </a:r>
+          </a:p>
+          <a:p>
+            <a:pPr algn="ctr">
+              <a:lnSpc>
+                <a:spcPts val="1344"/>
+              </a:lnSpc>
+              <a:spcBef>
+                <a:spcPts val="336"/>
+              </a:spcBef>
+              <a:spcAft>
+                <a:spcPts val="0"/>
+              </a:spcAft>
+            </a:pPr>
+            <a:r>
+              <a:rPr sz="1400">
+                <a:solidFill>
+                  <a:srgbClr val="557085"/>
+                </a:solidFill>
+                <a:latin typeface="Arial"/>
+              </a:rPr>
+              <a:t>parameters</a:t>
+            </a:r>
+          </a:p>
+          <a:p>
+            <a:pPr algn="ctr">
+              <a:lnSpc>
+                <a:spcPts val="960"/>
+              </a:lnSpc>
+              <a:spcBef>
+                <a:spcPts val="3456"/>
+              </a:spcBef>
+              <a:spcAft>
+                <a:spcPts val="0"/>
+              </a:spcAft>
+            </a:pPr>
+            <a:r>
+              <a:rPr sz="1000" b="1">
+                <a:solidFill>
+                  <a:srgbClr val="7892A4"/>
+                </a:solidFill>
+                <a:latin typeface="Arial"/>
+              </a:rPr>
+              <a:t>OUTPUT</a:t>
+            </a:r>
+          </a:p>
+          <a:p>
+            <a:pPr algn="r">
+              <a:lnSpc>
+                <a:spcPts val="1056"/>
+              </a:lnSpc>
+              <a:spcBef>
+                <a:spcPts val="0"/>
+              </a:spcBef>
+              <a:spcAft>
+                <a:spcPts val="0"/>
+              </a:spcAft>
+            </a:pPr>
+            <a:r>
+              <a:rPr sz="1100" b="1">
+                <a:solidFill>
+                  <a:srgbClr val="6C78B7"/>
+                </a:solidFill>
+                <a:latin typeface="Arial"/>
+              </a:rPr>
+              <a:t>MODEL</a:t>
+            </a:r>
           </a:p>
         </p:txBody>
       </p:sp>
@@ -4491,10 +4900,161 @@
           </a:fontRef>
         </p:style>
         <p:txBody>
-          <a:bodyPr rtlCol="0" anchor="ctr"/>
-          <a:lstStyle/>
-          <a:p>
-            <a:pPr algn="ctr"/>
+          <a:bodyPr rtlCol="0" anchor="t" wrap="none" lIns="0" rIns="0" tIns="325120" bIns="0"/>
+          <a:lstStyle/>
+          <a:p>
+            <a:pPr algn="ctr">
+              <a:lnSpc>
+                <a:spcPts val="1152"/>
+              </a:lnSpc>
+              <a:spcBef>
+                <a:spcPts val="0"/>
+              </a:spcBef>
+              <a:spcAft>
+                <a:spcPts val="0"/>
+              </a:spcAft>
+            </a:pPr>
+            <a:r>
+              <a:rPr sz="1200" b="1">
+                <a:solidFill>
+                  <a:srgbClr val="6E899D"/>
+                </a:solidFill>
+                <a:latin typeface="Arial"/>
+              </a:rPr>
+              <a:t>04</a:t>
+            </a:r>
+          </a:p>
+          <a:p>
+            <a:pPr algn="ctr">
+              <a:lnSpc>
+                <a:spcPts val="1632"/>
+              </a:lnSpc>
+              <a:spcBef>
+                <a:spcPts val="6928"/>
+              </a:spcBef>
+              <a:spcAft>
+                <a:spcPts val="0"/>
+              </a:spcAft>
+            </a:pPr>
+            <a:r>
+              <a:rPr sz="1700" b="1">
+                <a:solidFill>
+                  <a:srgbClr val="15334A"/>
+                </a:solidFill>
+                <a:latin typeface="Arial"/>
+              </a:rPr>
+              <a:t>Evaluation</a:t>
+            </a:r>
+          </a:p>
+          <a:p>
+            <a:pPr algn="ctr">
+              <a:lnSpc>
+                <a:spcPts val="1632"/>
+              </a:lnSpc>
+              <a:spcBef>
+                <a:spcPts val="128"/>
+              </a:spcBef>
+              <a:spcAft>
+                <a:spcPts val="0"/>
+              </a:spcAft>
+            </a:pPr>
+            <a:r>
+              <a:rPr sz="1700" b="1">
+                <a:solidFill>
+                  <a:srgbClr val="15334A"/>
+                </a:solidFill>
+                <a:latin typeface="Arial"/>
+              </a:rPr>
+              <a:t>stage</a:t>
+            </a:r>
+          </a:p>
+          <a:p>
+            <a:pPr algn="ctr">
+              <a:lnSpc>
+                <a:spcPts val="1344"/>
+              </a:lnSpc>
+              <a:spcBef>
+                <a:spcPts val="1568"/>
+              </a:spcBef>
+              <a:spcAft>
+                <a:spcPts val="0"/>
+              </a:spcAft>
+            </a:pPr>
+            <a:r>
+              <a:rPr sz="1400">
+                <a:solidFill>
+                  <a:srgbClr val="557085"/>
+                </a:solidFill>
+                <a:latin typeface="Arial"/>
+              </a:rPr>
+              <a:t>Holdout</a:t>
+            </a:r>
+          </a:p>
+          <a:p>
+            <a:pPr algn="ctr">
+              <a:lnSpc>
+                <a:spcPts val="1344"/>
+              </a:lnSpc>
+              <a:spcBef>
+                <a:spcPts val="336"/>
+              </a:spcBef>
+              <a:spcAft>
+                <a:spcPts val="0"/>
+              </a:spcAft>
+            </a:pPr>
+            <a:r>
+              <a:rPr sz="1400">
+                <a:solidFill>
+                  <a:srgbClr val="557085"/>
+                </a:solidFill>
+                <a:latin typeface="Arial"/>
+              </a:rPr>
+              <a:t>metrics</a:t>
+            </a:r>
+          </a:p>
+          <a:p>
+            <a:pPr algn="ctr">
+              <a:lnSpc>
+                <a:spcPts val="960"/>
+              </a:lnSpc>
+              <a:spcBef>
+                <a:spcPts val="2336"/>
+              </a:spcBef>
+              <a:spcAft>
+                <a:spcPts val="0"/>
+              </a:spcAft>
+            </a:pPr>
+            <a:r>
+              <a:rPr sz="1000" b="1">
+                <a:solidFill>
+                  <a:srgbClr val="7892A4"/>
+                </a:solidFill>
+                <a:latin typeface="Arial"/>
+              </a:rPr>
+              <a:t>OUTPUT</a:t>
+            </a:r>
+          </a:p>
+          <a:p>
+            <a:pPr algn="r">
+              <a:lnSpc>
+                <a:spcPts val="1056"/>
+              </a:lnSpc>
+              <a:spcBef>
+                <a:spcPts val="0"/>
+              </a:spcBef>
+              <a:spcAft>
+                <a:spcPts val="0"/>
+              </a:spcAft>
+            </a:pPr>
+            <a:r>
+              <a:rPr sz="1100" b="1">
+                <a:solidFill>
+                  <a:srgbClr val="C18A4A"/>
+                </a:solidFill>
+                <a:latin typeface="Arial"/>
+              </a:rPr>
+              <a:t>METRICS</a:t>
+            </a:r>
           </a:p>
         </p:txBody>
       </p:sp>
@@ -4754,10 +5314,51 @@
           </a:fontRef>
         </p:style>
         <p:txBody>
-          <a:bodyPr rtlCol="0" anchor="ctr"/>
-          <a:lstStyle/>
-          <a:p>
-            <a:pPr algn="ctr"/>
+          <a:bodyPr rtlCol="0" anchor="t" wrap="none" lIns="0" rIns="0" tIns="139700" bIns="0"/>
+          <a:lstStyle/>
+          <a:p>
+            <a:pPr algn="ctr">
+              <a:lnSpc>
+                <a:spcPts val="1056"/>
+              </a:lnSpc>
+              <a:spcBef>
+                <a:spcPts val="0"/>
+              </a:spcBef>
+              <a:spcAft>
+                <a:spcPts val="0"/>
+              </a:spcAft>
+            </a:pPr>
+            <a:r>
+              <a:rPr sz="1100" b="1">
+                <a:solidFill>
+                  <a:srgbClr val="15334A"/>
+                </a:solidFill>
+                <a:latin typeface="Arial"/>
+              </a:rPr>
+              <a:t>HUMAN REVIEW</a:t>
+            </a:r>
+          </a:p>
+          <a:p>
+            <a:pPr algn="ctr">
+              <a:lnSpc>
+                <a:spcPts val="960"/>
+              </a:lnSpc>
+              <a:spcBef>
+                <a:spcPts val="224"/>
+              </a:spcBef>
+              <a:spcAft>
+                <a:spcPts val="0"/>
+              </a:spcAft>
+            </a:pPr>
+            <a:r>
+              <a:rPr sz="1000">
+                <a:solidFill>
+                  <a:srgbClr val="8B6840"/>
+                </a:solidFill>
+                <a:latin typeface="Arial"/>
+              </a:rPr>
+              <a:t>Approve or return</a:t>
+            </a:r>
           </a:p>
         </p:txBody>
       </p:sp>
@@ -5314,10 +5915,139 @@
           </a:fontRef>
         </p:style>
         <p:txBody>
-          <a:bodyPr rtlCol="0" anchor="ctr"/>
-          <a:lstStyle/>
-          <a:p>
-            <a:pPr algn="ctr"/>
+          <a:bodyPr rtlCol="0" anchor="t" wrap="none" lIns="0" rIns="0" tIns="325120" bIns="0"/>
+          <a:lstStyle/>
+          <a:p>
+            <a:pPr algn="ctr">
+              <a:lnSpc>
+                <a:spcPts val="1152"/>
+              </a:lnSpc>
+              <a:spcBef>
+                <a:spcPts val="0"/>
+              </a:spcBef>
+              <a:spcAft>
+                <a:spcPts val="0"/>
+              </a:spcAft>
+            </a:pPr>
+            <a:r>
+              <a:rPr sz="1200" b="1">
+                <a:solidFill>
+                  <a:srgbClr val="6E899D"/>
+                </a:solidFill>
+                <a:latin typeface="Arial"/>
+              </a:rPr>
+              <a:t>05</a:t>
+            </a:r>
+          </a:p>
+          <a:p>
+            <a:pPr algn="ctr">
+              <a:lnSpc>
+                <a:spcPts val="1728"/>
+              </a:lnSpc>
+              <a:spcBef>
+                <a:spcPts val="7328"/>
+              </a:spcBef>
+              <a:spcAft>
+                <a:spcPts val="0"/>
+              </a:spcAft>
+            </a:pPr>
+            <a:r>
+              <a:rPr sz="1800" b="1">
+                <a:solidFill>
+                  <a:srgbClr val="15334A"/>
+                </a:solidFill>
+                <a:latin typeface="Arial"/>
+              </a:rPr>
+              <a:t>Publishing</a:t>
+            </a:r>
+          </a:p>
+          <a:p>
+            <a:pPr algn="ctr">
+              <a:lnSpc>
+                <a:spcPts val="1344"/>
+              </a:lnSpc>
+              <a:spcBef>
+                <a:spcPts val="1712"/>
+              </a:spcBef>
+              <a:spcAft>
+                <a:spcPts val="0"/>
+              </a:spcAft>
+            </a:pPr>
+            <a:r>
+              <a:rPr sz="1400">
+                <a:solidFill>
+                  <a:srgbClr val="557085"/>
+                </a:solidFill>
+                <a:latin typeface="Arial"/>
+              </a:rPr>
+              <a:t>Versioned model</a:t>
+            </a:r>
+          </a:p>
+          <a:p>
+            <a:pPr algn="ctr">
+              <a:lnSpc>
+                <a:spcPts val="1344"/>
+              </a:lnSpc>
+              <a:spcBef>
+                <a:spcPts val="336"/>
+              </a:spcBef>
+              <a:spcAft>
+                <a:spcPts val="0"/>
+              </a:spcAft>
+            </a:pPr>
+            <a:r>
+              <a:rPr sz="1400">
+                <a:solidFill>
+                  <a:srgbClr val="557085"/>
+                </a:solidFill>
+                <a:latin typeface="Arial"/>
+              </a:rPr>
+              <a:t>artifact</a:t>
+            </a:r>
+          </a:p>
+          <a:p>
+            <a:pPr algn="ctr">
+              <a:lnSpc>
+                <a:spcPts val="960"/>
+              </a:lnSpc>
+              <a:spcBef>
+                <a:spcPts val="3456"/>
+              </a:spcBef>
+              <a:spcAft>
+                <a:spcPts val="0"/>
+              </a:spcAft>
+            </a:pPr>
+            <a:r>
+              <a:rPr sz="1000" b="1">
+                <a:solidFill>
+                  <a:srgbClr val="7892A4"/>
+                </a:solidFill>
+                <a:latin typeface="Arial"/>
+              </a:rPr>
+              <a:t>OUTPUT</a:t>
+            </a:r>
+          </a:p>
+          <a:p>
+            <a:pPr algn="r">
+              <a:lnSpc>
+                <a:spcPts val="1056"/>
+              </a:lnSpc>
+              <a:spcBef>
+                <a:spcPts val="0"/>
+              </a:spcBef>
+              <a:spcAft>
+                <a:spcPts val="0"/>
+              </a:spcAft>
+            </a:pPr>
+            <a:r>
+              <a:rPr sz="1100" b="1">
+                <a:solidFill>
+                  <a:srgbClr val="577E68"/>
+                </a:solidFill>
+                <a:latin typeface="Arial"/>
+              </a:rPr>
+              <a:t>ARTIFACT</a:t>
+            </a:r>
           </a:p>
         </p:txBody>
       </p:sp>
@@ -5748,986 +6478,6 @@
         </p:nvSpPr>
         <p:spPr>
           <a:xfrm>
-            <a:off x="711200" y="2387600"/>
-            <a:ext cx="402336" cy="158496"/>
-          </a:xfrm>
-          <a:prstGeom prst="rect">
-            <a:avLst/>
-          </a:prstGeom>
-          <a:noFill/>
-        </p:spPr>
-        <p:txBody>
-          <a:bodyPr wrap="none" tIns="0" bIns="0" lIns="0" rIns="0">
-            <a:spAutoFit/>
-          </a:bodyPr>
-          <a:lstStyle/>
-          <a:p>
-            <a:pPr algn="l"/>
-            <a:r>
-              <a:rPr sz="1200" b="1">
-                <a:solidFill>
-                  <a:srgbClr val="6E899D"/>
-                </a:solidFill>
-                <a:latin typeface="Arial"/>
-              </a:rPr>
-              <a:t>01</a:t>
-            </a:r>
-          </a:p>
-        </p:txBody>
-      </p:sp>
-      <p:sp>
-        <p:nvSpPr>
-          <p:cNvPr id="53" name="TextBox 52"/>
-          <p:cNvSpPr txBox="1"/>
-          <p:nvPr/>
-        </p:nvSpPr>
-        <p:spPr>
-          <a:xfrm>
-            <a:off x="711200" y="3418840"/>
-            <a:ext cx="1670304" cy="237744"/>
-          </a:xfrm>
-          <a:prstGeom prst="rect">
-            <a:avLst/>
-          </a:prstGeom>
-          <a:noFill/>
-        </p:spPr>
-        <p:txBody>
-          <a:bodyPr wrap="none" tIns="0" bIns="0" lIns="0" rIns="0">
-            <a:spAutoFit/>
-          </a:bodyPr>
-          <a:lstStyle/>
-          <a:p>
-            <a:pPr algn="l"/>
-            <a:r>
-              <a:rPr sz="1800" b="1">
-                <a:solidFill>
-                  <a:srgbClr val="15334A"/>
-                </a:solidFill>
-                <a:latin typeface="Arial"/>
-              </a:rPr>
-              <a:t>Data sources</a:t>
-            </a:r>
-          </a:p>
-        </p:txBody>
-      </p:sp>
-      <p:sp>
-        <p:nvSpPr>
-          <p:cNvPr id="54" name="TextBox 53"/>
-          <p:cNvSpPr txBox="1"/>
-          <p:nvPr/>
-        </p:nvSpPr>
-        <p:spPr>
-          <a:xfrm>
-            <a:off x="711200" y="3886200"/>
-            <a:ext cx="1353312" cy="184912"/>
-          </a:xfrm>
-          <a:prstGeom prst="rect">
-            <a:avLst/>
-          </a:prstGeom>
-          <a:noFill/>
-        </p:spPr>
-        <p:txBody>
-          <a:bodyPr wrap="none" tIns="0" bIns="0" lIns="0" rIns="0">
-            <a:spAutoFit/>
-          </a:bodyPr>
-          <a:lstStyle/>
-          <a:p>
-            <a:pPr algn="l"/>
-            <a:r>
-              <a:rPr sz="1400">
-                <a:solidFill>
-                  <a:srgbClr val="557085"/>
-                </a:solidFill>
-                <a:latin typeface="Arial"/>
-              </a:rPr>
-              <a:t>Raw inputs &amp;</a:t>
-            </a:r>
-          </a:p>
-        </p:txBody>
-      </p:sp>
-      <p:sp>
-        <p:nvSpPr>
-          <p:cNvPr id="55" name="TextBox 54"/>
-          <p:cNvSpPr txBox="1"/>
-          <p:nvPr/>
-        </p:nvSpPr>
-        <p:spPr>
-          <a:xfrm>
-            <a:off x="711200" y="4099560"/>
-            <a:ext cx="983488" cy="184912"/>
-          </a:xfrm>
-          <a:prstGeom prst="rect">
-            <a:avLst/>
-          </a:prstGeom>
-          <a:noFill/>
-        </p:spPr>
-        <p:txBody>
-          <a:bodyPr wrap="none" tIns="0" bIns="0" lIns="0" rIns="0">
-            <a:spAutoFit/>
-          </a:bodyPr>
-          <a:lstStyle/>
-          <a:p>
-            <a:pPr algn="l"/>
-            <a:r>
-              <a:rPr sz="1400">
-                <a:solidFill>
-                  <a:srgbClr val="557085"/>
-                </a:solidFill>
-                <a:latin typeface="Arial"/>
-              </a:rPr>
-              <a:t>metadata</a:t>
-            </a:r>
-          </a:p>
-        </p:txBody>
-      </p:sp>
-      <p:sp>
-        <p:nvSpPr>
-          <p:cNvPr id="56" name="TextBox 55"/>
-          <p:cNvSpPr txBox="1"/>
-          <p:nvPr/>
-        </p:nvSpPr>
-        <p:spPr>
-          <a:xfrm>
-            <a:off x="711200" y="4739640"/>
-            <a:ext cx="640080" cy="132080"/>
-          </a:xfrm>
-          <a:prstGeom prst="rect">
-            <a:avLst/>
-          </a:prstGeom>
-          <a:noFill/>
-        </p:spPr>
-        <p:txBody>
-          <a:bodyPr wrap="none" tIns="0" bIns="0" lIns="0" rIns="0">
-            <a:spAutoFit/>
-          </a:bodyPr>
-          <a:lstStyle/>
-          <a:p>
-            <a:pPr algn="l"/>
-            <a:r>
-              <a:rPr sz="1000" b="1">
-                <a:solidFill>
-                  <a:srgbClr val="7892A4"/>
-                </a:solidFill>
-                <a:latin typeface="Arial"/>
-              </a:rPr>
-              <a:t>OUTPUT</a:t>
-            </a:r>
-          </a:p>
-        </p:txBody>
-      </p:sp>
-      <p:sp>
-        <p:nvSpPr>
-          <p:cNvPr id="57" name="TextBox 56"/>
-          <p:cNvSpPr txBox="1"/>
-          <p:nvPr/>
-        </p:nvSpPr>
-        <p:spPr>
-          <a:xfrm>
-            <a:off x="1421892" y="4732020"/>
-            <a:ext cx="752348" cy="145288"/>
-          </a:xfrm>
-          <a:prstGeom prst="rect">
-            <a:avLst/>
-          </a:prstGeom>
-          <a:noFill/>
-        </p:spPr>
-        <p:txBody>
-          <a:bodyPr wrap="none" tIns="0" bIns="0" lIns="0" rIns="0">
-            <a:spAutoFit/>
-          </a:bodyPr>
-          <a:lstStyle/>
-          <a:p>
-            <a:pPr algn="r"/>
-            <a:r>
-              <a:rPr sz="1100" b="1">
-                <a:solidFill>
-                  <a:srgbClr val="4F86A3"/>
-                </a:solidFill>
-                <a:latin typeface="Arial"/>
-              </a:rPr>
-              <a:t>DATASET</a:t>
-            </a:r>
-          </a:p>
-        </p:txBody>
-      </p:sp>
-      <p:sp>
-        <p:nvSpPr>
-          <p:cNvPr id="58" name="TextBox 57"/>
-          <p:cNvSpPr txBox="1"/>
-          <p:nvPr/>
-        </p:nvSpPr>
-        <p:spPr>
-          <a:xfrm>
-            <a:off x="3027680" y="2387600"/>
-            <a:ext cx="402336" cy="158496"/>
-          </a:xfrm>
-          <a:prstGeom prst="rect">
-            <a:avLst/>
-          </a:prstGeom>
-          <a:noFill/>
-        </p:spPr>
-        <p:txBody>
-          <a:bodyPr wrap="none" tIns="0" bIns="0" lIns="0" rIns="0">
-            <a:spAutoFit/>
-          </a:bodyPr>
-          <a:lstStyle/>
-          <a:p>
-            <a:pPr algn="l"/>
-            <a:r>
-              <a:rPr sz="1200" b="1">
-                <a:solidFill>
-                  <a:srgbClr val="6E899D"/>
-                </a:solidFill>
-                <a:latin typeface="Arial"/>
-              </a:rPr>
-              <a:t>02</a:t>
-            </a:r>
-          </a:p>
-        </p:txBody>
-      </p:sp>
-      <p:sp>
-        <p:nvSpPr>
-          <p:cNvPr id="59" name="TextBox 58"/>
-          <p:cNvSpPr txBox="1"/>
-          <p:nvPr/>
-        </p:nvSpPr>
-        <p:spPr>
-          <a:xfrm>
-            <a:off x="3027680" y="3375660"/>
-            <a:ext cx="1029716" cy="224536"/>
-          </a:xfrm>
-          <a:prstGeom prst="rect">
-            <a:avLst/>
-          </a:prstGeom>
-          <a:noFill/>
-        </p:spPr>
-        <p:txBody>
-          <a:bodyPr wrap="none" tIns="0" bIns="0" lIns="0" rIns="0">
-            <a:spAutoFit/>
-          </a:bodyPr>
-          <a:lstStyle/>
-          <a:p>
-            <a:pPr algn="l"/>
-            <a:r>
-              <a:rPr sz="1700" b="1">
-                <a:solidFill>
-                  <a:srgbClr val="15334A"/>
-                </a:solidFill>
-                <a:latin typeface="Arial"/>
-              </a:rPr>
-              <a:t>Feature</a:t>
-            </a:r>
-          </a:p>
-        </p:txBody>
-      </p:sp>
-      <p:sp>
-        <p:nvSpPr>
-          <p:cNvPr id="60" name="TextBox 59"/>
-          <p:cNvSpPr txBox="1"/>
-          <p:nvPr/>
-        </p:nvSpPr>
-        <p:spPr>
-          <a:xfrm>
-            <a:off x="3027680" y="3599180"/>
-            <a:ext cx="1366520" cy="224536"/>
-          </a:xfrm>
-          <a:prstGeom prst="rect">
-            <a:avLst/>
-          </a:prstGeom>
-          <a:noFill/>
-        </p:spPr>
-        <p:txBody>
-          <a:bodyPr wrap="none" tIns="0" bIns="0" lIns="0" rIns="0">
-            <a:spAutoFit/>
-          </a:bodyPr>
-          <a:lstStyle/>
-          <a:p>
-            <a:pPr algn="l"/>
-            <a:r>
-              <a:rPr sz="1700" b="1">
-                <a:solidFill>
-                  <a:srgbClr val="15334A"/>
-                </a:solidFill>
-                <a:latin typeface="Arial"/>
-              </a:rPr>
-              <a:t>processing</a:t>
-            </a:r>
-          </a:p>
-        </p:txBody>
-      </p:sp>
-      <p:sp>
-        <p:nvSpPr>
-          <p:cNvPr id="61" name="TextBox 60"/>
-          <p:cNvSpPr txBox="1"/>
-          <p:nvPr/>
-        </p:nvSpPr>
-        <p:spPr>
-          <a:xfrm>
-            <a:off x="3027680" y="4028440"/>
-            <a:ext cx="1815592" cy="184912"/>
-          </a:xfrm>
-          <a:prstGeom prst="rect">
-            <a:avLst/>
-          </a:prstGeom>
-          <a:noFill/>
-        </p:spPr>
-        <p:txBody>
-          <a:bodyPr wrap="none" tIns="0" bIns="0" lIns="0" rIns="0">
-            <a:spAutoFit/>
-          </a:bodyPr>
-          <a:lstStyle/>
-          <a:p>
-            <a:pPr algn="l"/>
-            <a:r>
-              <a:rPr sz="1400">
-                <a:solidFill>
-                  <a:srgbClr val="557085"/>
-                </a:solidFill>
-                <a:latin typeface="Arial"/>
-              </a:rPr>
-              <a:t>Normalize, encode</a:t>
-            </a:r>
-          </a:p>
-        </p:txBody>
-      </p:sp>
-      <p:sp>
-        <p:nvSpPr>
-          <p:cNvPr id="62" name="TextBox 61"/>
-          <p:cNvSpPr txBox="1"/>
-          <p:nvPr/>
-        </p:nvSpPr>
-        <p:spPr>
-          <a:xfrm>
-            <a:off x="3027680" y="4241800"/>
-            <a:ext cx="1075944" cy="184912"/>
-          </a:xfrm>
-          <a:prstGeom prst="rect">
-            <a:avLst/>
-          </a:prstGeom>
-          <a:noFill/>
-        </p:spPr>
-        <p:txBody>
-          <a:bodyPr wrap="none" tIns="0" bIns="0" lIns="0" rIns="0">
-            <a:spAutoFit/>
-          </a:bodyPr>
-          <a:lstStyle/>
-          <a:p>
-            <a:pPr algn="l"/>
-            <a:r>
-              <a:rPr sz="1400">
-                <a:solidFill>
-                  <a:srgbClr val="557085"/>
-                </a:solidFill>
-                <a:latin typeface="Arial"/>
-              </a:rPr>
-              <a:t>and split</a:t>
-            </a:r>
-          </a:p>
-        </p:txBody>
-      </p:sp>
-      <p:sp>
-        <p:nvSpPr>
-          <p:cNvPr id="63" name="TextBox 62"/>
-          <p:cNvSpPr txBox="1"/>
-          <p:nvPr/>
-        </p:nvSpPr>
-        <p:spPr>
-          <a:xfrm>
-            <a:off x="3027680" y="4739640"/>
-            <a:ext cx="640080" cy="132080"/>
-          </a:xfrm>
-          <a:prstGeom prst="rect">
-            <a:avLst/>
-          </a:prstGeom>
-          <a:noFill/>
-        </p:spPr>
-        <p:txBody>
-          <a:bodyPr wrap="none" tIns="0" bIns="0" lIns="0" rIns="0">
-            <a:spAutoFit/>
-          </a:bodyPr>
-          <a:lstStyle/>
-          <a:p>
-            <a:pPr algn="l"/>
-            <a:r>
-              <a:rPr sz="1000" b="1">
-                <a:solidFill>
-                  <a:srgbClr val="7892A4"/>
-                </a:solidFill>
-                <a:latin typeface="Arial"/>
-              </a:rPr>
-              <a:t>OUTPUT</a:t>
-            </a:r>
-          </a:p>
-        </p:txBody>
-      </p:sp>
-      <p:sp>
-        <p:nvSpPr>
-          <p:cNvPr id="64" name="TextBox 63"/>
-          <p:cNvSpPr txBox="1"/>
-          <p:nvPr/>
-        </p:nvSpPr>
-        <p:spPr>
-          <a:xfrm>
-            <a:off x="3447796" y="4732020"/>
-            <a:ext cx="1042924" cy="145288"/>
-          </a:xfrm>
-          <a:prstGeom prst="rect">
-            <a:avLst/>
-          </a:prstGeom>
-          <a:noFill/>
-        </p:spPr>
-        <p:txBody>
-          <a:bodyPr wrap="none" tIns="0" bIns="0" lIns="0" rIns="0">
-            <a:spAutoFit/>
-          </a:bodyPr>
-          <a:lstStyle/>
-          <a:p>
-            <a:pPr algn="r"/>
-            <a:r>
-              <a:rPr sz="1100" b="1">
-                <a:solidFill>
-                  <a:srgbClr val="4F9A9A"/>
-                </a:solidFill>
-                <a:latin typeface="Arial"/>
-              </a:rPr>
-              <a:t>FEATURE SET</a:t>
-            </a:r>
-          </a:p>
-        </p:txBody>
-      </p:sp>
-      <p:sp>
-        <p:nvSpPr>
-          <p:cNvPr id="65" name="TextBox 64"/>
-          <p:cNvSpPr txBox="1"/>
-          <p:nvPr/>
-        </p:nvSpPr>
-        <p:spPr>
-          <a:xfrm>
-            <a:off x="5344160" y="2387600"/>
-            <a:ext cx="402336" cy="158496"/>
-          </a:xfrm>
-          <a:prstGeom prst="rect">
-            <a:avLst/>
-          </a:prstGeom>
-          <a:noFill/>
-        </p:spPr>
-        <p:txBody>
-          <a:bodyPr wrap="none" tIns="0" bIns="0" lIns="0" rIns="0">
-            <a:spAutoFit/>
-          </a:bodyPr>
-          <a:lstStyle/>
-          <a:p>
-            <a:pPr algn="l"/>
-            <a:r>
-              <a:rPr sz="1200" b="1">
-                <a:solidFill>
-                  <a:srgbClr val="6E899D"/>
-                </a:solidFill>
-                <a:latin typeface="Arial"/>
-              </a:rPr>
-              <a:t>03</a:t>
-            </a:r>
-          </a:p>
-        </p:txBody>
-      </p:sp>
-      <p:sp>
-        <p:nvSpPr>
-          <p:cNvPr id="66" name="TextBox 65"/>
-          <p:cNvSpPr txBox="1"/>
-          <p:nvPr/>
-        </p:nvSpPr>
-        <p:spPr>
-          <a:xfrm>
-            <a:off x="5344160" y="3418840"/>
-            <a:ext cx="1908048" cy="237744"/>
-          </a:xfrm>
-          <a:prstGeom prst="rect">
-            <a:avLst/>
-          </a:prstGeom>
-          <a:noFill/>
-        </p:spPr>
-        <p:txBody>
-          <a:bodyPr wrap="none" tIns="0" bIns="0" lIns="0" rIns="0">
-            <a:spAutoFit/>
-          </a:bodyPr>
-          <a:lstStyle/>
-          <a:p>
-            <a:pPr algn="l"/>
-            <a:r>
-              <a:rPr sz="1800" b="1">
-                <a:solidFill>
-                  <a:srgbClr val="15334A"/>
-                </a:solidFill>
-                <a:latin typeface="Arial"/>
-              </a:rPr>
-              <a:t>Model training</a:t>
-            </a:r>
-          </a:p>
-        </p:txBody>
-      </p:sp>
-      <p:sp>
-        <p:nvSpPr>
-          <p:cNvPr id="67" name="TextBox 66"/>
-          <p:cNvSpPr txBox="1"/>
-          <p:nvPr/>
-        </p:nvSpPr>
-        <p:spPr>
-          <a:xfrm>
-            <a:off x="5344160" y="3886200"/>
-            <a:ext cx="1075944" cy="184912"/>
-          </a:xfrm>
-          <a:prstGeom prst="rect">
-            <a:avLst/>
-          </a:prstGeom>
-          <a:noFill/>
-        </p:spPr>
-        <p:txBody>
-          <a:bodyPr wrap="none" tIns="0" bIns="0" lIns="0" rIns="0">
-            <a:spAutoFit/>
-          </a:bodyPr>
-          <a:lstStyle/>
-          <a:p>
-            <a:pPr algn="l"/>
-            <a:r>
-              <a:rPr sz="1400">
-                <a:solidFill>
-                  <a:srgbClr val="557085"/>
-                </a:solidFill>
-                <a:latin typeface="Arial"/>
-              </a:rPr>
-              <a:t>Fit model</a:t>
-            </a:r>
-          </a:p>
-        </p:txBody>
-      </p:sp>
-      <p:sp>
-        <p:nvSpPr>
-          <p:cNvPr id="68" name="TextBox 67"/>
-          <p:cNvSpPr txBox="1"/>
-          <p:nvPr/>
-        </p:nvSpPr>
-        <p:spPr>
-          <a:xfrm>
-            <a:off x="5344160" y="4099560"/>
-            <a:ext cx="1168400" cy="184912"/>
-          </a:xfrm>
-          <a:prstGeom prst="rect">
-            <a:avLst/>
-          </a:prstGeom>
-          <a:noFill/>
-        </p:spPr>
-        <p:txBody>
-          <a:bodyPr wrap="none" tIns="0" bIns="0" lIns="0" rIns="0">
-            <a:spAutoFit/>
-          </a:bodyPr>
-          <a:lstStyle/>
-          <a:p>
-            <a:pPr algn="l"/>
-            <a:r>
-              <a:rPr sz="1400">
-                <a:solidFill>
-                  <a:srgbClr val="557085"/>
-                </a:solidFill>
-                <a:latin typeface="Arial"/>
-              </a:rPr>
-              <a:t>parameters</a:t>
-            </a:r>
-          </a:p>
-        </p:txBody>
-      </p:sp>
-      <p:sp>
-        <p:nvSpPr>
-          <p:cNvPr id="69" name="TextBox 68"/>
-          <p:cNvSpPr txBox="1"/>
-          <p:nvPr/>
-        </p:nvSpPr>
-        <p:spPr>
-          <a:xfrm>
-            <a:off x="5344160" y="4739640"/>
-            <a:ext cx="640080" cy="132080"/>
-          </a:xfrm>
-          <a:prstGeom prst="rect">
-            <a:avLst/>
-          </a:prstGeom>
-          <a:noFill/>
-        </p:spPr>
-        <p:txBody>
-          <a:bodyPr wrap="none" tIns="0" bIns="0" lIns="0" rIns="0">
-            <a:spAutoFit/>
-          </a:bodyPr>
-          <a:lstStyle/>
-          <a:p>
-            <a:pPr algn="l"/>
-            <a:r>
-              <a:rPr sz="1000" b="1">
-                <a:solidFill>
-                  <a:srgbClr val="7892A4"/>
-                </a:solidFill>
-                <a:latin typeface="Arial"/>
-              </a:rPr>
-              <a:t>OUTPUT</a:t>
-            </a:r>
-          </a:p>
-        </p:txBody>
-      </p:sp>
-      <p:sp>
-        <p:nvSpPr>
-          <p:cNvPr id="70" name="TextBox 69"/>
-          <p:cNvSpPr txBox="1"/>
-          <p:nvPr/>
-        </p:nvSpPr>
-        <p:spPr>
-          <a:xfrm>
-            <a:off x="6200140" y="4732020"/>
-            <a:ext cx="607060" cy="145288"/>
-          </a:xfrm>
-          <a:prstGeom prst="rect">
-            <a:avLst/>
-          </a:prstGeom>
-          <a:noFill/>
-        </p:spPr>
-        <p:txBody>
-          <a:bodyPr wrap="none" tIns="0" bIns="0" lIns="0" rIns="0">
-            <a:spAutoFit/>
-          </a:bodyPr>
-          <a:lstStyle/>
-          <a:p>
-            <a:pPr algn="r"/>
-            <a:r>
-              <a:rPr sz="1100" b="1">
-                <a:solidFill>
-                  <a:srgbClr val="6C78B7"/>
-                </a:solidFill>
-                <a:latin typeface="Arial"/>
-              </a:rPr>
-              <a:t>MODEL</a:t>
-            </a:r>
-          </a:p>
-        </p:txBody>
-      </p:sp>
-      <p:sp>
-        <p:nvSpPr>
-          <p:cNvPr id="71" name="TextBox 70"/>
-          <p:cNvSpPr txBox="1"/>
-          <p:nvPr/>
-        </p:nvSpPr>
-        <p:spPr>
-          <a:xfrm>
-            <a:off x="7660640" y="2387600"/>
-            <a:ext cx="402336" cy="158496"/>
-          </a:xfrm>
-          <a:prstGeom prst="rect">
-            <a:avLst/>
-          </a:prstGeom>
-          <a:noFill/>
-        </p:spPr>
-        <p:txBody>
-          <a:bodyPr wrap="none" tIns="0" bIns="0" lIns="0" rIns="0">
-            <a:spAutoFit/>
-          </a:bodyPr>
-          <a:lstStyle/>
-          <a:p>
-            <a:pPr algn="l"/>
-            <a:r>
-              <a:rPr sz="1200" b="1">
-                <a:solidFill>
-                  <a:srgbClr val="6E899D"/>
-                </a:solidFill>
-                <a:latin typeface="Arial"/>
-              </a:rPr>
-              <a:t>04</a:t>
-            </a:r>
-          </a:p>
-        </p:txBody>
-      </p:sp>
-      <p:sp>
-        <p:nvSpPr>
-          <p:cNvPr id="72" name="TextBox 71"/>
-          <p:cNvSpPr txBox="1"/>
-          <p:nvPr/>
-        </p:nvSpPr>
-        <p:spPr>
-          <a:xfrm>
-            <a:off x="7660640" y="3375660"/>
-            <a:ext cx="1366520" cy="224536"/>
-          </a:xfrm>
-          <a:prstGeom prst="rect">
-            <a:avLst/>
-          </a:prstGeom>
-          <a:noFill/>
-        </p:spPr>
-        <p:txBody>
-          <a:bodyPr wrap="none" tIns="0" bIns="0" lIns="0" rIns="0">
-            <a:spAutoFit/>
-          </a:bodyPr>
-          <a:lstStyle/>
-          <a:p>
-            <a:pPr algn="l"/>
-            <a:r>
-              <a:rPr sz="1700" b="1">
-                <a:solidFill>
-                  <a:srgbClr val="15334A"/>
-                </a:solidFill>
-                <a:latin typeface="Arial"/>
-              </a:rPr>
-              <a:t>Evaluation</a:t>
-            </a:r>
-          </a:p>
-        </p:txBody>
-      </p:sp>
-      <p:sp>
-        <p:nvSpPr>
-          <p:cNvPr id="73" name="TextBox 72"/>
-          <p:cNvSpPr txBox="1"/>
-          <p:nvPr/>
-        </p:nvSpPr>
-        <p:spPr>
-          <a:xfrm>
-            <a:off x="7660640" y="3599180"/>
-            <a:ext cx="805180" cy="224536"/>
-          </a:xfrm>
-          <a:prstGeom prst="rect">
-            <a:avLst/>
-          </a:prstGeom>
-          <a:noFill/>
-        </p:spPr>
-        <p:txBody>
-          <a:bodyPr wrap="none" tIns="0" bIns="0" lIns="0" rIns="0">
-            <a:spAutoFit/>
-          </a:bodyPr>
-          <a:lstStyle/>
-          <a:p>
-            <a:pPr algn="l"/>
-            <a:r>
-              <a:rPr sz="1700" b="1">
-                <a:solidFill>
-                  <a:srgbClr val="15334A"/>
-                </a:solidFill>
-                <a:latin typeface="Arial"/>
-              </a:rPr>
-              <a:t>stage</a:t>
-            </a:r>
-          </a:p>
-        </p:txBody>
-      </p:sp>
-      <p:sp>
-        <p:nvSpPr>
-          <p:cNvPr id="74" name="TextBox 73"/>
-          <p:cNvSpPr txBox="1"/>
-          <p:nvPr/>
-        </p:nvSpPr>
-        <p:spPr>
-          <a:xfrm>
-            <a:off x="7660640" y="4028440"/>
-            <a:ext cx="891032" cy="184912"/>
-          </a:xfrm>
-          <a:prstGeom prst="rect">
-            <a:avLst/>
-          </a:prstGeom>
-          <a:noFill/>
-        </p:spPr>
-        <p:txBody>
-          <a:bodyPr wrap="none" tIns="0" bIns="0" lIns="0" rIns="0">
-            <a:spAutoFit/>
-          </a:bodyPr>
-          <a:lstStyle/>
-          <a:p>
-            <a:pPr algn="l"/>
-            <a:r>
-              <a:rPr sz="1400">
-                <a:solidFill>
-                  <a:srgbClr val="557085"/>
-                </a:solidFill>
-                <a:latin typeface="Arial"/>
-              </a:rPr>
-              <a:t>Holdout</a:t>
-            </a:r>
-          </a:p>
-        </p:txBody>
-      </p:sp>
-      <p:sp>
-        <p:nvSpPr>
-          <p:cNvPr id="75" name="TextBox 74"/>
-          <p:cNvSpPr txBox="1"/>
-          <p:nvPr/>
-        </p:nvSpPr>
-        <p:spPr>
-          <a:xfrm>
-            <a:off x="7660640" y="4241800"/>
-            <a:ext cx="891032" cy="184912"/>
-          </a:xfrm>
-          <a:prstGeom prst="rect">
-            <a:avLst/>
-          </a:prstGeom>
-          <a:noFill/>
-        </p:spPr>
-        <p:txBody>
-          <a:bodyPr wrap="none" tIns="0" bIns="0" lIns="0" rIns="0">
-            <a:spAutoFit/>
-          </a:bodyPr>
-          <a:lstStyle/>
-          <a:p>
-            <a:pPr algn="l"/>
-            <a:r>
-              <a:rPr sz="1400">
-                <a:solidFill>
-                  <a:srgbClr val="557085"/>
-                </a:solidFill>
-                <a:latin typeface="Arial"/>
-              </a:rPr>
-              <a:t>metrics</a:t>
-            </a:r>
-          </a:p>
-        </p:txBody>
-      </p:sp>
-      <p:sp>
-        <p:nvSpPr>
-          <p:cNvPr id="76" name="TextBox 75"/>
-          <p:cNvSpPr txBox="1"/>
-          <p:nvPr/>
-        </p:nvSpPr>
-        <p:spPr>
-          <a:xfrm>
-            <a:off x="7660640" y="4739640"/>
-            <a:ext cx="640080" cy="132080"/>
-          </a:xfrm>
-          <a:prstGeom prst="rect">
-            <a:avLst/>
-          </a:prstGeom>
-          <a:noFill/>
-        </p:spPr>
-        <p:txBody>
-          <a:bodyPr wrap="none" tIns="0" bIns="0" lIns="0" rIns="0">
-            <a:spAutoFit/>
-          </a:bodyPr>
-          <a:lstStyle/>
-          <a:p>
-            <a:pPr algn="l"/>
-            <a:r>
-              <a:rPr sz="1000" b="1">
-                <a:solidFill>
-                  <a:srgbClr val="7892A4"/>
-                </a:solidFill>
-                <a:latin typeface="Arial"/>
-              </a:rPr>
-              <a:t>OUTPUT</a:t>
-            </a:r>
-          </a:p>
-        </p:txBody>
-      </p:sp>
-      <p:sp>
-        <p:nvSpPr>
-          <p:cNvPr id="77" name="TextBox 76"/>
-          <p:cNvSpPr txBox="1"/>
-          <p:nvPr/>
-        </p:nvSpPr>
-        <p:spPr>
-          <a:xfrm>
-            <a:off x="8371332" y="4732020"/>
-            <a:ext cx="752348" cy="145288"/>
-          </a:xfrm>
-          <a:prstGeom prst="rect">
-            <a:avLst/>
-          </a:prstGeom>
-          <a:noFill/>
-        </p:spPr>
-        <p:txBody>
-          <a:bodyPr wrap="none" tIns="0" bIns="0" lIns="0" rIns="0">
-            <a:spAutoFit/>
-          </a:bodyPr>
-          <a:lstStyle/>
-          <a:p>
-            <a:pPr algn="r"/>
-            <a:r>
-              <a:rPr sz="1100" b="1">
-                <a:solidFill>
-                  <a:srgbClr val="C18A4A"/>
-                </a:solidFill>
-                <a:latin typeface="Arial"/>
-              </a:rPr>
-              <a:t>METRICS</a:t>
-            </a:r>
-          </a:p>
-        </p:txBody>
-      </p:sp>
-      <p:sp>
-        <p:nvSpPr>
-          <p:cNvPr id="78" name="TextBox 77"/>
-          <p:cNvSpPr txBox="1"/>
-          <p:nvPr/>
-        </p:nvSpPr>
-        <p:spPr>
-          <a:xfrm>
-            <a:off x="7894320" y="1633220"/>
-            <a:ext cx="1115568" cy="145288"/>
-          </a:xfrm>
-          <a:prstGeom prst="rect">
-            <a:avLst/>
-          </a:prstGeom>
-          <a:noFill/>
-        </p:spPr>
-        <p:txBody>
-          <a:bodyPr wrap="none" tIns="0" bIns="0" lIns="0" rIns="0">
-            <a:spAutoFit/>
-          </a:bodyPr>
-          <a:lstStyle/>
-          <a:p>
-            <a:pPr algn="l"/>
-            <a:r>
-              <a:rPr sz="1100" b="1">
-                <a:solidFill>
-                  <a:srgbClr val="15334A"/>
-                </a:solidFill>
-                <a:latin typeface="Arial"/>
-              </a:rPr>
-              <a:t>HUMAN REVIEW</a:t>
-            </a:r>
-          </a:p>
-        </p:txBody>
-      </p:sp>
-      <p:sp>
-        <p:nvSpPr>
-          <p:cNvPr id="79" name="TextBox 78"/>
-          <p:cNvSpPr txBox="1"/>
-          <p:nvPr/>
-        </p:nvSpPr>
-        <p:spPr>
-          <a:xfrm>
-            <a:off x="7894320" y="1803400"/>
-            <a:ext cx="1366520" cy="132080"/>
-          </a:xfrm>
-          <a:prstGeom prst="rect">
-            <a:avLst/>
-          </a:prstGeom>
-          <a:noFill/>
-        </p:spPr>
-        <p:txBody>
-          <a:bodyPr wrap="none" tIns="0" bIns="0" lIns="0" rIns="0">
-            <a:spAutoFit/>
-          </a:bodyPr>
-          <a:lstStyle/>
-          <a:p>
-            <a:pPr algn="l"/>
-            <a:r>
-              <a:rPr sz="1000">
-                <a:solidFill>
-                  <a:srgbClr val="8B6840"/>
-                </a:solidFill>
-                <a:latin typeface="Arial"/>
-              </a:rPr>
-              <a:t>Approve or return</a:t>
-            </a:r>
-          </a:p>
-        </p:txBody>
-      </p:sp>
-      <p:sp>
-        <p:nvSpPr>
-          <p:cNvPr id="80" name="TextBox 79"/>
-          <p:cNvSpPr txBox="1"/>
-          <p:nvPr/>
-        </p:nvSpPr>
-        <p:spPr>
-          <a:xfrm>
             <a:off x="8870188" y="1577340"/>
             <a:ext cx="659892" cy="118872"/>
           </a:xfrm>
@@ -6757,7 +6507,7 @@
       </p:sp>
       <p:sp>
         <p:nvSpPr>
-          <p:cNvPr id="81" name="TextBox 80"/>
+          <p:cNvPr id="53" name="TextBox 52"/>
           <p:cNvSpPr txBox="1"/>
           <p:nvPr/>
         </p:nvSpPr>
@@ -6792,217 +6542,7 @@
       </p:sp>
       <p:sp>
         <p:nvSpPr>
-          <p:cNvPr id="82" name="TextBox 81"/>
-          <p:cNvSpPr txBox="1"/>
-          <p:nvPr/>
-        </p:nvSpPr>
-        <p:spPr>
-          <a:xfrm>
-            <a:off x="9977120" y="2387600"/>
-            <a:ext cx="402336" cy="158496"/>
-          </a:xfrm>
-          <a:prstGeom prst="rect">
-            <a:avLst/>
-          </a:prstGeom>
-          <a:noFill/>
-        </p:spPr>
-        <p:txBody>
-          <a:bodyPr wrap="none" tIns="0" bIns="0" lIns="0" rIns="0">
-            <a:spAutoFit/>
-          </a:bodyPr>
-          <a:lstStyle/>
-          <a:p>
-            <a:pPr algn="l"/>
-            <a:r>
-              <a:rPr sz="1200" b="1">
-                <a:solidFill>
-                  <a:srgbClr val="6E899D"/>
-                </a:solidFill>
-                <a:latin typeface="Arial"/>
-              </a:rPr>
-              <a:t>05</a:t>
-            </a:r>
-          </a:p>
-        </p:txBody>
-      </p:sp>
-      <p:sp>
-        <p:nvSpPr>
-          <p:cNvPr id="83" name="TextBox 82"/>
-          <p:cNvSpPr txBox="1"/>
-          <p:nvPr/>
-        </p:nvSpPr>
-        <p:spPr>
-          <a:xfrm>
-            <a:off x="9977120" y="3418840"/>
-            <a:ext cx="1432560" cy="237744"/>
-          </a:xfrm>
-          <a:prstGeom prst="rect">
-            <a:avLst/>
-          </a:prstGeom>
-          <a:noFill/>
-        </p:spPr>
-        <p:txBody>
-          <a:bodyPr wrap="none" tIns="0" bIns="0" lIns="0" rIns="0">
-            <a:spAutoFit/>
-          </a:bodyPr>
-          <a:lstStyle/>
-          <a:p>
-            <a:pPr algn="l"/>
-            <a:r>
-              <a:rPr sz="1800" b="1">
-                <a:solidFill>
-                  <a:srgbClr val="15334A"/>
-                </a:solidFill>
-                <a:latin typeface="Arial"/>
-              </a:rPr>
-              <a:t>Publishing</a:t>
-            </a:r>
-          </a:p>
-        </p:txBody>
-      </p:sp>
-      <p:sp>
-        <p:nvSpPr>
-          <p:cNvPr id="84" name="TextBox 83"/>
-          <p:cNvSpPr txBox="1"/>
-          <p:nvPr/>
-        </p:nvSpPr>
-        <p:spPr>
-          <a:xfrm>
-            <a:off x="9977120" y="3886200"/>
-            <a:ext cx="1630680" cy="184912"/>
-          </a:xfrm>
-          <a:prstGeom prst="rect">
-            <a:avLst/>
-          </a:prstGeom>
-          <a:noFill/>
-        </p:spPr>
-        <p:txBody>
-          <a:bodyPr wrap="none" tIns="0" bIns="0" lIns="0" rIns="0">
-            <a:spAutoFit/>
-          </a:bodyPr>
-          <a:lstStyle/>
-          <a:p>
-            <a:pPr algn="l"/>
-            <a:r>
-              <a:rPr sz="1400">
-                <a:solidFill>
-                  <a:srgbClr val="557085"/>
-                </a:solidFill>
-                <a:latin typeface="Arial"/>
-              </a:rPr>
-              <a:t>Versioned model</a:t>
-            </a:r>
-          </a:p>
-        </p:txBody>
-      </p:sp>
-      <p:sp>
-        <p:nvSpPr>
-          <p:cNvPr id="85" name="TextBox 84"/>
-          <p:cNvSpPr txBox="1"/>
-          <p:nvPr/>
-        </p:nvSpPr>
-        <p:spPr>
-          <a:xfrm>
-            <a:off x="9977120" y="4099560"/>
-            <a:ext cx="983488" cy="184912"/>
-          </a:xfrm>
-          <a:prstGeom prst="rect">
-            <a:avLst/>
-          </a:prstGeom>
-          <a:noFill/>
-        </p:spPr>
-        <p:txBody>
-          <a:bodyPr wrap="none" tIns="0" bIns="0" lIns="0" rIns="0">
-            <a:spAutoFit/>
-          </a:bodyPr>
-          <a:lstStyle/>
-          <a:p>
-            <a:pPr algn="l"/>
-            <a:r>
-              <a:rPr sz="1400">
-                <a:solidFill>
-                  <a:srgbClr val="557085"/>
-                </a:solidFill>
-                <a:latin typeface="Arial"/>
-              </a:rPr>
-              <a:t>artifact</a:t>
-            </a:r>
-          </a:p>
-        </p:txBody>
-      </p:sp>
-      <p:sp>
-        <p:nvSpPr>
-          <p:cNvPr id="86" name="TextBox 85"/>
-          <p:cNvSpPr txBox="1"/>
-          <p:nvPr/>
-        </p:nvSpPr>
-        <p:spPr>
-          <a:xfrm>
-            <a:off x="9977120" y="4739640"/>
-            <a:ext cx="640080" cy="132080"/>
-          </a:xfrm>
-          <a:prstGeom prst="rect">
-            <a:avLst/>
-          </a:prstGeom>
-          <a:noFill/>
-        </p:spPr>
-        <p:txBody>
-          <a:bodyPr wrap="none" tIns="0" bIns="0" lIns="0" rIns="0">
-            <a:spAutoFit/>
-          </a:bodyPr>
-          <a:lstStyle/>
-          <a:p>
-            <a:pPr algn="l"/>
-            <a:r>
-              <a:rPr sz="1000" b="1">
-                <a:solidFill>
-                  <a:srgbClr val="7892A4"/>
-                </a:solidFill>
-                <a:latin typeface="Arial"/>
-              </a:rPr>
-              <a:t>OUTPUT</a:t>
-            </a:r>
-          </a:p>
-        </p:txBody>
-      </p:sp>
-      <p:sp>
-        <p:nvSpPr>
-          <p:cNvPr id="87" name="TextBox 86"/>
-          <p:cNvSpPr txBox="1"/>
-          <p:nvPr/>
-        </p:nvSpPr>
-        <p:spPr>
-          <a:xfrm>
-            <a:off x="10655808" y="4732020"/>
-            <a:ext cx="824992" cy="145288"/>
-          </a:xfrm>
-          <a:prstGeom prst="rect">
-            <a:avLst/>
-          </a:prstGeom>
-          <a:noFill/>
-        </p:spPr>
-        <p:txBody>
-          <a:bodyPr wrap="none" tIns="0" bIns="0" lIns="0" rIns="0">
-            <a:spAutoFit/>
-          </a:bodyPr>
-          <a:lstStyle/>
-          <a:p>
-            <a:pPr algn="r"/>
-            <a:r>
-              <a:rPr sz="1100" b="1">
-                <a:solidFill>
-                  <a:srgbClr val="577E68"/>
-                </a:solidFill>
-                <a:latin typeface="Arial"/>
-              </a:rPr>
-              <a:t>ARTIFACT</a:t>
-            </a:r>
-          </a:p>
-        </p:txBody>
-      </p:sp>
-      <p:sp>
-        <p:nvSpPr>
-          <p:cNvPr id="88" name="TextBox 87"/>
+          <p:cNvPr id="54" name="TextBox 53"/>
           <p:cNvSpPr txBox="1"/>
           <p:nvPr/>
         </p:nvSpPr>
@@ -7037,7 +6577,7 @@
       </p:sp>
       <p:sp>
         <p:nvSpPr>
-          <p:cNvPr id="89" name="TextBox 88"/>
+          <p:cNvPr id="55" name="TextBox 54"/>
           <p:cNvSpPr txBox="1"/>
           <p:nvPr/>
         </p:nvSpPr>
@@ -7090,8 +6630,8 @@
       <p:grpSpPr/>
       <p:pic>
         <p:nvPicPr>
-          <p:cNvPr id="35" name="Picture 34" descr="generated.png"/>
-          <p:cNvPicPr>
+          <p:cNvPr id="20" name="Picture 20"/>
+          <p:cNvPicPr preferRelativeResize="0">
             <a:picLocks noChangeAspect="1"/>
           </p:cNvPicPr>
           <p:nvPr/>
@@ -7148,10 +6688,73 @@
           </a:fontRef>
         </p:style>
         <p:txBody>
-          <a:bodyPr rtlCol="0" anchor="ctr"/>
-          <a:lstStyle/>
-          <a:p>
-            <a:pPr algn="ctr"/>
+          <a:bodyPr rtlCol="0" anchor="t" wrap="none" lIns="0" rIns="0" tIns="225552" bIns="0"/>
+          <a:lstStyle/>
+          <a:p>
+            <a:pPr algn="ctr">
+              <a:lnSpc>
+                <a:spcPts val="1152"/>
+              </a:lnSpc>
+              <a:spcBef>
+                <a:spcPts val="0"/>
+              </a:spcBef>
+              <a:spcAft>
+                <a:spcPts val="0"/>
+              </a:spcAft>
+            </a:pPr>
+            <a:r>
+              <a:rPr sz="1200" b="1">
+                <a:solidFill>
+                  <a:srgbClr val="B8DDE2"/>
+                </a:solidFill>
+                <a:latin typeface="Arial"/>
+              </a:rPr>
+              <a:t>RESEARCH COLLABORATION</a:t>
+            </a:r>
+          </a:p>
+          <a:p>
+            <a:pPr algn="ctr">
+              <a:lnSpc>
+                <a:spcPts val="2496"/>
+              </a:lnSpc>
+              <a:spcBef>
+                <a:spcPts val="1648"/>
+              </a:spcBef>
+              <a:spcAft>
+                <a:spcPts val="0"/>
+              </a:spcAft>
+            </a:pPr>
+            <a:r>
+              <a:rPr sz="2600" b="1">
+                <a:solidFill>
+                  <a:srgbClr val="FFFFFF"/>
+                </a:solidFill>
+                <a:latin typeface="Arial"/>
+              </a:rPr>
+              <a:t>Researcher + AI loop</a:t>
+            </a:r>
+          </a:p>
+          <a:p>
+            <a:pPr algn="ctr">
+              <a:lnSpc>
+                <a:spcPts val="1248"/>
+              </a:lnSpc>
+              <a:spcBef>
+                <a:spcPts val="0"/>
+              </a:spcBef>
+              <a:spcAft>
+                <a:spcPts val="0"/>
+              </a:spcAft>
+            </a:pPr>
+            <a:r>
+              <a:rPr sz="1300">
+                <a:solidFill>
+                  <a:srgbClr val="D5E4EA"/>
+                </a:solidFill>
+                <a:latin typeface="Arial"/>
+              </a:rPr>
+              <a:t>Editable annotations sit above the illustrative base.</a:t>
+            </a:r>
           </a:p>
         </p:txBody>
       </p:sp>
@@ -7236,10 +6839,51 @@
           </a:fontRef>
         </p:style>
         <p:txBody>
-          <a:bodyPr rtlCol="0" anchor="ctr"/>
-          <a:lstStyle/>
-          <a:p>
-            <a:pPr algn="ctr"/>
+          <a:bodyPr rtlCol="0" anchor="t" wrap="none" lIns="0" rIns="0" tIns="218440" bIns="0"/>
+          <a:lstStyle/>
+          <a:p>
+            <a:pPr algn="ctr">
+              <a:lnSpc>
+                <a:spcPts val="960"/>
+              </a:lnSpc>
+              <a:spcBef>
+                <a:spcPts val="0"/>
+              </a:spcBef>
+              <a:spcAft>
+                <a:spcPts val="0"/>
+              </a:spcAft>
+            </a:pPr>
+            <a:r>
+              <a:rPr sz="1000" b="1">
+                <a:solidFill>
+                  <a:srgbClr val="6E899D"/>
+                </a:solidFill>
+                <a:latin typeface="Arial"/>
+              </a:rPr>
+              <a:t>EDITABLE COLLABORATION LOOP</a:t>
+            </a:r>
+          </a:p>
+          <a:p>
+            <a:pPr algn="ctr">
+              <a:lnSpc>
+                <a:spcPts val="960"/>
+              </a:lnSpc>
+              <a:spcBef>
+                <a:spcPts val="7040"/>
+              </a:spcBef>
+              <a:spcAft>
+                <a:spcPts val="0"/>
+              </a:spcAft>
+            </a:pPr>
+            <a:r>
+              <a:rPr sz="1000">
+                <a:solidFill>
+                  <a:srgbClr val="7892A4"/>
+                </a:solidFill>
+                <a:latin typeface="Arial"/>
+              </a:rPr>
+              <a:t>Illustrative AI-generated base only • factual callouts remain editable overlays</a:t>
+            </a:r>
           </a:p>
         </p:txBody>
       </p:sp>
@@ -7281,10 +6925,51 @@
           </a:fontRef>
         </p:style>
         <p:txBody>
-          <a:bodyPr rtlCol="0" anchor="ctr"/>
-          <a:lstStyle/>
-          <a:p>
-            <a:pPr algn="ctr"/>
+          <a:bodyPr rtlCol="0" anchor="t" wrap="none" lIns="0" rIns="0" tIns="203200" bIns="0"/>
+          <a:lstStyle/>
+          <a:p>
+            <a:pPr algn="ctr">
+              <a:lnSpc>
+                <a:spcPts val="1152"/>
+              </a:lnSpc>
+              <a:spcBef>
+                <a:spcPts val="0"/>
+              </a:spcBef>
+              <a:spcAft>
+                <a:spcPts val="0"/>
+              </a:spcAft>
+            </a:pPr>
+            <a:r>
+              <a:rPr sz="1200" b="1">
+                <a:solidFill>
+                  <a:srgbClr val="15334A"/>
+                </a:solidFill>
+                <a:latin typeface="Arial"/>
+              </a:rPr>
+              <a:t>RESEARCHER</a:t>
+            </a:r>
+          </a:p>
+          <a:p>
+            <a:pPr algn="ctr">
+              <a:lnSpc>
+                <a:spcPts val="1152"/>
+              </a:lnSpc>
+              <a:spcBef>
+                <a:spcPts val="368"/>
+              </a:spcBef>
+              <a:spcAft>
+                <a:spcPts val="0"/>
+              </a:spcAft>
+            </a:pPr>
+            <a:r>
+              <a:rPr sz="1200">
+                <a:solidFill>
+                  <a:srgbClr val="557085"/>
+                </a:solidFill>
+                <a:latin typeface="Arial"/>
+              </a:rPr>
+              <a:t>Frames the question</a:t>
+            </a:r>
           </a:p>
         </p:txBody>
       </p:sp>
@@ -7441,10 +7126,51 @@
           </a:fontRef>
         </p:style>
         <p:txBody>
-          <a:bodyPr rtlCol="0" anchor="ctr"/>
-          <a:lstStyle/>
-          <a:p>
-            <a:pPr algn="ctr"/>
+          <a:bodyPr rtlCol="0" anchor="t" wrap="none" lIns="0" rIns="0" tIns="203200" bIns="0"/>
+          <a:lstStyle/>
+          <a:p>
+            <a:pPr algn="ctr">
+              <a:lnSpc>
+                <a:spcPts val="1152"/>
+              </a:lnSpc>
+              <a:spcBef>
+                <a:spcPts val="0"/>
+              </a:spcBef>
+              <a:spcAft>
+                <a:spcPts val="0"/>
+              </a:spcAft>
+            </a:pPr>
+            <a:r>
+              <a:rPr sz="1200" b="1">
+                <a:solidFill>
+                  <a:srgbClr val="15334A"/>
+                </a:solidFill>
+                <a:latin typeface="Arial"/>
+              </a:rPr>
+              <a:t>AI LAB</a:t>
+            </a:r>
+          </a:p>
+          <a:p>
+            <a:pPr algn="ctr">
+              <a:lnSpc>
+                <a:spcPts val="1152"/>
+              </a:lnSpc>
+              <a:spcBef>
+                <a:spcPts val="368"/>
+              </a:spcBef>
+              <a:spcAft>
+                <a:spcPts val="0"/>
+              </a:spcAft>
+            </a:pPr>
+            <a:r>
+              <a:rPr sz="1200">
+                <a:solidFill>
+                  <a:srgbClr val="557085"/>
+                </a:solidFill>
+                <a:latin typeface="Arial"/>
+              </a:rPr>
+              <a:t>Surfaces patterns</a:t>
+            </a:r>
           </a:p>
         </p:txBody>
       </p:sp>
@@ -7604,10 +7330,51 @@
           </a:fontRef>
         </p:style>
         <p:txBody>
-          <a:bodyPr rtlCol="0" anchor="ctr"/>
-          <a:lstStyle/>
-          <a:p>
-            <a:pPr algn="ctr"/>
+          <a:bodyPr rtlCol="0" anchor="t" wrap="none" lIns="0" rIns="0" tIns="210820" bIns="0"/>
+          <a:lstStyle/>
+          <a:p>
+            <a:pPr algn="ctr">
+              <a:lnSpc>
+                <a:spcPts val="1056"/>
+              </a:lnSpc>
+              <a:spcBef>
+                <a:spcPts val="0"/>
+              </a:spcBef>
+              <a:spcAft>
+                <a:spcPts val="0"/>
+              </a:spcAft>
+            </a:pPr>
+            <a:r>
+              <a:rPr sz="1100" b="1">
+                <a:solidFill>
+                  <a:srgbClr val="15334A"/>
+                </a:solidFill>
+                <a:latin typeface="Arial"/>
+              </a:rPr>
+              <a:t>QUESTION</a:t>
+            </a:r>
+          </a:p>
+          <a:p>
+            <a:pPr algn="ctr">
+              <a:lnSpc>
+                <a:spcPts val="1056"/>
+              </a:lnSpc>
+              <a:spcBef>
+                <a:spcPts val="464"/>
+              </a:spcBef>
+              <a:spcAft>
+                <a:spcPts val="0"/>
+              </a:spcAft>
+            </a:pPr>
+            <a:r>
+              <a:rPr sz="1100">
+                <a:solidFill>
+                  <a:srgbClr val="557085"/>
+                </a:solidFill>
+                <a:latin typeface="Arial"/>
+              </a:rPr>
+              <a:t>frame</a:t>
+            </a:r>
           </a:p>
         </p:txBody>
       </p:sp>
@@ -7649,10 +7416,51 @@
           </a:fontRef>
         </p:style>
         <p:txBody>
-          <a:bodyPr rtlCol="0" anchor="ctr"/>
-          <a:lstStyle/>
-          <a:p>
-            <a:pPr algn="ctr"/>
+          <a:bodyPr rtlCol="0" anchor="t" wrap="none" lIns="0" rIns="0" tIns="210820" bIns="0"/>
+          <a:lstStyle/>
+          <a:p>
+            <a:pPr algn="ctr">
+              <a:lnSpc>
+                <a:spcPts val="1056"/>
+              </a:lnSpc>
+              <a:spcBef>
+                <a:spcPts val="0"/>
+              </a:spcBef>
+              <a:spcAft>
+                <a:spcPts val="0"/>
+              </a:spcAft>
+            </a:pPr>
+            <a:r>
+              <a:rPr sz="1100" b="1">
+                <a:solidFill>
+                  <a:srgbClr val="15334A"/>
+                </a:solidFill>
+                <a:latin typeface="Arial"/>
+              </a:rPr>
+              <a:t>EXPERIMENT</a:t>
+            </a:r>
+          </a:p>
+          <a:p>
+            <a:pPr algn="ctr">
+              <a:lnSpc>
+                <a:spcPts val="1056"/>
+              </a:lnSpc>
+              <a:spcBef>
+                <a:spcPts val="464"/>
+              </a:spcBef>
+              <a:spcAft>
+                <a:spcPts val="0"/>
+              </a:spcAft>
+            </a:pPr>
+            <a:r>
+              <a:rPr sz="1100">
+                <a:solidFill>
+                  <a:srgbClr val="557085"/>
+                </a:solidFill>
+                <a:latin typeface="Arial"/>
+              </a:rPr>
+              <a:t>probe</a:t>
+            </a:r>
           </a:p>
         </p:txBody>
       </p:sp>
@@ -7694,10 +7502,51 @@
           </a:fontRef>
         </p:style>
         <p:txBody>
-          <a:bodyPr rtlCol="0" anchor="ctr"/>
-          <a:lstStyle/>
-          <a:p>
-            <a:pPr algn="ctr"/>
+          <a:bodyPr rtlCol="0" anchor="t" wrap="none" lIns="0" rIns="0" tIns="210820" bIns="0"/>
+          <a:lstStyle/>
+          <a:p>
+            <a:pPr algn="ctr">
+              <a:lnSpc>
+                <a:spcPts val="1056"/>
+              </a:lnSpc>
+              <a:spcBef>
+                <a:spcPts val="0"/>
+              </a:spcBef>
+              <a:spcAft>
+                <a:spcPts val="0"/>
+              </a:spcAft>
+            </a:pPr>
+            <a:r>
+              <a:rPr sz="1100" b="1">
+                <a:solidFill>
+                  <a:srgbClr val="15334A"/>
+                </a:solidFill>
+                <a:latin typeface="Arial"/>
+              </a:rPr>
+              <a:t>JUDGMENT</a:t>
+            </a:r>
+          </a:p>
+          <a:p>
+            <a:pPr algn="ctr">
+              <a:lnSpc>
+                <a:spcPts val="1056"/>
+              </a:lnSpc>
+              <a:spcBef>
+                <a:spcPts val="464"/>
+              </a:spcBef>
+              <a:spcAft>
+                <a:spcPts val="0"/>
+              </a:spcAft>
+            </a:pPr>
+            <a:r>
+              <a:rPr sz="1100">
+                <a:solidFill>
+                  <a:srgbClr val="8B6840"/>
+                </a:solidFill>
+                <a:latin typeface="Arial"/>
+              </a:rPr>
+              <a:t>review</a:t>
+            </a:r>
           </a:p>
         </p:txBody>
       </p:sp>
@@ -8051,531 +7900,6 @@
           <a:lstStyle/>
           <a:p>
             <a:pPr algn="ctr"/>
-          </a:p>
-        </p:txBody>
-      </p:sp>
-      <p:sp>
-        <p:nvSpPr>
-          <p:cNvPr id="20" name="TextBox 19"/>
-          <p:cNvSpPr txBox="1"/>
-          <p:nvPr/>
-        </p:nvSpPr>
-        <p:spPr>
-          <a:xfrm>
-            <a:off x="711200" y="619760"/>
-            <a:ext cx="1987296" cy="158496"/>
-          </a:xfrm>
-          <a:prstGeom prst="rect">
-            <a:avLst/>
-          </a:prstGeom>
-          <a:noFill/>
-        </p:spPr>
-        <p:txBody>
-          <a:bodyPr wrap="none" tIns="0" bIns="0" lIns="0" rIns="0">
-            <a:spAutoFit/>
-          </a:bodyPr>
-          <a:lstStyle/>
-          <a:p>
-            <a:pPr algn="l"/>
-            <a:r>
-              <a:rPr sz="1200" b="1">
-                <a:solidFill>
-                  <a:srgbClr val="B8DDE2"/>
-                </a:solidFill>
-                <a:latin typeface="Arial"/>
-              </a:rPr>
-              <a:t>RESEARCH COLLABORATION</a:t>
-            </a:r>
-          </a:p>
-        </p:txBody>
-      </p:sp>
-      <p:sp>
-        <p:nvSpPr>
-          <p:cNvPr id="21" name="TextBox 20"/>
-          <p:cNvSpPr txBox="1"/>
-          <p:nvPr/>
-        </p:nvSpPr>
-        <p:spPr>
-          <a:xfrm>
-            <a:off x="711200" y="868680"/>
-            <a:ext cx="3677920" cy="343408"/>
-          </a:xfrm>
-          <a:prstGeom prst="rect">
-            <a:avLst/>
-          </a:prstGeom>
-          <a:noFill/>
-        </p:spPr>
-        <p:txBody>
-          <a:bodyPr wrap="none" tIns="0" bIns="0" lIns="0" rIns="0">
-            <a:spAutoFit/>
-          </a:bodyPr>
-          <a:lstStyle/>
-          <a:p>
-            <a:pPr algn="l"/>
-            <a:r>
-              <a:rPr sz="2600" b="1">
-                <a:solidFill>
-                  <a:srgbClr val="FFFFFF"/>
-                </a:solidFill>
-                <a:latin typeface="Arial"/>
-              </a:rPr>
-              <a:t>Researcher + AI loop</a:t>
-            </a:r>
-          </a:p>
-        </p:txBody>
-      </p:sp>
-      <p:sp>
-        <p:nvSpPr>
-          <p:cNvPr id="22" name="TextBox 21"/>
-          <p:cNvSpPr txBox="1"/>
-          <p:nvPr/>
-        </p:nvSpPr>
-        <p:spPr>
-          <a:xfrm>
-            <a:off x="711200" y="1201420"/>
-            <a:ext cx="4793996" cy="171704"/>
-          </a:xfrm>
-          <a:prstGeom prst="rect">
-            <a:avLst/>
-          </a:prstGeom>
-          <a:noFill/>
-        </p:spPr>
-        <p:txBody>
-          <a:bodyPr wrap="none" tIns="0" bIns="0" lIns="0" rIns="0">
-            <a:spAutoFit/>
-          </a:bodyPr>
-          <a:lstStyle/>
-          <a:p>
-            <a:pPr algn="l"/>
-            <a:r>
-              <a:rPr sz="1300">
-                <a:solidFill>
-                  <a:srgbClr val="D5E4EA"/>
-                </a:solidFill>
-                <a:latin typeface="Arial"/>
-              </a:rPr>
-              <a:t>Editable annotations sit above the illustrative base.</a:t>
-            </a:r>
-          </a:p>
-        </p:txBody>
-      </p:sp>
-      <p:sp>
-        <p:nvSpPr>
-          <p:cNvPr id="23" name="TextBox 22"/>
-          <p:cNvSpPr txBox="1"/>
-          <p:nvPr/>
-        </p:nvSpPr>
-        <p:spPr>
-          <a:xfrm>
-            <a:off x="1137920" y="5425440"/>
-            <a:ext cx="1036320" cy="158496"/>
-          </a:xfrm>
-          <a:prstGeom prst="rect">
-            <a:avLst/>
-          </a:prstGeom>
-          <a:noFill/>
-        </p:spPr>
-        <p:txBody>
-          <a:bodyPr wrap="none" tIns="0" bIns="0" lIns="0" rIns="0">
-            <a:spAutoFit/>
-          </a:bodyPr>
-          <a:lstStyle/>
-          <a:p>
-            <a:pPr algn="l"/>
-            <a:r>
-              <a:rPr sz="1200" b="1">
-                <a:solidFill>
-                  <a:srgbClr val="15334A"/>
-                </a:solidFill>
-                <a:latin typeface="Arial"/>
-              </a:rPr>
-              <a:t>RESEARCHER</a:t>
-            </a:r>
-          </a:p>
-        </p:txBody>
-      </p:sp>
-      <p:sp>
-        <p:nvSpPr>
-          <p:cNvPr id="24" name="TextBox 23"/>
-          <p:cNvSpPr txBox="1"/>
-          <p:nvPr/>
-        </p:nvSpPr>
-        <p:spPr>
-          <a:xfrm>
-            <a:off x="1137920" y="5618480"/>
-            <a:ext cx="1749552" cy="158496"/>
-          </a:xfrm>
-          <a:prstGeom prst="rect">
-            <a:avLst/>
-          </a:prstGeom>
-          <a:noFill/>
-        </p:spPr>
-        <p:txBody>
-          <a:bodyPr wrap="none" tIns="0" bIns="0" lIns="0" rIns="0">
-            <a:spAutoFit/>
-          </a:bodyPr>
-          <a:lstStyle/>
-          <a:p>
-            <a:pPr algn="l"/>
-            <a:r>
-              <a:rPr sz="1200">
-                <a:solidFill>
-                  <a:srgbClr val="557085"/>
-                </a:solidFill>
-                <a:latin typeface="Arial"/>
-              </a:rPr>
-              <a:t>Frames the question</a:t>
-            </a:r>
-          </a:p>
-        </p:txBody>
-      </p:sp>
-      <p:sp>
-        <p:nvSpPr>
-          <p:cNvPr id="25" name="TextBox 24"/>
-          <p:cNvSpPr txBox="1"/>
-          <p:nvPr/>
-        </p:nvSpPr>
-        <p:spPr>
-          <a:xfrm>
-            <a:off x="9489440" y="5425440"/>
-            <a:ext cx="719328" cy="158496"/>
-          </a:xfrm>
-          <a:prstGeom prst="rect">
-            <a:avLst/>
-          </a:prstGeom>
-          <a:noFill/>
-        </p:spPr>
-        <p:txBody>
-          <a:bodyPr wrap="none" tIns="0" bIns="0" lIns="0" rIns="0">
-            <a:spAutoFit/>
-          </a:bodyPr>
-          <a:lstStyle/>
-          <a:p>
-            <a:pPr algn="l"/>
-            <a:r>
-              <a:rPr sz="1200" b="1">
-                <a:solidFill>
-                  <a:srgbClr val="15334A"/>
-                </a:solidFill>
-                <a:latin typeface="Arial"/>
-              </a:rPr>
-              <a:t>AI LAB</a:t>
-            </a:r>
-          </a:p>
-        </p:txBody>
-      </p:sp>
-      <p:sp>
-        <p:nvSpPr>
-          <p:cNvPr id="26" name="TextBox 25"/>
-          <p:cNvSpPr txBox="1"/>
-          <p:nvPr/>
-        </p:nvSpPr>
-        <p:spPr>
-          <a:xfrm>
-            <a:off x="9489440" y="5618480"/>
-            <a:ext cx="1591056" cy="158496"/>
-          </a:xfrm>
-          <a:prstGeom prst="rect">
-            <a:avLst/>
-          </a:prstGeom>
-          <a:noFill/>
-        </p:spPr>
-        <p:txBody>
-          <a:bodyPr wrap="none" tIns="0" bIns="0" lIns="0" rIns="0">
-            <a:spAutoFit/>
-          </a:bodyPr>
-          <a:lstStyle/>
-          <a:p>
-            <a:pPr algn="l"/>
-            <a:r>
-              <a:rPr sz="1200">
-                <a:solidFill>
-                  <a:srgbClr val="557085"/>
-                </a:solidFill>
-                <a:latin typeface="Arial"/>
-              </a:rPr>
-              <a:t>Surfaces patterns</a:t>
-            </a:r>
-          </a:p>
-        </p:txBody>
-      </p:sp>
-      <p:sp>
-        <p:nvSpPr>
-          <p:cNvPr id="27" name="TextBox 26"/>
-          <p:cNvSpPr txBox="1"/>
-          <p:nvPr/>
-        </p:nvSpPr>
-        <p:spPr>
-          <a:xfrm>
-            <a:off x="731520" y="5105400"/>
-            <a:ext cx="2026920" cy="132080"/>
-          </a:xfrm>
-          <a:prstGeom prst="rect">
-            <a:avLst/>
-          </a:prstGeom>
-          <a:noFill/>
-        </p:spPr>
-        <p:txBody>
-          <a:bodyPr wrap="none" tIns="0" bIns="0" lIns="0" rIns="0">
-            <a:spAutoFit/>
-          </a:bodyPr>
-          <a:lstStyle/>
-          <a:p>
-            <a:pPr algn="l"/>
-            <a:r>
-              <a:rPr sz="1000" b="1">
-                <a:solidFill>
-                  <a:srgbClr val="6E899D"/>
-                </a:solidFill>
-                <a:latin typeface="Arial"/>
-              </a:rPr>
-              <a:t>EDITABLE COLLABORATION LOOP</a:t>
-            </a:r>
-          </a:p>
-        </p:txBody>
-      </p:sp>
-      <p:sp>
-        <p:nvSpPr>
-          <p:cNvPr id="28" name="TextBox 27"/>
-          <p:cNvSpPr txBox="1"/>
-          <p:nvPr/>
-        </p:nvSpPr>
-        <p:spPr>
-          <a:xfrm>
-            <a:off x="3407664" y="5433060"/>
-            <a:ext cx="824992" cy="145288"/>
-          </a:xfrm>
-          <a:prstGeom prst="rect">
-            <a:avLst/>
-          </a:prstGeom>
-          <a:noFill/>
-        </p:spPr>
-        <p:txBody>
-          <a:bodyPr wrap="none" tIns="0" bIns="0" lIns="0" rIns="0">
-            <a:spAutoFit/>
-          </a:bodyPr>
-          <a:lstStyle/>
-          <a:p>
-            <a:pPr algn="ctr"/>
-            <a:r>
-              <a:rPr sz="1100" b="1">
-                <a:solidFill>
-                  <a:srgbClr val="15334A"/>
-                </a:solidFill>
-                <a:latin typeface="Arial"/>
-              </a:rPr>
-              <a:t>QUESTION</a:t>
-            </a:r>
-          </a:p>
-        </p:txBody>
-      </p:sp>
-      <p:sp>
-        <p:nvSpPr>
-          <p:cNvPr id="29" name="TextBox 28"/>
-          <p:cNvSpPr txBox="1"/>
-          <p:nvPr/>
-        </p:nvSpPr>
-        <p:spPr>
-          <a:xfrm>
-            <a:off x="3516630" y="5626100"/>
-            <a:ext cx="607060" cy="145288"/>
-          </a:xfrm>
-          <a:prstGeom prst="rect">
-            <a:avLst/>
-          </a:prstGeom>
-          <a:noFill/>
-        </p:spPr>
-        <p:txBody>
-          <a:bodyPr wrap="none" tIns="0" bIns="0" lIns="0" rIns="0">
-            <a:spAutoFit/>
-          </a:bodyPr>
-          <a:lstStyle/>
-          <a:p>
-            <a:pPr algn="ctr"/>
-            <a:r>
-              <a:rPr sz="1100">
-                <a:solidFill>
-                  <a:srgbClr val="557085"/>
-                </a:solidFill>
-                <a:latin typeface="Arial"/>
-              </a:rPr>
-              <a:t>frame</a:t>
-            </a:r>
-          </a:p>
-        </p:txBody>
-      </p:sp>
-      <p:sp>
-        <p:nvSpPr>
-          <p:cNvPr id="30" name="TextBox 29"/>
-          <p:cNvSpPr txBox="1"/>
-          <p:nvPr/>
-        </p:nvSpPr>
-        <p:spPr>
-          <a:xfrm>
-            <a:off x="4919980" y="5433060"/>
-            <a:ext cx="970280" cy="145288"/>
-          </a:xfrm>
-          <a:prstGeom prst="rect">
-            <a:avLst/>
-          </a:prstGeom>
-          <a:noFill/>
-        </p:spPr>
-        <p:txBody>
-          <a:bodyPr wrap="none" tIns="0" bIns="0" lIns="0" rIns="0">
-            <a:spAutoFit/>
-          </a:bodyPr>
-          <a:lstStyle/>
-          <a:p>
-            <a:pPr algn="ctr"/>
-            <a:r>
-              <a:rPr sz="1100" b="1">
-                <a:solidFill>
-                  <a:srgbClr val="15334A"/>
-                </a:solidFill>
-                <a:latin typeface="Arial"/>
-              </a:rPr>
-              <a:t>EXPERIMENT</a:t>
-            </a:r>
-          </a:p>
-        </p:txBody>
-      </p:sp>
-      <p:sp>
-        <p:nvSpPr>
-          <p:cNvPr id="31" name="TextBox 30"/>
-          <p:cNvSpPr txBox="1"/>
-          <p:nvPr/>
-        </p:nvSpPr>
-        <p:spPr>
-          <a:xfrm>
-            <a:off x="5101590" y="5626100"/>
-            <a:ext cx="607060" cy="145288"/>
-          </a:xfrm>
-          <a:prstGeom prst="rect">
-            <a:avLst/>
-          </a:prstGeom>
-          <a:noFill/>
-        </p:spPr>
-        <p:txBody>
-          <a:bodyPr wrap="none" tIns="0" bIns="0" lIns="0" rIns="0">
-            <a:spAutoFit/>
-          </a:bodyPr>
-          <a:lstStyle/>
-          <a:p>
-            <a:pPr algn="ctr"/>
-            <a:r>
-              <a:rPr sz="1100">
-                <a:solidFill>
-                  <a:srgbClr val="557085"/>
-                </a:solidFill>
-                <a:latin typeface="Arial"/>
-              </a:rPr>
-              <a:t>probe</a:t>
-            </a:r>
-          </a:p>
-        </p:txBody>
-      </p:sp>
-      <p:sp>
-        <p:nvSpPr>
-          <p:cNvPr id="32" name="TextBox 31"/>
-          <p:cNvSpPr txBox="1"/>
-          <p:nvPr/>
-        </p:nvSpPr>
-        <p:spPr>
-          <a:xfrm>
-            <a:off x="6577584" y="5433060"/>
-            <a:ext cx="824992" cy="145288"/>
-          </a:xfrm>
-          <a:prstGeom prst="rect">
-            <a:avLst/>
-          </a:prstGeom>
-          <a:noFill/>
-        </p:spPr>
-        <p:txBody>
-          <a:bodyPr wrap="none" tIns="0" bIns="0" lIns="0" rIns="0">
-            <a:spAutoFit/>
-          </a:bodyPr>
-          <a:lstStyle/>
-          <a:p>
-            <a:pPr algn="ctr"/>
-            <a:r>
-              <a:rPr sz="1100" b="1">
-                <a:solidFill>
-                  <a:srgbClr val="15334A"/>
-                </a:solidFill>
-                <a:latin typeface="Arial"/>
-              </a:rPr>
-              <a:t>JUDGMENT</a:t>
-            </a:r>
-          </a:p>
-        </p:txBody>
-      </p:sp>
-      <p:sp>
-        <p:nvSpPr>
-          <p:cNvPr id="33" name="TextBox 32"/>
-          <p:cNvSpPr txBox="1"/>
-          <p:nvPr/>
-        </p:nvSpPr>
-        <p:spPr>
-          <a:xfrm>
-            <a:off x="6650228" y="5626100"/>
-            <a:ext cx="679704" cy="145288"/>
-          </a:xfrm>
-          <a:prstGeom prst="rect">
-            <a:avLst/>
-          </a:prstGeom>
-          <a:noFill/>
-        </p:spPr>
-        <p:txBody>
-          <a:bodyPr wrap="none" tIns="0" bIns="0" lIns="0" rIns="0">
-            <a:spAutoFit/>
-          </a:bodyPr>
-          <a:lstStyle/>
-          <a:p>
-            <a:pPr algn="ctr"/>
-            <a:r>
-              <a:rPr sz="1100">
-                <a:solidFill>
-                  <a:srgbClr val="8B6840"/>
-                </a:solidFill>
-                <a:latin typeface="Arial"/>
-              </a:rPr>
-              <a:t>review</a:t>
-            </a:r>
-          </a:p>
-        </p:txBody>
-      </p:sp>
-      <p:sp>
-        <p:nvSpPr>
-          <p:cNvPr id="34" name="TextBox 33"/>
-          <p:cNvSpPr txBox="1"/>
-          <p:nvPr/>
-        </p:nvSpPr>
-        <p:spPr>
-          <a:xfrm>
-            <a:off x="731520" y="6121400"/>
-            <a:ext cx="5461000" cy="132080"/>
-          </a:xfrm>
-          <a:prstGeom prst="rect">
-            <a:avLst/>
-          </a:prstGeom>
-          <a:noFill/>
-        </p:spPr>
-        <p:txBody>
-          <a:bodyPr wrap="none" tIns="0" bIns="0" lIns="0" rIns="0">
-            <a:spAutoFit/>
-          </a:bodyPr>
-          <a:lstStyle/>
-          <a:p>
-            <a:pPr algn="l"/>
-            <a:r>
-              <a:rPr sz="1000">
-                <a:solidFill>
-                  <a:srgbClr val="7892A4"/>
-                </a:solidFill>
-                <a:latin typeface="Arial"/>
-              </a:rPr>
-              <a:t>Illustrative AI-generated base only • factual callouts remain editable overlays</a:t>
-            </a:r>
           </a:p>
         </p:txBody>
       </p:sp>

--- a/examples/report-slides/visual-authoring/deck.pptx
+++ b/examples/report-slides/visual-authoring/deck.pptx
@@ -3105,7 +3105,7 @@
             <a:avLst/>
           </a:prstGeom>
           <a:solidFill>
-            <a:srgbClr val="F7FAFC"/>
+            <a:srgbClr val="FFFFFF"/>
           </a:solidFill>
           <a:ln>
             <a:noFill/>
@@ -3141,7 +3141,7 @@
         </p:nvSpPr>
         <p:spPr>
           <a:xfrm>
-            <a:off x="487680" y="1391920"/>
+            <a:off x="487680" y="1625600"/>
             <a:ext cx="11216640" cy="1"/>
           </a:xfrm>
           <a:custGeom>
@@ -3164,7 +3164,7 @@
           <a:noFill/>
           <a:ln w="25400">
             <a:solidFill>
-              <a:srgbClr val="D9E5EC"/>
+              <a:srgbClr val="E2E8F0"/>
             </a:solidFill>
           </a:ln>
         </p:spPr>
@@ -3192,36 +3192,26 @@
       </p:sp>
       <p:sp>
         <p:nvSpPr>
-          <p:cNvPr id="4" name="Rectangle 3"/>
+          <p:cNvPr id="4" name="Rounded Rectangle 3"/>
           <p:cNvSpPr/>
           <p:nvPr/>
         </p:nvSpPr>
         <p:spPr>
           <a:xfrm>
-            <a:off x="2397760" y="3556000"/>
-            <a:ext cx="325120" cy="1"/>
-          </a:xfrm>
-          <a:custGeom>
-            <a:avLst/>
-            <a:gdLst/>
-            <a:ahLst/>
-            <a:cxnLst/>
-            <a:rect l="0" t="0" r="r" b="b"/>
-            <a:pathLst>
-              <a:path w="325120" h="1">
-                <a:moveTo>
-                  <a:pt x="0" y="0"/>
-                </a:moveTo>
-                <a:lnTo>
-                  <a:pt x="325120" y="0"/>
-                </a:lnTo>
-              </a:path>
-            </a:pathLst>
-          </a:custGeom>
-          <a:noFill/>
-          <a:ln w="31750">
+            <a:off x="487680" y="2194560"/>
+            <a:ext cx="2032000" cy="2194560"/>
+          </a:xfrm>
+          <a:prstGeom prst="roundRect">
+            <a:avLst>
+              <a:gd name="adj" fmla="val 4000"/>
+            </a:avLst>
+          </a:prstGeom>
+          <a:solidFill>
+            <a:srgbClr val="F8FAFC"/>
+          </a:solidFill>
+          <a:ln w="19050">
             <a:solidFill>
-              <a:srgbClr val="6B9AB2"/>
+              <a:srgbClr val="E2E8F0"/>
             </a:solidFill>
           </a:ln>
         </p:spPr>
@@ -3240,468 +3230,12 @@
           </a:fontRef>
         </p:style>
         <p:txBody>
-          <a:bodyPr rtlCol="0" anchor="ctr"/>
-          <a:lstStyle/>
-          <a:p>
-            <a:pPr algn="ctr"/>
-          </a:p>
-        </p:txBody>
-      </p:sp>
-      <p:sp>
-        <p:nvSpPr>
-          <p:cNvPr id="5" name="Rectangle 4"/>
-          <p:cNvSpPr/>
-          <p:nvPr/>
-        </p:nvSpPr>
-        <p:spPr>
-          <a:xfrm>
-            <a:off x="2651760" y="3495040"/>
-            <a:ext cx="91440" cy="121920"/>
-          </a:xfrm>
-          <a:custGeom>
-            <a:avLst/>
-            <a:gdLst/>
-            <a:ahLst/>
-            <a:cxnLst/>
-            <a:rect l="0" t="0" r="r" b="b"/>
-            <a:pathLst>
-              <a:path w="91440" h="121920">
-                <a:moveTo>
-                  <a:pt x="0" y="0"/>
-                </a:moveTo>
-                <a:lnTo>
-                  <a:pt x="91440" y="60960"/>
-                </a:lnTo>
-                <a:lnTo>
-                  <a:pt x="0" y="121920"/>
-                </a:lnTo>
-              </a:path>
-            </a:pathLst>
-          </a:custGeom>
-          <a:noFill/>
-          <a:ln w="31750">
-            <a:solidFill>
-              <a:srgbClr val="6B9AB2"/>
-            </a:solidFill>
-          </a:ln>
-        </p:spPr>
-        <p:style>
-          <a:lnRef idx="1">
-            <a:schemeClr val="accent1"/>
-          </a:lnRef>
-          <a:fillRef idx="3">
-            <a:schemeClr val="accent1"/>
-          </a:fillRef>
-          <a:effectRef idx="2">
-            <a:schemeClr val="accent1"/>
-          </a:effectRef>
-          <a:fontRef idx="minor">
-            <a:schemeClr val="lt1"/>
-          </a:fontRef>
-        </p:style>
-        <p:txBody>
-          <a:bodyPr rtlCol="0" anchor="ctr"/>
-          <a:lstStyle/>
-          <a:p>
-            <a:pPr algn="ctr"/>
-          </a:p>
-        </p:txBody>
-      </p:sp>
-      <p:sp>
-        <p:nvSpPr>
-          <p:cNvPr id="6" name="Rectangle 5"/>
-          <p:cNvSpPr/>
-          <p:nvPr/>
-        </p:nvSpPr>
-        <p:spPr>
-          <a:xfrm>
-            <a:off x="4714240" y="3556000"/>
-            <a:ext cx="325120" cy="1"/>
-          </a:xfrm>
-          <a:custGeom>
-            <a:avLst/>
-            <a:gdLst/>
-            <a:ahLst/>
-            <a:cxnLst/>
-            <a:rect l="0" t="0" r="r" b="b"/>
-            <a:pathLst>
-              <a:path w="325120" h="1">
-                <a:moveTo>
-                  <a:pt x="0" y="0"/>
-                </a:moveTo>
-                <a:lnTo>
-                  <a:pt x="325120" y="0"/>
-                </a:lnTo>
-              </a:path>
-            </a:pathLst>
-          </a:custGeom>
-          <a:noFill/>
-          <a:ln w="31750">
-            <a:solidFill>
-              <a:srgbClr val="6B9AB2"/>
-            </a:solidFill>
-          </a:ln>
-        </p:spPr>
-        <p:style>
-          <a:lnRef idx="1">
-            <a:schemeClr val="accent1"/>
-          </a:lnRef>
-          <a:fillRef idx="3">
-            <a:schemeClr val="accent1"/>
-          </a:fillRef>
-          <a:effectRef idx="2">
-            <a:schemeClr val="accent1"/>
-          </a:effectRef>
-          <a:fontRef idx="minor">
-            <a:schemeClr val="lt1"/>
-          </a:fontRef>
-        </p:style>
-        <p:txBody>
-          <a:bodyPr rtlCol="0" anchor="ctr"/>
-          <a:lstStyle/>
-          <a:p>
-            <a:pPr algn="ctr"/>
-          </a:p>
-        </p:txBody>
-      </p:sp>
-      <p:sp>
-        <p:nvSpPr>
-          <p:cNvPr id="7" name="Rectangle 6"/>
-          <p:cNvSpPr/>
-          <p:nvPr/>
-        </p:nvSpPr>
-        <p:spPr>
-          <a:xfrm>
-            <a:off x="4968240" y="3495040"/>
-            <a:ext cx="91440" cy="121920"/>
-          </a:xfrm>
-          <a:custGeom>
-            <a:avLst/>
-            <a:gdLst/>
-            <a:ahLst/>
-            <a:cxnLst/>
-            <a:rect l="0" t="0" r="r" b="b"/>
-            <a:pathLst>
-              <a:path w="91440" h="121920">
-                <a:moveTo>
-                  <a:pt x="0" y="0"/>
-                </a:moveTo>
-                <a:lnTo>
-                  <a:pt x="91440" y="60960"/>
-                </a:lnTo>
-                <a:lnTo>
-                  <a:pt x="0" y="121920"/>
-                </a:lnTo>
-              </a:path>
-            </a:pathLst>
-          </a:custGeom>
-          <a:noFill/>
-          <a:ln w="31750">
-            <a:solidFill>
-              <a:srgbClr val="6B9AB2"/>
-            </a:solidFill>
-          </a:ln>
-        </p:spPr>
-        <p:style>
-          <a:lnRef idx="1">
-            <a:schemeClr val="accent1"/>
-          </a:lnRef>
-          <a:fillRef idx="3">
-            <a:schemeClr val="accent1"/>
-          </a:fillRef>
-          <a:effectRef idx="2">
-            <a:schemeClr val="accent1"/>
-          </a:effectRef>
-          <a:fontRef idx="minor">
-            <a:schemeClr val="lt1"/>
-          </a:fontRef>
-        </p:style>
-        <p:txBody>
-          <a:bodyPr rtlCol="0" anchor="ctr"/>
-          <a:lstStyle/>
-          <a:p>
-            <a:pPr algn="ctr"/>
-          </a:p>
-        </p:txBody>
-      </p:sp>
-      <p:sp>
-        <p:nvSpPr>
-          <p:cNvPr id="8" name="Rectangle 7"/>
-          <p:cNvSpPr/>
-          <p:nvPr/>
-        </p:nvSpPr>
-        <p:spPr>
-          <a:xfrm>
-            <a:off x="7030720" y="3556000"/>
-            <a:ext cx="325120" cy="1"/>
-          </a:xfrm>
-          <a:custGeom>
-            <a:avLst/>
-            <a:gdLst/>
-            <a:ahLst/>
-            <a:cxnLst/>
-            <a:rect l="0" t="0" r="r" b="b"/>
-            <a:pathLst>
-              <a:path w="325120" h="1">
-                <a:moveTo>
-                  <a:pt x="0" y="0"/>
-                </a:moveTo>
-                <a:lnTo>
-                  <a:pt x="325120" y="0"/>
-                </a:lnTo>
-              </a:path>
-            </a:pathLst>
-          </a:custGeom>
-          <a:noFill/>
-          <a:ln w="31750">
-            <a:solidFill>
-              <a:srgbClr val="6B9AB2"/>
-            </a:solidFill>
-          </a:ln>
-        </p:spPr>
-        <p:style>
-          <a:lnRef idx="1">
-            <a:schemeClr val="accent1"/>
-          </a:lnRef>
-          <a:fillRef idx="3">
-            <a:schemeClr val="accent1"/>
-          </a:fillRef>
-          <a:effectRef idx="2">
-            <a:schemeClr val="accent1"/>
-          </a:effectRef>
-          <a:fontRef idx="minor">
-            <a:schemeClr val="lt1"/>
-          </a:fontRef>
-        </p:style>
-        <p:txBody>
-          <a:bodyPr rtlCol="0" anchor="ctr"/>
-          <a:lstStyle/>
-          <a:p>
-            <a:pPr algn="ctr"/>
-          </a:p>
-        </p:txBody>
-      </p:sp>
-      <p:sp>
-        <p:nvSpPr>
-          <p:cNvPr id="9" name="Rectangle 8"/>
-          <p:cNvSpPr/>
-          <p:nvPr/>
-        </p:nvSpPr>
-        <p:spPr>
-          <a:xfrm>
-            <a:off x="7284720" y="3495040"/>
-            <a:ext cx="91440" cy="121920"/>
-          </a:xfrm>
-          <a:custGeom>
-            <a:avLst/>
-            <a:gdLst/>
-            <a:ahLst/>
-            <a:cxnLst/>
-            <a:rect l="0" t="0" r="r" b="b"/>
-            <a:pathLst>
-              <a:path w="91440" h="121920">
-                <a:moveTo>
-                  <a:pt x="0" y="0"/>
-                </a:moveTo>
-                <a:lnTo>
-                  <a:pt x="91440" y="60960"/>
-                </a:lnTo>
-                <a:lnTo>
-                  <a:pt x="0" y="121920"/>
-                </a:lnTo>
-              </a:path>
-            </a:pathLst>
-          </a:custGeom>
-          <a:noFill/>
-          <a:ln w="31750">
-            <a:solidFill>
-              <a:srgbClr val="6B9AB2"/>
-            </a:solidFill>
-          </a:ln>
-        </p:spPr>
-        <p:style>
-          <a:lnRef idx="1">
-            <a:schemeClr val="accent1"/>
-          </a:lnRef>
-          <a:fillRef idx="3">
-            <a:schemeClr val="accent1"/>
-          </a:fillRef>
-          <a:effectRef idx="2">
-            <a:schemeClr val="accent1"/>
-          </a:effectRef>
-          <a:fontRef idx="minor">
-            <a:schemeClr val="lt1"/>
-          </a:fontRef>
-        </p:style>
-        <p:txBody>
-          <a:bodyPr rtlCol="0" anchor="ctr"/>
-          <a:lstStyle/>
-          <a:p>
-            <a:pPr algn="ctr"/>
-          </a:p>
-        </p:txBody>
-      </p:sp>
-      <p:sp>
-        <p:nvSpPr>
-          <p:cNvPr id="10" name="Rectangle 9"/>
-          <p:cNvSpPr/>
-          <p:nvPr/>
-        </p:nvSpPr>
-        <p:spPr>
-          <a:xfrm>
-            <a:off x="9347200" y="3556000"/>
-            <a:ext cx="325120" cy="1"/>
-          </a:xfrm>
-          <a:custGeom>
-            <a:avLst/>
-            <a:gdLst/>
-            <a:ahLst/>
-            <a:cxnLst/>
-            <a:rect l="0" t="0" r="r" b="b"/>
-            <a:pathLst>
-              <a:path w="325120" h="1">
-                <a:moveTo>
-                  <a:pt x="0" y="0"/>
-                </a:moveTo>
-                <a:lnTo>
-                  <a:pt x="325120" y="0"/>
-                </a:lnTo>
-              </a:path>
-            </a:pathLst>
-          </a:custGeom>
-          <a:noFill/>
-          <a:ln w="31750">
-            <a:solidFill>
-              <a:srgbClr val="6B9AB2"/>
-            </a:solidFill>
-          </a:ln>
-        </p:spPr>
-        <p:style>
-          <a:lnRef idx="1">
-            <a:schemeClr val="accent1"/>
-          </a:lnRef>
-          <a:fillRef idx="3">
-            <a:schemeClr val="accent1"/>
-          </a:fillRef>
-          <a:effectRef idx="2">
-            <a:schemeClr val="accent1"/>
-          </a:effectRef>
-          <a:fontRef idx="minor">
-            <a:schemeClr val="lt1"/>
-          </a:fontRef>
-        </p:style>
-        <p:txBody>
-          <a:bodyPr rtlCol="0" anchor="ctr"/>
-          <a:lstStyle/>
-          <a:p>
-            <a:pPr algn="ctr"/>
-          </a:p>
-        </p:txBody>
-      </p:sp>
-      <p:sp>
-        <p:nvSpPr>
-          <p:cNvPr id="11" name="Rectangle 10"/>
-          <p:cNvSpPr/>
-          <p:nvPr/>
-        </p:nvSpPr>
-        <p:spPr>
-          <a:xfrm>
-            <a:off x="9601200" y="3495040"/>
-            <a:ext cx="91440" cy="121920"/>
-          </a:xfrm>
-          <a:custGeom>
-            <a:avLst/>
-            <a:gdLst/>
-            <a:ahLst/>
-            <a:cxnLst/>
-            <a:rect l="0" t="0" r="r" b="b"/>
-            <a:pathLst>
-              <a:path w="91440" h="121920">
-                <a:moveTo>
-                  <a:pt x="0" y="0"/>
-                </a:moveTo>
-                <a:lnTo>
-                  <a:pt x="91440" y="60960"/>
-                </a:lnTo>
-                <a:lnTo>
-                  <a:pt x="0" y="121920"/>
-                </a:lnTo>
-              </a:path>
-            </a:pathLst>
-          </a:custGeom>
-          <a:noFill/>
-          <a:ln w="31750">
-            <a:solidFill>
-              <a:srgbClr val="6B9AB2"/>
-            </a:solidFill>
-          </a:ln>
-        </p:spPr>
-        <p:style>
-          <a:lnRef idx="1">
-            <a:schemeClr val="accent1"/>
-          </a:lnRef>
-          <a:fillRef idx="3">
-            <a:schemeClr val="accent1"/>
-          </a:fillRef>
-          <a:effectRef idx="2">
-            <a:schemeClr val="accent1"/>
-          </a:effectRef>
-          <a:fontRef idx="minor">
-            <a:schemeClr val="lt1"/>
-          </a:fontRef>
-        </p:style>
-        <p:txBody>
-          <a:bodyPr rtlCol="0" anchor="ctr"/>
-          <a:lstStyle/>
-          <a:p>
-            <a:pPr algn="ctr"/>
-          </a:p>
-        </p:txBody>
-      </p:sp>
-      <p:sp>
-        <p:nvSpPr>
-          <p:cNvPr id="12" name="Rectangle 11"/>
-          <p:cNvSpPr/>
-          <p:nvPr/>
-        </p:nvSpPr>
-        <p:spPr>
-          <a:xfrm>
-            <a:off x="487680" y="2103120"/>
-            <a:ext cx="1910080" cy="3048000"/>
-          </a:xfrm>
-          <a:prstGeom prst="rect">
-            <a:avLst/>
-          </a:prstGeom>
-          <a:solidFill>
-            <a:srgbClr val="FFFFFF"/>
-          </a:solidFill>
-          <a:ln w="25400">
-            <a:solidFill>
-              <a:srgbClr val="B9CCD9"/>
-            </a:solidFill>
-          </a:ln>
-        </p:spPr>
-        <p:style>
-          <a:lnRef idx="1">
-            <a:schemeClr val="accent1"/>
-          </a:lnRef>
-          <a:fillRef idx="3">
-            <a:schemeClr val="accent1"/>
-          </a:fillRef>
-          <a:effectRef idx="2">
-            <a:schemeClr val="accent1"/>
-          </a:effectRef>
-          <a:fontRef idx="minor">
-            <a:schemeClr val="lt1"/>
-          </a:fontRef>
-        </p:style>
-        <p:txBody>
-          <a:bodyPr rtlCol="0" anchor="t" wrap="none" lIns="0" rIns="0" tIns="325120" bIns="0"/>
-          <a:lstStyle/>
-          <a:p>
-            <a:pPr algn="ctr">
+          <a:bodyPr rtlCol="0" anchor="t" wrap="none" lIns="0" rIns="0" tIns="635000" bIns="0"/>
+          <a:lstStyle/>
+          <a:p>
+            <a:pPr algn="l" marL="243840">
               <a:lnSpc>
-                <a:spcPts val="1152"/>
+                <a:spcPts val="1728"/>
               </a:lnSpc>
               <a:spcBef>
                 <a:spcPts val="0"/>
@@ -3711,22 +3245,22 @@
               </a:spcAft>
             </a:pPr>
             <a:r>
-              <a:rPr sz="1200" b="1">
-                <a:solidFill>
-                  <a:srgbClr val="6E899D"/>
-                </a:solidFill>
-                <a:latin typeface="Arial"/>
+              <a:rPr sz="1800" b="1">
+                <a:solidFill>
+                  <a:srgbClr val="1E3A5F"/>
+                </a:solidFill>
+                <a:latin typeface="DejaVu Sans"/>
               </a:rPr>
-              <a:t>01</a:t>
-            </a:r>
-          </a:p>
-          <a:p>
-            <a:pPr algn="ctr">
+              <a:t>Data</a:t>
+            </a:r>
+          </a:p>
+          <a:p>
+            <a:pPr algn="l" marL="243840">
               <a:lnSpc>
                 <a:spcPts val="1728"/>
               </a:lnSpc>
               <a:spcBef>
-                <a:spcPts val="7328"/>
+                <a:spcPts val="192"/>
               </a:spcBef>
               <a:spcAft>
                 <a:spcPts val="0"/>
@@ -3735,83 +3269,105 @@
             <a:r>
               <a:rPr sz="1800" b="1">
                 <a:solidFill>
-                  <a:srgbClr val="15334A"/>
-                </a:solidFill>
-                <a:latin typeface="Arial"/>
+                  <a:srgbClr val="1E3A5F"/>
+                </a:solidFill>
+                <a:latin typeface="DejaVu Sans"/>
               </a:rPr>
-              <a:t>Data sources</a:t>
-            </a:r>
-          </a:p>
-          <a:p>
-            <a:pPr algn="ctr">
+              <a:t>sources</a:t>
+            </a:r>
+          </a:p>
+          <a:p>
+            <a:pPr algn="l" marL="243840">
               <a:lnSpc>
-                <a:spcPts val="1344"/>
+                <a:spcPts val="1536"/>
               </a:lnSpc>
               <a:spcBef>
-                <a:spcPts val="1712"/>
+                <a:spcPts val="832"/>
               </a:spcBef>
               <a:spcAft>
                 <a:spcPts val="0"/>
               </a:spcAft>
             </a:pPr>
             <a:r>
-              <a:rPr sz="1400">
-                <a:solidFill>
-                  <a:srgbClr val="557085"/>
-                </a:solidFill>
-                <a:latin typeface="Arial"/>
+              <a:rPr sz="1600">
+                <a:solidFill>
+                  <a:srgbClr val="374151"/>
+                </a:solidFill>
+                <a:latin typeface="DejaVu Sans"/>
               </a:rPr>
-              <a:t>Raw inputs &amp;</a:t>
-            </a:r>
-          </a:p>
-          <a:p>
-            <a:pPr algn="ctr">
+              <a:t>Raw inputs</a:t>
+            </a:r>
+          </a:p>
+          <a:p>
+            <a:pPr algn="l" marL="243840">
               <a:lnSpc>
-                <a:spcPts val="1344"/>
+                <a:spcPts val="1536"/>
               </a:lnSpc>
               <a:spcBef>
-                <a:spcPts val="336"/>
+                <a:spcPts val="64"/>
               </a:spcBef>
               <a:spcAft>
                 <a:spcPts val="0"/>
               </a:spcAft>
             </a:pPr>
             <a:r>
-              <a:rPr sz="1400">
-                <a:solidFill>
-                  <a:srgbClr val="557085"/>
-                </a:solidFill>
-                <a:latin typeface="Arial"/>
+              <a:rPr sz="1600">
+                <a:solidFill>
+                  <a:srgbClr val="374151"/>
+                </a:solidFill>
+                <a:latin typeface="DejaVu Sans"/>
               </a:rPr>
-              <a:t>metadata</a:t>
-            </a:r>
-          </a:p>
-          <a:p>
-            <a:pPr algn="ctr">
+              <a:t>and metadata</a:t>
+            </a:r>
+          </a:p>
+        </p:txBody>
+      </p:sp>
+      <p:sp>
+        <p:nvSpPr>
+          <p:cNvPr id="5" name="Rounded Rectangle 4"/>
+          <p:cNvSpPr/>
+          <p:nvPr/>
+        </p:nvSpPr>
+        <p:spPr>
+          <a:xfrm>
+            <a:off x="2763520" y="2194560"/>
+            <a:ext cx="2032000" cy="2194560"/>
+          </a:xfrm>
+          <a:prstGeom prst="roundRect">
+            <a:avLst>
+              <a:gd name="adj" fmla="val 4000"/>
+            </a:avLst>
+          </a:prstGeom>
+          <a:solidFill>
+            <a:srgbClr val="F8FAFC"/>
+          </a:solidFill>
+          <a:ln w="19050">
+            <a:solidFill>
+              <a:srgbClr val="E2E8F0"/>
+            </a:solidFill>
+          </a:ln>
+        </p:spPr>
+        <p:style>
+          <a:lnRef idx="1">
+            <a:schemeClr val="accent1"/>
+          </a:lnRef>
+          <a:fillRef idx="3">
+            <a:schemeClr val="accent1"/>
+          </a:fillRef>
+          <a:effectRef idx="2">
+            <a:schemeClr val="accent1"/>
+          </a:effectRef>
+          <a:fontRef idx="minor">
+            <a:schemeClr val="lt1"/>
+          </a:fontRef>
+        </p:style>
+        <p:txBody>
+          <a:bodyPr rtlCol="0" anchor="t" wrap="none" lIns="0" rIns="0" tIns="635000" bIns="0"/>
+          <a:lstStyle/>
+          <a:p>
+            <a:pPr algn="l" marL="243840">
               <a:lnSpc>
-                <a:spcPts val="960"/>
-              </a:lnSpc>
-              <a:spcBef>
-                <a:spcPts val="3456"/>
-              </a:spcBef>
-              <a:spcAft>
-                <a:spcPts val="0"/>
-              </a:spcAft>
-            </a:pPr>
-            <a:r>
-              <a:rPr sz="1000" b="1">
-                <a:solidFill>
-                  <a:srgbClr val="7892A4"/>
-                </a:solidFill>
-                <a:latin typeface="Arial"/>
-              </a:rPr>
-              <a:t>OUTPUT</a:t>
-            </a:r>
-          </a:p>
-          <a:p>
-            <a:pPr algn="r">
-              <a:lnSpc>
-                <a:spcPts val="1056"/>
+                <a:spcPts val="1728"/>
               </a:lnSpc>
               <a:spcBef>
                 <a:spcPts val="0"/>
@@ -3821,36 +3377,106 @@
               </a:spcAft>
             </a:pPr>
             <a:r>
-              <a:rPr sz="1100" b="1">
-                <a:solidFill>
-                  <a:srgbClr val="4F86A3"/>
-                </a:solidFill>
-                <a:latin typeface="Arial"/>
+              <a:rPr sz="1800" b="1">
+                <a:solidFill>
+                  <a:srgbClr val="1E3A5F"/>
+                </a:solidFill>
+                <a:latin typeface="DejaVu Sans"/>
               </a:rPr>
-              <a:t>DATASET</a:t>
-            </a:r>
-          </a:p>
-        </p:txBody>
-      </p:sp>
-      <p:sp>
-        <p:nvSpPr>
-          <p:cNvPr id="13" name="Rectangle 12"/>
+              <a:t>Feature</a:t>
+            </a:r>
+          </a:p>
+          <a:p>
+            <a:pPr algn="l" marL="243840">
+              <a:lnSpc>
+                <a:spcPts val="1728"/>
+              </a:lnSpc>
+              <a:spcBef>
+                <a:spcPts val="192"/>
+              </a:spcBef>
+              <a:spcAft>
+                <a:spcPts val="0"/>
+              </a:spcAft>
+            </a:pPr>
+            <a:r>
+              <a:rPr sz="1800" b="1">
+                <a:solidFill>
+                  <a:srgbClr val="1E3A5F"/>
+                </a:solidFill>
+                <a:latin typeface="DejaVu Sans"/>
+              </a:rPr>
+              <a:t>processing</a:t>
+            </a:r>
+          </a:p>
+          <a:p>
+            <a:pPr algn="l" marL="243840">
+              <a:lnSpc>
+                <a:spcPts val="1536"/>
+              </a:lnSpc>
+              <a:spcBef>
+                <a:spcPts val="832"/>
+              </a:spcBef>
+              <a:spcAft>
+                <a:spcPts val="0"/>
+              </a:spcAft>
+            </a:pPr>
+            <a:r>
+              <a:rPr sz="1600">
+                <a:solidFill>
+                  <a:srgbClr val="374151"/>
+                </a:solidFill>
+                <a:latin typeface="DejaVu Sans"/>
+              </a:rPr>
+              <a:t>Normalize,</a:t>
+            </a:r>
+          </a:p>
+          <a:p>
+            <a:pPr algn="l" marL="243840">
+              <a:lnSpc>
+                <a:spcPts val="1536"/>
+              </a:lnSpc>
+              <a:spcBef>
+                <a:spcPts val="64"/>
+              </a:spcBef>
+              <a:spcAft>
+                <a:spcPts val="0"/>
+              </a:spcAft>
+            </a:pPr>
+            <a:r>
+              <a:rPr sz="1600">
+                <a:solidFill>
+                  <a:srgbClr val="374151"/>
+                </a:solidFill>
+                <a:latin typeface="DejaVu Sans"/>
+              </a:rPr>
+              <a:t>encode, split</a:t>
+            </a:r>
+          </a:p>
+        </p:txBody>
+      </p:sp>
+      <p:sp>
+        <p:nvSpPr>
+          <p:cNvPr id="6" name="Rounded Rectangle 5"/>
           <p:cNvSpPr/>
           <p:nvPr/>
         </p:nvSpPr>
         <p:spPr>
           <a:xfrm>
-            <a:off x="487680" y="2103120"/>
-            <a:ext cx="1910080" cy="71120"/>
-          </a:xfrm>
-          <a:prstGeom prst="rect">
-            <a:avLst/>
+            <a:off x="5039360" y="2194560"/>
+            <a:ext cx="2032000" cy="2194560"/>
+          </a:xfrm>
+          <a:prstGeom prst="roundRect">
+            <a:avLst>
+              <a:gd name="adj" fmla="val 4000"/>
+            </a:avLst>
           </a:prstGeom>
           <a:solidFill>
-            <a:srgbClr val="4F86A3"/>
+            <a:srgbClr val="F8FAFC"/>
           </a:solidFill>
-          <a:ln>
-            <a:noFill/>
+          <a:ln w="19050">
+            <a:solidFill>
+              <a:srgbClr val="E2E8F0"/>
+            </a:solidFill>
           </a:ln>
         </p:spPr>
         <p:style>
@@ -3868,226 +3494,12 @@
           </a:fontRef>
         </p:style>
         <p:txBody>
-          <a:bodyPr rtlCol="0" anchor="ctr"/>
-          <a:lstStyle/>
-          <a:p>
-            <a:pPr algn="ctr"/>
-          </a:p>
-        </p:txBody>
-      </p:sp>
-      <p:sp>
-        <p:nvSpPr>
-          <p:cNvPr id="14" name="Rectangle 13"/>
-          <p:cNvSpPr/>
-          <p:nvPr/>
-        </p:nvSpPr>
-        <p:spPr>
-          <a:xfrm>
-            <a:off x="711200" y="2672080"/>
-            <a:ext cx="508000" cy="508000"/>
-          </a:xfrm>
-          <a:prstGeom prst="rect">
-            <a:avLst/>
-          </a:prstGeom>
-          <a:solidFill>
-            <a:srgbClr val="EEF5F8"/>
-          </a:solidFill>
-          <a:ln>
-            <a:noFill/>
-          </a:ln>
-        </p:spPr>
-        <p:style>
-          <a:lnRef idx="1">
-            <a:schemeClr val="accent1"/>
-          </a:lnRef>
-          <a:fillRef idx="3">
-            <a:schemeClr val="accent1"/>
-          </a:fillRef>
-          <a:effectRef idx="2">
-            <a:schemeClr val="accent1"/>
-          </a:effectRef>
-          <a:fontRef idx="minor">
-            <a:schemeClr val="lt1"/>
-          </a:fontRef>
-        </p:style>
-        <p:txBody>
-          <a:bodyPr rtlCol="0" anchor="ctr"/>
-          <a:lstStyle/>
-          <a:p>
-            <a:pPr algn="ctr"/>
-          </a:p>
-        </p:txBody>
-      </p:sp>
-      <p:sp>
-        <p:nvSpPr>
-          <p:cNvPr id="15" name="Rectangle 14"/>
-          <p:cNvSpPr/>
-          <p:nvPr/>
-        </p:nvSpPr>
-        <p:spPr>
-          <a:xfrm>
-            <a:off x="822960" y="2794000"/>
-            <a:ext cx="284480" cy="223520"/>
-          </a:xfrm>
-          <a:custGeom>
-            <a:avLst/>
-            <a:gdLst/>
-            <a:ahLst/>
-            <a:cxnLst/>
-            <a:rect l="0" t="0" r="r" b="b"/>
-            <a:pathLst>
-              <a:path w="284480" h="223520">
-                <a:moveTo>
-                  <a:pt x="0" y="0"/>
-                </a:moveTo>
-                <a:lnTo>
-                  <a:pt x="284480" y="0"/>
-                </a:lnTo>
-                <a:moveTo>
-                  <a:pt x="0" y="111760"/>
-                </a:moveTo>
-                <a:lnTo>
-                  <a:pt x="284480" y="111760"/>
-                </a:lnTo>
-                <a:moveTo>
-                  <a:pt x="0" y="223520"/>
-                </a:moveTo>
-                <a:lnTo>
-                  <a:pt x="193040" y="223520"/>
-                </a:lnTo>
-              </a:path>
-            </a:pathLst>
-          </a:custGeom>
-          <a:noFill/>
-          <a:ln w="38100">
-            <a:solidFill>
-              <a:srgbClr val="4F86A3"/>
-            </a:solidFill>
-          </a:ln>
-        </p:spPr>
-        <p:style>
-          <a:lnRef idx="1">
-            <a:schemeClr val="accent1"/>
-          </a:lnRef>
-          <a:fillRef idx="3">
-            <a:schemeClr val="accent1"/>
-          </a:fillRef>
-          <a:effectRef idx="2">
-            <a:schemeClr val="accent1"/>
-          </a:effectRef>
-          <a:fontRef idx="minor">
-            <a:schemeClr val="lt1"/>
-          </a:fontRef>
-        </p:style>
-        <p:txBody>
-          <a:bodyPr rtlCol="0" anchor="ctr"/>
-          <a:lstStyle/>
-          <a:p>
-            <a:pPr algn="ctr"/>
-          </a:p>
-        </p:txBody>
-      </p:sp>
-      <p:sp>
-        <p:nvSpPr>
-          <p:cNvPr id="16" name="Rectangle 15"/>
-          <p:cNvSpPr/>
-          <p:nvPr/>
-        </p:nvSpPr>
-        <p:spPr>
-          <a:xfrm>
-            <a:off x="711200" y="4561840"/>
-            <a:ext cx="1463040" cy="1"/>
-          </a:xfrm>
-          <a:custGeom>
-            <a:avLst/>
-            <a:gdLst/>
-            <a:ahLst/>
-            <a:cxnLst/>
-            <a:rect l="0" t="0" r="r" b="b"/>
-            <a:pathLst>
-              <a:path w="1463040" h="1">
-                <a:moveTo>
-                  <a:pt x="0" y="0"/>
-                </a:moveTo>
-                <a:lnTo>
-                  <a:pt x="1463040" y="0"/>
-                </a:lnTo>
-              </a:path>
-            </a:pathLst>
-          </a:custGeom>
-          <a:noFill/>
-          <a:ln w="19050">
-            <a:solidFill>
-              <a:srgbClr val="E2EBF0"/>
-            </a:solidFill>
-          </a:ln>
-        </p:spPr>
-        <p:style>
-          <a:lnRef idx="1">
-            <a:schemeClr val="accent1"/>
-          </a:lnRef>
-          <a:fillRef idx="3">
-            <a:schemeClr val="accent1"/>
-          </a:fillRef>
-          <a:effectRef idx="2">
-            <a:schemeClr val="accent1"/>
-          </a:effectRef>
-          <a:fontRef idx="minor">
-            <a:schemeClr val="lt1"/>
-          </a:fontRef>
-        </p:style>
-        <p:txBody>
-          <a:bodyPr rtlCol="0" anchor="ctr"/>
-          <a:lstStyle/>
-          <a:p>
-            <a:pPr algn="ctr"/>
-          </a:p>
-        </p:txBody>
-      </p:sp>
-      <p:sp>
-        <p:nvSpPr>
-          <p:cNvPr id="17" name="Rectangle 16"/>
-          <p:cNvSpPr/>
-          <p:nvPr/>
-        </p:nvSpPr>
-        <p:spPr>
-          <a:xfrm>
-            <a:off x="2804160" y="2103120"/>
-            <a:ext cx="1910080" cy="3048000"/>
-          </a:xfrm>
-          <a:prstGeom prst="rect">
-            <a:avLst/>
-          </a:prstGeom>
-          <a:solidFill>
-            <a:srgbClr val="FFFFFF"/>
-          </a:solidFill>
-          <a:ln w="25400">
-            <a:solidFill>
-              <a:srgbClr val="B9CCD9"/>
-            </a:solidFill>
-          </a:ln>
-        </p:spPr>
-        <p:style>
-          <a:lnRef idx="1">
-            <a:schemeClr val="accent1"/>
-          </a:lnRef>
-          <a:fillRef idx="3">
-            <a:schemeClr val="accent1"/>
-          </a:fillRef>
-          <a:effectRef idx="2">
-            <a:schemeClr val="accent1"/>
-          </a:effectRef>
-          <a:fontRef idx="minor">
-            <a:schemeClr val="lt1"/>
-          </a:fontRef>
-        </p:style>
-        <p:txBody>
-          <a:bodyPr rtlCol="0" anchor="t" wrap="none" lIns="0" rIns="0" tIns="325120" bIns="0"/>
-          <a:lstStyle/>
-          <a:p>
-            <a:pPr algn="ctr">
+          <a:bodyPr rtlCol="0" anchor="t" wrap="none" lIns="0" rIns="0" tIns="635000" bIns="0"/>
+          <a:lstStyle/>
+          <a:p>
+            <a:pPr algn="l" marL="243840">
               <a:lnSpc>
-                <a:spcPts val="1152"/>
+                <a:spcPts val="1728"/>
               </a:lnSpc>
               <a:spcBef>
                 <a:spcPts val="0"/>
@@ -4097,129 +3509,129 @@
               </a:spcAft>
             </a:pPr>
             <a:r>
-              <a:rPr sz="1200" b="1">
-                <a:solidFill>
-                  <a:srgbClr val="6E899D"/>
-                </a:solidFill>
-                <a:latin typeface="Arial"/>
+              <a:rPr sz="1800" b="1">
+                <a:solidFill>
+                  <a:srgbClr val="1E3A5F"/>
+                </a:solidFill>
+                <a:latin typeface="DejaVu Sans"/>
               </a:rPr>
-              <a:t>02</a:t>
-            </a:r>
-          </a:p>
-          <a:p>
-            <a:pPr algn="ctr">
+              <a:t>Model</a:t>
+            </a:r>
+          </a:p>
+          <a:p>
+            <a:pPr algn="l" marL="243840">
               <a:lnSpc>
-                <a:spcPts val="1632"/>
+                <a:spcPts val="1728"/>
               </a:lnSpc>
               <a:spcBef>
-                <a:spcPts val="6928"/>
+                <a:spcPts val="192"/>
               </a:spcBef>
               <a:spcAft>
                 <a:spcPts val="0"/>
               </a:spcAft>
             </a:pPr>
             <a:r>
-              <a:rPr sz="1700" b="1">
-                <a:solidFill>
-                  <a:srgbClr val="15334A"/>
-                </a:solidFill>
-                <a:latin typeface="Arial"/>
+              <a:rPr sz="1800" b="1">
+                <a:solidFill>
+                  <a:srgbClr val="1E3A5F"/>
+                </a:solidFill>
+                <a:latin typeface="DejaVu Sans"/>
               </a:rPr>
-              <a:t>Feature</a:t>
-            </a:r>
-          </a:p>
-          <a:p>
-            <a:pPr algn="ctr">
+              <a:t>training</a:t>
+            </a:r>
+          </a:p>
+          <a:p>
+            <a:pPr algn="l" marL="243840">
               <a:lnSpc>
-                <a:spcPts val="1632"/>
+                <a:spcPts val="1536"/>
               </a:lnSpc>
               <a:spcBef>
-                <a:spcPts val="128"/>
+                <a:spcPts val="832"/>
               </a:spcBef>
               <a:spcAft>
                 <a:spcPts val="0"/>
               </a:spcAft>
             </a:pPr>
             <a:r>
-              <a:rPr sz="1700" b="1">
-                <a:solidFill>
-                  <a:srgbClr val="15334A"/>
-                </a:solidFill>
-                <a:latin typeface="Arial"/>
+              <a:rPr sz="1600">
+                <a:solidFill>
+                  <a:srgbClr val="374151"/>
+                </a:solidFill>
+                <a:latin typeface="DejaVu Sans"/>
               </a:rPr>
-              <a:t>processing</a:t>
-            </a:r>
-          </a:p>
-          <a:p>
-            <a:pPr algn="ctr">
+              <a:t>Fit model</a:t>
+            </a:r>
+          </a:p>
+          <a:p>
+            <a:pPr algn="l" marL="243840">
               <a:lnSpc>
-                <a:spcPts val="1344"/>
+                <a:spcPts val="1536"/>
               </a:lnSpc>
               <a:spcBef>
-                <a:spcPts val="1568"/>
+                <a:spcPts val="64"/>
               </a:spcBef>
               <a:spcAft>
                 <a:spcPts val="0"/>
               </a:spcAft>
             </a:pPr>
             <a:r>
-              <a:rPr sz="1400">
-                <a:solidFill>
-                  <a:srgbClr val="557085"/>
-                </a:solidFill>
-                <a:latin typeface="Arial"/>
+              <a:rPr sz="1600">
+                <a:solidFill>
+                  <a:srgbClr val="374151"/>
+                </a:solidFill>
+                <a:latin typeface="DejaVu Sans"/>
               </a:rPr>
-              <a:t>Normalize, encode</a:t>
-            </a:r>
-          </a:p>
-          <a:p>
-            <a:pPr algn="ctr">
+              <a:t>parameters</a:t>
+            </a:r>
+          </a:p>
+        </p:txBody>
+      </p:sp>
+      <p:sp>
+        <p:nvSpPr>
+          <p:cNvPr id="7" name="Rounded Rectangle 6"/>
+          <p:cNvSpPr/>
+          <p:nvPr/>
+        </p:nvSpPr>
+        <p:spPr>
+          <a:xfrm>
+            <a:off x="7315200" y="2194560"/>
+            <a:ext cx="2032000" cy="2194560"/>
+          </a:xfrm>
+          <a:prstGeom prst="roundRect">
+            <a:avLst>
+              <a:gd name="adj" fmla="val 4000"/>
+            </a:avLst>
+          </a:prstGeom>
+          <a:solidFill>
+            <a:srgbClr val="F8FAFC"/>
+          </a:solidFill>
+          <a:ln w="19050">
+            <a:solidFill>
+              <a:srgbClr val="E2E8F0"/>
+            </a:solidFill>
+          </a:ln>
+        </p:spPr>
+        <p:style>
+          <a:lnRef idx="1">
+            <a:schemeClr val="accent1"/>
+          </a:lnRef>
+          <a:fillRef idx="3">
+            <a:schemeClr val="accent1"/>
+          </a:fillRef>
+          <a:effectRef idx="2">
+            <a:schemeClr val="accent1"/>
+          </a:effectRef>
+          <a:fontRef idx="minor">
+            <a:schemeClr val="lt1"/>
+          </a:fontRef>
+        </p:style>
+        <p:txBody>
+          <a:bodyPr rtlCol="0" anchor="t" wrap="none" lIns="0" rIns="0" tIns="635000" bIns="0"/>
+          <a:lstStyle/>
+          <a:p>
+            <a:pPr algn="l" marL="243840">
               <a:lnSpc>
-                <a:spcPts val="1344"/>
-              </a:lnSpc>
-              <a:spcBef>
-                <a:spcPts val="336"/>
-              </a:spcBef>
-              <a:spcAft>
-                <a:spcPts val="0"/>
-              </a:spcAft>
-            </a:pPr>
-            <a:r>
-              <a:rPr sz="1400">
-                <a:solidFill>
-                  <a:srgbClr val="557085"/>
-                </a:solidFill>
-                <a:latin typeface="Arial"/>
-              </a:rPr>
-              <a:t>and split</a:t>
-            </a:r>
-          </a:p>
-          <a:p>
-            <a:pPr algn="ctr">
-              <a:lnSpc>
-                <a:spcPts val="960"/>
-              </a:lnSpc>
-              <a:spcBef>
-                <a:spcPts val="2336"/>
-              </a:spcBef>
-              <a:spcAft>
-                <a:spcPts val="0"/>
-              </a:spcAft>
-            </a:pPr>
-            <a:r>
-              <a:rPr sz="1000" b="1">
-                <a:solidFill>
-                  <a:srgbClr val="7892A4"/>
-                </a:solidFill>
-                <a:latin typeface="Arial"/>
-              </a:rPr>
-              <a:t>OUTPUT</a:t>
-            </a:r>
-          </a:p>
-          <a:p>
-            <a:pPr algn="r">
-              <a:lnSpc>
-                <a:spcPts val="1056"/>
+                <a:spcPts val="1728"/>
               </a:lnSpc>
               <a:spcBef>
                 <a:spcPts val="0"/>
@@ -4229,36 +3641,106 @@
               </a:spcAft>
             </a:pPr>
             <a:r>
-              <a:rPr sz="1100" b="1">
-                <a:solidFill>
-                  <a:srgbClr val="4F9A9A"/>
-                </a:solidFill>
-                <a:latin typeface="Arial"/>
+              <a:rPr sz="1800" b="1">
+                <a:solidFill>
+                  <a:srgbClr val="1E3A5F"/>
+                </a:solidFill>
+                <a:latin typeface="DejaVu Sans"/>
               </a:rPr>
-              <a:t>FEATURE SET</a:t>
-            </a:r>
-          </a:p>
-        </p:txBody>
-      </p:sp>
-      <p:sp>
-        <p:nvSpPr>
-          <p:cNvPr id="18" name="Rectangle 17"/>
+              <a:t>Evaluation</a:t>
+            </a:r>
+          </a:p>
+          <a:p>
+            <a:pPr algn="l" marL="243840">
+              <a:lnSpc>
+                <a:spcPts val="1728"/>
+              </a:lnSpc>
+              <a:spcBef>
+                <a:spcPts val="192"/>
+              </a:spcBef>
+              <a:spcAft>
+                <a:spcPts val="0"/>
+              </a:spcAft>
+            </a:pPr>
+            <a:r>
+              <a:rPr sz="1800" b="1">
+                <a:solidFill>
+                  <a:srgbClr val="1E3A5F"/>
+                </a:solidFill>
+                <a:latin typeface="DejaVu Sans"/>
+              </a:rPr>
+              <a:t>stage</a:t>
+            </a:r>
+          </a:p>
+          <a:p>
+            <a:pPr algn="l" marL="243840">
+              <a:lnSpc>
+                <a:spcPts val="1536"/>
+              </a:lnSpc>
+              <a:spcBef>
+                <a:spcPts val="832"/>
+              </a:spcBef>
+              <a:spcAft>
+                <a:spcPts val="0"/>
+              </a:spcAft>
+            </a:pPr>
+            <a:r>
+              <a:rPr sz="1600">
+                <a:solidFill>
+                  <a:srgbClr val="374151"/>
+                </a:solidFill>
+                <a:latin typeface="DejaVu Sans"/>
+              </a:rPr>
+              <a:t>Holdout</a:t>
+            </a:r>
+          </a:p>
+          <a:p>
+            <a:pPr algn="l" marL="243840">
+              <a:lnSpc>
+                <a:spcPts val="1536"/>
+              </a:lnSpc>
+              <a:spcBef>
+                <a:spcPts val="64"/>
+              </a:spcBef>
+              <a:spcAft>
+                <a:spcPts val="0"/>
+              </a:spcAft>
+            </a:pPr>
+            <a:r>
+              <a:rPr sz="1600">
+                <a:solidFill>
+                  <a:srgbClr val="374151"/>
+                </a:solidFill>
+                <a:latin typeface="DejaVu Sans"/>
+              </a:rPr>
+              <a:t>metrics</a:t>
+            </a:r>
+          </a:p>
+        </p:txBody>
+      </p:sp>
+      <p:sp>
+        <p:nvSpPr>
+          <p:cNvPr id="8" name="Rounded Rectangle 7"/>
           <p:cNvSpPr/>
           <p:nvPr/>
         </p:nvSpPr>
         <p:spPr>
           <a:xfrm>
-            <a:off x="2804160" y="2103120"/>
-            <a:ext cx="1910080" cy="71120"/>
-          </a:xfrm>
-          <a:prstGeom prst="rect">
-            <a:avLst/>
+            <a:off x="9591040" y="2194560"/>
+            <a:ext cx="2032000" cy="2194560"/>
+          </a:xfrm>
+          <a:prstGeom prst="roundRect">
+            <a:avLst>
+              <a:gd name="adj" fmla="val 4000"/>
+            </a:avLst>
           </a:prstGeom>
           <a:solidFill>
-            <a:srgbClr val="4F9A9A"/>
+            <a:srgbClr val="F8FAFC"/>
           </a:solidFill>
-          <a:ln>
-            <a:noFill/>
+          <a:ln w="19050">
+            <a:solidFill>
+              <a:srgbClr val="E2E8F0"/>
+            </a:solidFill>
           </a:ln>
         </p:spPr>
         <p:style>
@@ -4276,244 +3758,12 @@
           </a:fontRef>
         </p:style>
         <p:txBody>
-          <a:bodyPr rtlCol="0" anchor="ctr"/>
-          <a:lstStyle/>
-          <a:p>
-            <a:pPr algn="ctr"/>
-          </a:p>
-        </p:txBody>
-      </p:sp>
-      <p:sp>
-        <p:nvSpPr>
-          <p:cNvPr id="19" name="Rectangle 18"/>
-          <p:cNvSpPr/>
-          <p:nvPr/>
-        </p:nvSpPr>
-        <p:spPr>
-          <a:xfrm>
-            <a:off x="3027680" y="2672080"/>
-            <a:ext cx="508000" cy="508000"/>
-          </a:xfrm>
-          <a:prstGeom prst="rect">
-            <a:avLst/>
-          </a:prstGeom>
-          <a:solidFill>
-            <a:srgbClr val="EEF7F7"/>
-          </a:solidFill>
-          <a:ln>
-            <a:noFill/>
-          </a:ln>
-        </p:spPr>
-        <p:style>
-          <a:lnRef idx="1">
-            <a:schemeClr val="accent1"/>
-          </a:lnRef>
-          <a:fillRef idx="3">
-            <a:schemeClr val="accent1"/>
-          </a:fillRef>
-          <a:effectRef idx="2">
-            <a:schemeClr val="accent1"/>
-          </a:effectRef>
-          <a:fontRef idx="minor">
-            <a:schemeClr val="lt1"/>
-          </a:fontRef>
-        </p:style>
-        <p:txBody>
-          <a:bodyPr rtlCol="0" anchor="ctr"/>
-          <a:lstStyle/>
-          <a:p>
-            <a:pPr algn="ctr"/>
-          </a:p>
-        </p:txBody>
-      </p:sp>
-      <p:sp>
-        <p:nvSpPr>
-          <p:cNvPr id="20" name="Rectangle 19"/>
-          <p:cNvSpPr/>
-          <p:nvPr/>
-        </p:nvSpPr>
-        <p:spPr>
-          <a:xfrm>
-            <a:off x="3139440" y="2733040"/>
-            <a:ext cx="284480" cy="365760"/>
-          </a:xfrm>
-          <a:custGeom>
-            <a:avLst/>
-            <a:gdLst/>
-            <a:ahLst/>
-            <a:cxnLst/>
-            <a:rect l="0" t="0" r="r" b="b"/>
-            <a:pathLst>
-              <a:path w="284480" h="365760">
-                <a:moveTo>
-                  <a:pt x="0" y="50800"/>
-                </a:moveTo>
-                <a:lnTo>
-                  <a:pt x="284480" y="50800"/>
-                </a:lnTo>
-                <a:moveTo>
-                  <a:pt x="0" y="182880"/>
-                </a:moveTo>
-                <a:lnTo>
-                  <a:pt x="284480" y="182880"/>
-                </a:lnTo>
-                <a:moveTo>
-                  <a:pt x="0" y="314960"/>
-                </a:moveTo>
-                <a:lnTo>
-                  <a:pt x="284480" y="314960"/>
-                </a:lnTo>
-                <a:moveTo>
-                  <a:pt x="111760" y="0"/>
-                </a:moveTo>
-                <a:lnTo>
-                  <a:pt x="111760" y="101600"/>
-                </a:lnTo>
-                <a:moveTo>
-                  <a:pt x="233680" y="132080"/>
-                </a:moveTo>
-                <a:lnTo>
-                  <a:pt x="233680" y="233680"/>
-                </a:lnTo>
-                <a:moveTo>
-                  <a:pt x="60960" y="264160"/>
-                </a:moveTo>
-                <a:lnTo>
-                  <a:pt x="60960" y="365760"/>
-                </a:lnTo>
-              </a:path>
-            </a:pathLst>
-          </a:custGeom>
-          <a:noFill/>
-          <a:ln w="31750">
-            <a:solidFill>
-              <a:srgbClr val="4F9A9A"/>
-            </a:solidFill>
-          </a:ln>
-        </p:spPr>
-        <p:style>
-          <a:lnRef idx="1">
-            <a:schemeClr val="accent1"/>
-          </a:lnRef>
-          <a:fillRef idx="3">
-            <a:schemeClr val="accent1"/>
-          </a:fillRef>
-          <a:effectRef idx="2">
-            <a:schemeClr val="accent1"/>
-          </a:effectRef>
-          <a:fontRef idx="minor">
-            <a:schemeClr val="lt1"/>
-          </a:fontRef>
-        </p:style>
-        <p:txBody>
-          <a:bodyPr rtlCol="0" anchor="ctr"/>
-          <a:lstStyle/>
-          <a:p>
-            <a:pPr algn="ctr"/>
-          </a:p>
-        </p:txBody>
-      </p:sp>
-      <p:sp>
-        <p:nvSpPr>
-          <p:cNvPr id="21" name="Rectangle 20"/>
-          <p:cNvSpPr/>
-          <p:nvPr/>
-        </p:nvSpPr>
-        <p:spPr>
-          <a:xfrm>
-            <a:off x="3027680" y="4561840"/>
-            <a:ext cx="1463040" cy="1"/>
-          </a:xfrm>
-          <a:custGeom>
-            <a:avLst/>
-            <a:gdLst/>
-            <a:ahLst/>
-            <a:cxnLst/>
-            <a:rect l="0" t="0" r="r" b="b"/>
-            <a:pathLst>
-              <a:path w="1463040" h="1">
-                <a:moveTo>
-                  <a:pt x="0" y="0"/>
-                </a:moveTo>
-                <a:lnTo>
-                  <a:pt x="1463040" y="0"/>
-                </a:lnTo>
-              </a:path>
-            </a:pathLst>
-          </a:custGeom>
-          <a:noFill/>
-          <a:ln w="19050">
-            <a:solidFill>
-              <a:srgbClr val="E2EBF0"/>
-            </a:solidFill>
-          </a:ln>
-        </p:spPr>
-        <p:style>
-          <a:lnRef idx="1">
-            <a:schemeClr val="accent1"/>
-          </a:lnRef>
-          <a:fillRef idx="3">
-            <a:schemeClr val="accent1"/>
-          </a:fillRef>
-          <a:effectRef idx="2">
-            <a:schemeClr val="accent1"/>
-          </a:effectRef>
-          <a:fontRef idx="minor">
-            <a:schemeClr val="lt1"/>
-          </a:fontRef>
-        </p:style>
-        <p:txBody>
-          <a:bodyPr rtlCol="0" anchor="ctr"/>
-          <a:lstStyle/>
-          <a:p>
-            <a:pPr algn="ctr"/>
-          </a:p>
-        </p:txBody>
-      </p:sp>
-      <p:sp>
-        <p:nvSpPr>
-          <p:cNvPr id="22" name="Rectangle 21"/>
-          <p:cNvSpPr/>
-          <p:nvPr/>
-        </p:nvSpPr>
-        <p:spPr>
-          <a:xfrm>
-            <a:off x="5120640" y="2103120"/>
-            <a:ext cx="1910080" cy="3048000"/>
-          </a:xfrm>
-          <a:prstGeom prst="rect">
-            <a:avLst/>
-          </a:prstGeom>
-          <a:solidFill>
-            <a:srgbClr val="FFFFFF"/>
-          </a:solidFill>
-          <a:ln w="25400">
-            <a:solidFill>
-              <a:srgbClr val="B9CCD9"/>
-            </a:solidFill>
-          </a:ln>
-        </p:spPr>
-        <p:style>
-          <a:lnRef idx="1">
-            <a:schemeClr val="accent1"/>
-          </a:lnRef>
-          <a:fillRef idx="3">
-            <a:schemeClr val="accent1"/>
-          </a:fillRef>
-          <a:effectRef idx="2">
-            <a:schemeClr val="accent1"/>
-          </a:effectRef>
-          <a:fontRef idx="minor">
-            <a:schemeClr val="lt1"/>
-          </a:fontRef>
-        </p:style>
-        <p:txBody>
-          <a:bodyPr rtlCol="0" anchor="t" wrap="none" lIns="0" rIns="0" tIns="325120" bIns="0"/>
-          <a:lstStyle/>
-          <a:p>
-            <a:pPr algn="ctr">
+          <a:bodyPr rtlCol="0" anchor="t" wrap="none" lIns="0" rIns="0" tIns="635000" bIns="0"/>
+          <a:lstStyle/>
+          <a:p>
+            <a:pPr algn="l" marL="243840">
               <a:lnSpc>
-                <a:spcPts val="1152"/>
+                <a:spcPts val="1728"/>
               </a:lnSpc>
               <a:spcBef>
                 <a:spcPts val="0"/>
@@ -4523,22 +3773,22 @@
               </a:spcAft>
             </a:pPr>
             <a:r>
-              <a:rPr sz="1200" b="1">
-                <a:solidFill>
-                  <a:srgbClr val="6E899D"/>
-                </a:solidFill>
-                <a:latin typeface="Arial"/>
+              <a:rPr sz="1800" b="1">
+                <a:solidFill>
+                  <a:srgbClr val="1E3A5F"/>
+                </a:solidFill>
+                <a:latin typeface="DejaVu Sans"/>
               </a:rPr>
-              <a:t>03</a:t>
-            </a:r>
-          </a:p>
-          <a:p>
-            <a:pPr algn="ctr">
+              <a:t>Model</a:t>
+            </a:r>
+          </a:p>
+          <a:p>
+            <a:pPr algn="l" marL="243840">
               <a:lnSpc>
                 <a:spcPts val="1728"/>
               </a:lnSpc>
               <a:spcBef>
-                <a:spcPts val="7328"/>
+                <a:spcPts val="192"/>
               </a:spcBef>
               <a:spcAft>
                 <a:spcPts val="0"/>
@@ -4547,83 +3797,261 @@
             <a:r>
               <a:rPr sz="1800" b="1">
                 <a:solidFill>
-                  <a:srgbClr val="15334A"/>
-                </a:solidFill>
-                <a:latin typeface="Arial"/>
+                  <a:srgbClr val="1E3A5F"/>
+                </a:solidFill>
+                <a:latin typeface="DejaVu Sans"/>
               </a:rPr>
-              <a:t>Model training</a:t>
-            </a:r>
-          </a:p>
-          <a:p>
-            <a:pPr algn="ctr">
+              <a:t>publishing</a:t>
+            </a:r>
+          </a:p>
+          <a:p>
+            <a:pPr algn="l" marL="243840">
               <a:lnSpc>
-                <a:spcPts val="1344"/>
+                <a:spcPts val="1536"/>
               </a:lnSpc>
               <a:spcBef>
-                <a:spcPts val="1712"/>
+                <a:spcPts val="832"/>
               </a:spcBef>
               <a:spcAft>
                 <a:spcPts val="0"/>
               </a:spcAft>
             </a:pPr>
             <a:r>
-              <a:rPr sz="1400">
-                <a:solidFill>
-                  <a:srgbClr val="557085"/>
-                </a:solidFill>
-                <a:latin typeface="Arial"/>
+              <a:rPr sz="1600">
+                <a:solidFill>
+                  <a:srgbClr val="374151"/>
+                </a:solidFill>
+                <a:latin typeface="DejaVu Sans"/>
               </a:rPr>
-              <a:t>Fit model</a:t>
-            </a:r>
-          </a:p>
-          <a:p>
-            <a:pPr algn="ctr">
+              <a:t>Versioned</a:t>
+            </a:r>
+          </a:p>
+          <a:p>
+            <a:pPr algn="l" marL="243840">
               <a:lnSpc>
-                <a:spcPts val="1344"/>
+                <a:spcPts val="1536"/>
               </a:lnSpc>
               <a:spcBef>
-                <a:spcPts val="336"/>
+                <a:spcPts val="64"/>
               </a:spcBef>
               <a:spcAft>
                 <a:spcPts val="0"/>
               </a:spcAft>
             </a:pPr>
             <a:r>
-              <a:rPr sz="1400">
-                <a:solidFill>
-                  <a:srgbClr val="557085"/>
-                </a:solidFill>
-                <a:latin typeface="Arial"/>
+              <a:rPr sz="1600">
+                <a:solidFill>
+                  <a:srgbClr val="374151"/>
+                </a:solidFill>
+                <a:latin typeface="DejaVu Sans"/>
               </a:rPr>
-              <a:t>parameters</a:t>
-            </a:r>
-          </a:p>
-          <a:p>
-            <a:pPr algn="ctr">
+              <a:t>artifact</a:t>
+            </a:r>
+          </a:p>
+        </p:txBody>
+      </p:sp>
+      <p:cxnSp>
+        <p:nvCxnSpPr>
+          <p:cNvPr id="9" name="Connector 8"/>
+          <p:cNvCxnSpPr>
+            <a:stCxn id="4" idx="3"/>
+            <a:endCxn id="5" idx="7"/>
+          </p:cNvCxnSpPr>
+          <p:nvPr/>
+        </p:nvCxnSpPr>
+        <p:spPr>
+          <a:xfrm>
+            <a:off x="2519680" y="3291840"/>
+            <a:ext cx="243840" cy="0"/>
+          </a:xfrm>
+          <a:prstGeom prst="line">
+            <a:avLst/>
+          </a:prstGeom>
+          <a:ln w="25400">
+            <a:solidFill>
+              <a:srgbClr val="475569"/>
+            </a:solidFill>
+            <a:tailEnd type="triangle" w="med" len="med"/>
+          </a:ln>
+        </p:spPr>
+        <p:style>
+          <a:lnRef idx="2">
+            <a:schemeClr val="accent1"/>
+          </a:lnRef>
+          <a:fillRef idx="0">
+            <a:schemeClr val="accent1"/>
+          </a:fillRef>
+          <a:effectRef idx="1">
+            <a:schemeClr val="accent1"/>
+          </a:effectRef>
+          <a:fontRef idx="minor">
+            <a:schemeClr val="tx1"/>
+          </a:fontRef>
+        </p:style>
+      </p:cxnSp>
+      <p:cxnSp>
+        <p:nvCxnSpPr>
+          <p:cNvPr id="10" name="Connector 9"/>
+          <p:cNvCxnSpPr>
+            <a:stCxn id="5" idx="3"/>
+            <a:endCxn id="6" idx="7"/>
+          </p:cNvCxnSpPr>
+          <p:nvPr/>
+        </p:nvCxnSpPr>
+        <p:spPr>
+          <a:xfrm>
+            <a:off x="4795520" y="3291840"/>
+            <a:ext cx="243840" cy="0"/>
+          </a:xfrm>
+          <a:prstGeom prst="line">
+            <a:avLst/>
+          </a:prstGeom>
+          <a:ln w="25400">
+            <a:solidFill>
+              <a:srgbClr val="475569"/>
+            </a:solidFill>
+            <a:tailEnd type="triangle" w="med" len="med"/>
+          </a:ln>
+        </p:spPr>
+        <p:style>
+          <a:lnRef idx="2">
+            <a:schemeClr val="accent1"/>
+          </a:lnRef>
+          <a:fillRef idx="0">
+            <a:schemeClr val="accent1"/>
+          </a:fillRef>
+          <a:effectRef idx="1">
+            <a:schemeClr val="accent1"/>
+          </a:effectRef>
+          <a:fontRef idx="minor">
+            <a:schemeClr val="tx1"/>
+          </a:fontRef>
+        </p:style>
+      </p:cxnSp>
+      <p:cxnSp>
+        <p:nvCxnSpPr>
+          <p:cNvPr id="11" name="Connector 10"/>
+          <p:cNvCxnSpPr>
+            <a:stCxn id="6" idx="3"/>
+            <a:endCxn id="7" idx="7"/>
+          </p:cNvCxnSpPr>
+          <p:nvPr/>
+        </p:nvCxnSpPr>
+        <p:spPr>
+          <a:xfrm>
+            <a:off x="7071360" y="3291840"/>
+            <a:ext cx="243840" cy="0"/>
+          </a:xfrm>
+          <a:prstGeom prst="line">
+            <a:avLst/>
+          </a:prstGeom>
+          <a:ln w="25400">
+            <a:solidFill>
+              <a:srgbClr val="475569"/>
+            </a:solidFill>
+            <a:tailEnd type="triangle" w="med" len="med"/>
+          </a:ln>
+        </p:spPr>
+        <p:style>
+          <a:lnRef idx="2">
+            <a:schemeClr val="accent1"/>
+          </a:lnRef>
+          <a:fillRef idx="0">
+            <a:schemeClr val="accent1"/>
+          </a:fillRef>
+          <a:effectRef idx="1">
+            <a:schemeClr val="accent1"/>
+          </a:effectRef>
+          <a:fontRef idx="minor">
+            <a:schemeClr val="tx1"/>
+          </a:fontRef>
+        </p:style>
+      </p:cxnSp>
+      <p:cxnSp>
+        <p:nvCxnSpPr>
+          <p:cNvPr id="12" name="Connector 11"/>
+          <p:cNvCxnSpPr>
+            <a:stCxn id="7" idx="3"/>
+            <a:endCxn id="8" idx="7"/>
+          </p:cNvCxnSpPr>
+          <p:nvPr/>
+        </p:nvCxnSpPr>
+        <p:spPr>
+          <a:xfrm>
+            <a:off x="9347200" y="3291840"/>
+            <a:ext cx="243840" cy="0"/>
+          </a:xfrm>
+          <a:prstGeom prst="line">
+            <a:avLst/>
+          </a:prstGeom>
+          <a:ln w="25400">
+            <a:solidFill>
+              <a:srgbClr val="475569"/>
+            </a:solidFill>
+            <a:tailEnd type="triangle" w="med" len="med"/>
+          </a:ln>
+        </p:spPr>
+        <p:style>
+          <a:lnRef idx="2">
+            <a:schemeClr val="accent1"/>
+          </a:lnRef>
+          <a:fillRef idx="0">
+            <a:schemeClr val="accent1"/>
+          </a:fillRef>
+          <a:effectRef idx="1">
+            <a:schemeClr val="accent1"/>
+          </a:effectRef>
+          <a:fontRef idx="minor">
+            <a:schemeClr val="tx1"/>
+          </a:fontRef>
+        </p:style>
+      </p:cxnSp>
+      <p:sp>
+        <p:nvSpPr>
+          <p:cNvPr id="13" name="Rounded Rectangle 12"/>
+          <p:cNvSpPr/>
+          <p:nvPr/>
+        </p:nvSpPr>
+        <p:spPr>
+          <a:xfrm>
+            <a:off x="6177280" y="4958080"/>
+            <a:ext cx="3901440" cy="1056640"/>
+          </a:xfrm>
+          <a:prstGeom prst="roundRect">
+            <a:avLst>
+              <a:gd name="adj" fmla="val 7692"/>
+            </a:avLst>
+          </a:prstGeom>
+          <a:solidFill>
+            <a:srgbClr val="F8FAFC"/>
+          </a:solidFill>
+          <a:ln w="19050">
+            <a:solidFill>
+              <a:srgbClr val="E2E8F0"/>
+            </a:solidFill>
+          </a:ln>
+        </p:spPr>
+        <p:style>
+          <a:lnRef idx="1">
+            <a:schemeClr val="accent1"/>
+          </a:lnRef>
+          <a:fillRef idx="3">
+            <a:schemeClr val="accent1"/>
+          </a:fillRef>
+          <a:effectRef idx="2">
+            <a:schemeClr val="accent1"/>
+          </a:effectRef>
+          <a:fontRef idx="minor">
+            <a:schemeClr val="lt1"/>
+          </a:fontRef>
+        </p:style>
+        <p:txBody>
+          <a:bodyPr rtlCol="0" anchor="t" wrap="none" lIns="0" rIns="0" tIns="309880" bIns="0"/>
+          <a:lstStyle/>
+          <a:p>
+            <a:pPr algn="l" marL="243840">
               <a:lnSpc>
-                <a:spcPts val="960"/>
-              </a:lnSpc>
-              <a:spcBef>
-                <a:spcPts val="3456"/>
-              </a:spcBef>
-              <a:spcAft>
-                <a:spcPts val="0"/>
-              </a:spcAft>
-            </a:pPr>
-            <a:r>
-              <a:rPr sz="1000" b="1">
-                <a:solidFill>
-                  <a:srgbClr val="7892A4"/>
-                </a:solidFill>
-                <a:latin typeface="Arial"/>
-              </a:rPr>
-              <a:t>OUTPUT</a:t>
-            </a:r>
-          </a:p>
-          <a:p>
-            <a:pPr algn="r">
-              <a:lnSpc>
-                <a:spcPts val="1056"/>
+                <a:spcPts val="1728"/>
               </a:lnSpc>
               <a:spcBef>
                 <a:spcPts val="0"/>
@@ -4633,987 +4061,60 @@
               </a:spcAft>
             </a:pPr>
             <a:r>
-              <a:rPr sz="1100" b="1">
-                <a:solidFill>
-                  <a:srgbClr val="6C78B7"/>
-                </a:solidFill>
-                <a:latin typeface="Arial"/>
+              <a:rPr sz="1800" b="1">
+                <a:solidFill>
+                  <a:srgbClr val="1E3A5F"/>
+                </a:solidFill>
+                <a:latin typeface="DejaVu Sans"/>
               </a:rPr>
-              <a:t>MODEL</a:t>
-            </a:r>
-          </a:p>
-        </p:txBody>
-      </p:sp>
-      <p:sp>
-        <p:nvSpPr>
-          <p:cNvPr id="23" name="Rectangle 22"/>
-          <p:cNvSpPr/>
-          <p:nvPr/>
-        </p:nvSpPr>
-        <p:spPr>
-          <a:xfrm>
-            <a:off x="5120640" y="2103120"/>
-            <a:ext cx="1910080" cy="71120"/>
-          </a:xfrm>
-          <a:prstGeom prst="rect">
-            <a:avLst/>
-          </a:prstGeom>
-          <a:solidFill>
-            <a:srgbClr val="6C78B7"/>
-          </a:solidFill>
-          <a:ln>
-            <a:noFill/>
-          </a:ln>
-        </p:spPr>
-        <p:style>
-          <a:lnRef idx="1">
-            <a:schemeClr val="accent1"/>
-          </a:lnRef>
-          <a:fillRef idx="3">
-            <a:schemeClr val="accent1"/>
-          </a:fillRef>
-          <a:effectRef idx="2">
-            <a:schemeClr val="accent1"/>
-          </a:effectRef>
-          <a:fontRef idx="minor">
-            <a:schemeClr val="lt1"/>
-          </a:fontRef>
-        </p:style>
-        <p:txBody>
-          <a:bodyPr rtlCol="0" anchor="ctr"/>
-          <a:lstStyle/>
-          <a:p>
-            <a:pPr algn="ctr"/>
-          </a:p>
-        </p:txBody>
-      </p:sp>
-      <p:sp>
-        <p:nvSpPr>
-          <p:cNvPr id="24" name="Rectangle 23"/>
-          <p:cNvSpPr/>
-          <p:nvPr/>
-        </p:nvSpPr>
-        <p:spPr>
-          <a:xfrm>
-            <a:off x="5344160" y="2672080"/>
-            <a:ext cx="508000" cy="508000"/>
-          </a:xfrm>
-          <a:prstGeom prst="rect">
-            <a:avLst/>
-          </a:prstGeom>
-          <a:solidFill>
-            <a:srgbClr val="F0F2FA"/>
-          </a:solidFill>
-          <a:ln>
-            <a:noFill/>
-          </a:ln>
-        </p:spPr>
-        <p:style>
-          <a:lnRef idx="1">
-            <a:schemeClr val="accent1"/>
-          </a:lnRef>
-          <a:fillRef idx="3">
-            <a:schemeClr val="accent1"/>
-          </a:fillRef>
-          <a:effectRef idx="2">
-            <a:schemeClr val="accent1"/>
-          </a:effectRef>
-          <a:fontRef idx="minor">
-            <a:schemeClr val="lt1"/>
-          </a:fontRef>
-        </p:style>
-        <p:txBody>
-          <a:bodyPr rtlCol="0" anchor="ctr"/>
-          <a:lstStyle/>
-          <a:p>
-            <a:pPr algn="ctr"/>
-          </a:p>
-        </p:txBody>
-      </p:sp>
-      <p:sp>
-        <p:nvSpPr>
-          <p:cNvPr id="25" name="Rectangle 24"/>
-          <p:cNvSpPr/>
-          <p:nvPr/>
-        </p:nvSpPr>
-        <p:spPr>
-          <a:xfrm>
-            <a:off x="5455920" y="2783840"/>
-            <a:ext cx="284480" cy="274320"/>
-          </a:xfrm>
-          <a:custGeom>
-            <a:avLst/>
-            <a:gdLst/>
-            <a:ahLst/>
-            <a:cxnLst/>
-            <a:rect l="0" t="0" r="r" b="b"/>
-            <a:pathLst>
-              <a:path w="284480" h="274320">
-                <a:moveTo>
-                  <a:pt x="0" y="274320"/>
-                </a:moveTo>
-                <a:lnTo>
-                  <a:pt x="0" y="0"/>
-                </a:lnTo>
-                <a:moveTo>
-                  <a:pt x="0" y="274320"/>
-                </a:moveTo>
-                <a:lnTo>
-                  <a:pt x="284480" y="274320"/>
-                </a:lnTo>
-                <a:moveTo>
-                  <a:pt x="40640" y="203200"/>
-                </a:moveTo>
-                <a:lnTo>
-                  <a:pt x="111760" y="132080"/>
-                </a:lnTo>
-                <a:lnTo>
-                  <a:pt x="182880" y="162560"/>
-                </a:lnTo>
-                <a:lnTo>
-                  <a:pt x="264160" y="30480"/>
-                </a:lnTo>
-              </a:path>
-            </a:pathLst>
-          </a:custGeom>
-          <a:noFill/>
-          <a:ln w="35560">
-            <a:solidFill>
-              <a:srgbClr val="6C78B7"/>
-            </a:solidFill>
-          </a:ln>
-        </p:spPr>
-        <p:style>
-          <a:lnRef idx="1">
-            <a:schemeClr val="accent1"/>
-          </a:lnRef>
-          <a:fillRef idx="3">
-            <a:schemeClr val="accent1"/>
-          </a:fillRef>
-          <a:effectRef idx="2">
-            <a:schemeClr val="accent1"/>
-          </a:effectRef>
-          <a:fontRef idx="minor">
-            <a:schemeClr val="lt1"/>
-          </a:fontRef>
-        </p:style>
-        <p:txBody>
-          <a:bodyPr rtlCol="0" anchor="ctr"/>
-          <a:lstStyle/>
-          <a:p>
-            <a:pPr algn="ctr"/>
-          </a:p>
-        </p:txBody>
-      </p:sp>
-      <p:sp>
-        <p:nvSpPr>
-          <p:cNvPr id="26" name="Rectangle 25"/>
-          <p:cNvSpPr/>
-          <p:nvPr/>
-        </p:nvSpPr>
-        <p:spPr>
-          <a:xfrm>
-            <a:off x="5344160" y="4561840"/>
-            <a:ext cx="1463040" cy="1"/>
-          </a:xfrm>
-          <a:custGeom>
-            <a:avLst/>
-            <a:gdLst/>
-            <a:ahLst/>
-            <a:cxnLst/>
-            <a:rect l="0" t="0" r="r" b="b"/>
-            <a:pathLst>
-              <a:path w="1463040" h="1">
-                <a:moveTo>
-                  <a:pt x="0" y="0"/>
-                </a:moveTo>
-                <a:lnTo>
-                  <a:pt x="1463040" y="0"/>
-                </a:lnTo>
-              </a:path>
-            </a:pathLst>
-          </a:custGeom>
-          <a:noFill/>
-          <a:ln w="19050">
-            <a:solidFill>
-              <a:srgbClr val="E2EBF0"/>
-            </a:solidFill>
-          </a:ln>
-        </p:spPr>
-        <p:style>
-          <a:lnRef idx="1">
-            <a:schemeClr val="accent1"/>
-          </a:lnRef>
-          <a:fillRef idx="3">
-            <a:schemeClr val="accent1"/>
-          </a:fillRef>
-          <a:effectRef idx="2">
-            <a:schemeClr val="accent1"/>
-          </a:effectRef>
-          <a:fontRef idx="minor">
-            <a:schemeClr val="lt1"/>
-          </a:fontRef>
-        </p:style>
-        <p:txBody>
-          <a:bodyPr rtlCol="0" anchor="ctr"/>
-          <a:lstStyle/>
-          <a:p>
-            <a:pPr algn="ctr"/>
-          </a:p>
-        </p:txBody>
-      </p:sp>
-      <p:sp>
-        <p:nvSpPr>
-          <p:cNvPr id="27" name="Rectangle 26"/>
-          <p:cNvSpPr/>
-          <p:nvPr/>
-        </p:nvSpPr>
-        <p:spPr>
-          <a:xfrm>
-            <a:off x="7437120" y="2103120"/>
-            <a:ext cx="1910080" cy="3048000"/>
-          </a:xfrm>
-          <a:prstGeom prst="rect">
-            <a:avLst/>
-          </a:prstGeom>
-          <a:solidFill>
-            <a:srgbClr val="FFFFFF"/>
-          </a:solidFill>
-          <a:ln w="25400">
-            <a:solidFill>
-              <a:srgbClr val="B9CCD9"/>
-            </a:solidFill>
-          </a:ln>
-        </p:spPr>
-        <p:style>
-          <a:lnRef idx="1">
-            <a:schemeClr val="accent1"/>
-          </a:lnRef>
-          <a:fillRef idx="3">
-            <a:schemeClr val="accent1"/>
-          </a:fillRef>
-          <a:effectRef idx="2">
-            <a:schemeClr val="accent1"/>
-          </a:effectRef>
-          <a:fontRef idx="minor">
-            <a:schemeClr val="lt1"/>
-          </a:fontRef>
-        </p:style>
-        <p:txBody>
-          <a:bodyPr rtlCol="0" anchor="t" wrap="none" lIns="0" rIns="0" tIns="325120" bIns="0"/>
-          <a:lstStyle/>
-          <a:p>
-            <a:pPr algn="ctr">
+              <a:t>HUMAN REVIEW</a:t>
+            </a:r>
+          </a:p>
+          <a:p>
+            <a:pPr algn="l" marL="243840">
               <a:lnSpc>
-                <a:spcPts val="1152"/>
+                <a:spcPts val="1536"/>
               </a:lnSpc>
               <a:spcBef>
-                <a:spcPts val="0"/>
+                <a:spcPts val="832"/>
               </a:spcBef>
               <a:spcAft>
                 <a:spcPts val="0"/>
               </a:spcAft>
             </a:pPr>
             <a:r>
-              <a:rPr sz="1200" b="1">
-                <a:solidFill>
-                  <a:srgbClr val="6E899D"/>
-                </a:solidFill>
-                <a:latin typeface="Arial"/>
+              <a:rPr sz="1600">
+                <a:solidFill>
+                  <a:srgbClr val="374151"/>
+                </a:solidFill>
+                <a:latin typeface="DejaVu Sans"/>
               </a:rPr>
-              <a:t>04</a:t>
-            </a:r>
-          </a:p>
-          <a:p>
-            <a:pPr algn="ctr">
-              <a:lnSpc>
-                <a:spcPts val="1632"/>
-              </a:lnSpc>
-              <a:spcBef>
-                <a:spcPts val="6928"/>
-              </a:spcBef>
-              <a:spcAft>
-                <a:spcPts val="0"/>
-              </a:spcAft>
-            </a:pPr>
-            <a:r>
-              <a:rPr sz="1700" b="1">
-                <a:solidFill>
-                  <a:srgbClr val="15334A"/>
-                </a:solidFill>
-                <a:latin typeface="Arial"/>
-              </a:rPr>
-              <a:t>Evaluation</a:t>
-            </a:r>
-          </a:p>
-          <a:p>
-            <a:pPr algn="ctr">
-              <a:lnSpc>
-                <a:spcPts val="1632"/>
-              </a:lnSpc>
-              <a:spcBef>
-                <a:spcPts val="128"/>
-              </a:spcBef>
-              <a:spcAft>
-                <a:spcPts val="0"/>
-              </a:spcAft>
-            </a:pPr>
-            <a:r>
-              <a:rPr sz="1700" b="1">
-                <a:solidFill>
-                  <a:srgbClr val="15334A"/>
-                </a:solidFill>
-                <a:latin typeface="Arial"/>
-              </a:rPr>
-              <a:t>stage</a:t>
-            </a:r>
-          </a:p>
-          <a:p>
-            <a:pPr algn="ctr">
-              <a:lnSpc>
-                <a:spcPts val="1344"/>
-              </a:lnSpc>
-              <a:spcBef>
-                <a:spcPts val="1568"/>
-              </a:spcBef>
-              <a:spcAft>
-                <a:spcPts val="0"/>
-              </a:spcAft>
-            </a:pPr>
-            <a:r>
-              <a:rPr sz="1400">
-                <a:solidFill>
-                  <a:srgbClr val="557085"/>
-                </a:solidFill>
-                <a:latin typeface="Arial"/>
-              </a:rPr>
-              <a:t>Holdout</a:t>
-            </a:r>
-          </a:p>
-          <a:p>
-            <a:pPr algn="ctr">
-              <a:lnSpc>
-                <a:spcPts val="1344"/>
-              </a:lnSpc>
-              <a:spcBef>
-                <a:spcPts val="336"/>
-              </a:spcBef>
-              <a:spcAft>
-                <a:spcPts val="0"/>
-              </a:spcAft>
-            </a:pPr>
-            <a:r>
-              <a:rPr sz="1400">
-                <a:solidFill>
-                  <a:srgbClr val="557085"/>
-                </a:solidFill>
-                <a:latin typeface="Arial"/>
-              </a:rPr>
-              <a:t>metrics</a:t>
-            </a:r>
-          </a:p>
-          <a:p>
-            <a:pPr algn="ctr">
-              <a:lnSpc>
-                <a:spcPts val="960"/>
-              </a:lnSpc>
-              <a:spcBef>
-                <a:spcPts val="2336"/>
-              </a:spcBef>
-              <a:spcAft>
-                <a:spcPts val="0"/>
-              </a:spcAft>
-            </a:pPr>
-            <a:r>
-              <a:rPr sz="1000" b="1">
-                <a:solidFill>
-                  <a:srgbClr val="7892A4"/>
-                </a:solidFill>
-                <a:latin typeface="Arial"/>
-              </a:rPr>
-              <a:t>OUTPUT</a:t>
-            </a:r>
-          </a:p>
-          <a:p>
-            <a:pPr algn="r">
-              <a:lnSpc>
-                <a:spcPts val="1056"/>
-              </a:lnSpc>
-              <a:spcBef>
-                <a:spcPts val="0"/>
-              </a:spcBef>
-              <a:spcAft>
-                <a:spcPts val="0"/>
-              </a:spcAft>
-            </a:pPr>
-            <a:r>
-              <a:rPr sz="1100" b="1">
-                <a:solidFill>
-                  <a:srgbClr val="C18A4A"/>
-                </a:solidFill>
-                <a:latin typeface="Arial"/>
-              </a:rPr>
-              <a:t>METRICS</a:t>
-            </a:r>
-          </a:p>
-        </p:txBody>
-      </p:sp>
-      <p:sp>
-        <p:nvSpPr>
-          <p:cNvPr id="28" name="Rectangle 27"/>
-          <p:cNvSpPr/>
-          <p:nvPr/>
-        </p:nvSpPr>
-        <p:spPr>
-          <a:xfrm>
-            <a:off x="7437120" y="2103120"/>
-            <a:ext cx="1910080" cy="71120"/>
-          </a:xfrm>
-          <a:prstGeom prst="rect">
-            <a:avLst/>
-          </a:prstGeom>
-          <a:solidFill>
-            <a:srgbClr val="C18A4A"/>
-          </a:solidFill>
-          <a:ln>
-            <a:noFill/>
-          </a:ln>
-        </p:spPr>
-        <p:style>
-          <a:lnRef idx="1">
-            <a:schemeClr val="accent1"/>
-          </a:lnRef>
-          <a:fillRef idx="3">
-            <a:schemeClr val="accent1"/>
-          </a:fillRef>
-          <a:effectRef idx="2">
-            <a:schemeClr val="accent1"/>
-          </a:effectRef>
-          <a:fontRef idx="minor">
-            <a:schemeClr val="lt1"/>
-          </a:fontRef>
-        </p:style>
-        <p:txBody>
-          <a:bodyPr rtlCol="0" anchor="ctr"/>
-          <a:lstStyle/>
-          <a:p>
-            <a:pPr algn="ctr"/>
-          </a:p>
-        </p:txBody>
-      </p:sp>
-      <p:sp>
-        <p:nvSpPr>
-          <p:cNvPr id="29" name="Rectangle 28"/>
-          <p:cNvSpPr/>
-          <p:nvPr/>
-        </p:nvSpPr>
-        <p:spPr>
-          <a:xfrm>
-            <a:off x="7660640" y="2672080"/>
-            <a:ext cx="508000" cy="508000"/>
-          </a:xfrm>
-          <a:prstGeom prst="rect">
-            <a:avLst/>
-          </a:prstGeom>
-          <a:solidFill>
-            <a:srgbClr val="FBF5EC"/>
-          </a:solidFill>
-          <a:ln>
-            <a:noFill/>
-          </a:ln>
-        </p:spPr>
-        <p:style>
-          <a:lnRef idx="1">
-            <a:schemeClr val="accent1"/>
-          </a:lnRef>
-          <a:fillRef idx="3">
-            <a:schemeClr val="accent1"/>
-          </a:fillRef>
-          <a:effectRef idx="2">
-            <a:schemeClr val="accent1"/>
-          </a:effectRef>
-          <a:fontRef idx="minor">
-            <a:schemeClr val="lt1"/>
-          </a:fontRef>
-        </p:style>
-        <p:txBody>
-          <a:bodyPr rtlCol="0" anchor="ctr"/>
-          <a:lstStyle/>
-          <a:p>
-            <a:pPr algn="ctr"/>
-          </a:p>
-        </p:txBody>
-      </p:sp>
-      <p:sp>
-        <p:nvSpPr>
-          <p:cNvPr id="30" name="Rectangle 29"/>
-          <p:cNvSpPr/>
-          <p:nvPr/>
-        </p:nvSpPr>
-        <p:spPr>
-          <a:xfrm>
-            <a:off x="7772400" y="2783840"/>
-            <a:ext cx="284480" cy="274320"/>
-          </a:xfrm>
-          <a:custGeom>
-            <a:avLst/>
-            <a:gdLst/>
-            <a:ahLst/>
-            <a:cxnLst/>
-            <a:rect l="0" t="0" r="r" b="b"/>
-            <a:pathLst>
-              <a:path w="284480" h="274320">
-                <a:moveTo>
-                  <a:pt x="0" y="274320"/>
-                </a:moveTo>
-                <a:lnTo>
-                  <a:pt x="0" y="0"/>
-                </a:lnTo>
-                <a:moveTo>
-                  <a:pt x="0" y="274320"/>
-                </a:moveTo>
-                <a:lnTo>
-                  <a:pt x="284480" y="274320"/>
-                </a:lnTo>
-                <a:moveTo>
-                  <a:pt x="50800" y="172720"/>
-                </a:moveTo>
-                <a:lnTo>
-                  <a:pt x="121920" y="101600"/>
-                </a:lnTo>
-                <a:lnTo>
-                  <a:pt x="193040" y="142240"/>
-                </a:lnTo>
-                <a:lnTo>
-                  <a:pt x="274320" y="30480"/>
-                </a:lnTo>
-              </a:path>
-            </a:pathLst>
-          </a:custGeom>
-          <a:noFill/>
-          <a:ln w="35560">
-            <a:solidFill>
-              <a:srgbClr val="C18A4A"/>
-            </a:solidFill>
-          </a:ln>
-        </p:spPr>
-        <p:style>
-          <a:lnRef idx="1">
-            <a:schemeClr val="accent1"/>
-          </a:lnRef>
-          <a:fillRef idx="3">
-            <a:schemeClr val="accent1"/>
-          </a:fillRef>
-          <a:effectRef idx="2">
-            <a:schemeClr val="accent1"/>
-          </a:effectRef>
-          <a:fontRef idx="minor">
-            <a:schemeClr val="lt1"/>
-          </a:fontRef>
-        </p:style>
-        <p:txBody>
-          <a:bodyPr rtlCol="0" anchor="ctr"/>
-          <a:lstStyle/>
-          <a:p>
-            <a:pPr algn="ctr"/>
-          </a:p>
-        </p:txBody>
-      </p:sp>
-      <p:sp>
-        <p:nvSpPr>
-          <p:cNvPr id="31" name="Rectangle 30"/>
-          <p:cNvSpPr/>
-          <p:nvPr/>
-        </p:nvSpPr>
-        <p:spPr>
-          <a:xfrm>
-            <a:off x="7660640" y="4561840"/>
-            <a:ext cx="1463040" cy="1"/>
-          </a:xfrm>
-          <a:custGeom>
-            <a:avLst/>
-            <a:gdLst/>
-            <a:ahLst/>
-            <a:cxnLst/>
-            <a:rect l="0" t="0" r="r" b="b"/>
-            <a:pathLst>
-              <a:path w="1463040" h="1">
-                <a:moveTo>
-                  <a:pt x="0" y="0"/>
-                </a:moveTo>
-                <a:lnTo>
-                  <a:pt x="1463040" y="0"/>
-                </a:lnTo>
-              </a:path>
-            </a:pathLst>
-          </a:custGeom>
-          <a:noFill/>
-          <a:ln w="19050">
-            <a:solidFill>
-              <a:srgbClr val="E2EBF0"/>
-            </a:solidFill>
-          </a:ln>
-        </p:spPr>
-        <p:style>
-          <a:lnRef idx="1">
-            <a:schemeClr val="accent1"/>
-          </a:lnRef>
-          <a:fillRef idx="3">
-            <a:schemeClr val="accent1"/>
-          </a:fillRef>
-          <a:effectRef idx="2">
-            <a:schemeClr val="accent1"/>
-          </a:effectRef>
-          <a:fontRef idx="minor">
-            <a:schemeClr val="lt1"/>
-          </a:fontRef>
-        </p:style>
-        <p:txBody>
-          <a:bodyPr rtlCol="0" anchor="ctr"/>
-          <a:lstStyle/>
-          <a:p>
-            <a:pPr algn="ctr"/>
-          </a:p>
-        </p:txBody>
-      </p:sp>
-      <p:sp>
-        <p:nvSpPr>
-          <p:cNvPr id="32" name="Rectangle 31"/>
-          <p:cNvSpPr/>
-          <p:nvPr/>
-        </p:nvSpPr>
-        <p:spPr>
-          <a:xfrm>
-            <a:off x="7538720" y="1534160"/>
-            <a:ext cx="1808480" cy="426720"/>
-          </a:xfrm>
-          <a:prstGeom prst="rect">
-            <a:avLst/>
-          </a:prstGeom>
-          <a:solidFill>
-            <a:srgbClr val="FFF8EF"/>
-          </a:solidFill>
+              <a:t>Approve the run, or return it to training.</a:t>
+            </a:r>
+          </a:p>
+        </p:txBody>
+      </p:sp>
+      <p:cxnSp>
+        <p:nvCxnSpPr>
+          <p:cNvPr id="14" name="Connector 13"/>
+          <p:cNvCxnSpPr>
+            <a:stCxn id="7" idx="5"/>
+          </p:cNvCxnSpPr>
+          <p:nvPr/>
+        </p:nvCxnSpPr>
+        <p:spPr>
+          <a:xfrm>
+            <a:off x="8331200" y="4389120"/>
+            <a:ext cx="0" cy="568960"/>
+          </a:xfrm>
+          <a:prstGeom prst="line">
+            <a:avLst/>
+          </a:prstGeom>
           <a:ln w="25400">
             <a:solidFill>
-              <a:srgbClr val="C18A4A"/>
+              <a:srgbClr val="475569"/>
             </a:solidFill>
-          </a:ln>
-        </p:spPr>
-        <p:style>
-          <a:lnRef idx="1">
-            <a:schemeClr val="accent1"/>
-          </a:lnRef>
-          <a:fillRef idx="3">
-            <a:schemeClr val="accent1"/>
-          </a:fillRef>
-          <a:effectRef idx="2">
-            <a:schemeClr val="accent1"/>
-          </a:effectRef>
-          <a:fontRef idx="minor">
-            <a:schemeClr val="lt1"/>
-          </a:fontRef>
-        </p:style>
-        <p:txBody>
-          <a:bodyPr rtlCol="0" anchor="t" wrap="none" lIns="0" rIns="0" tIns="139700" bIns="0"/>
-          <a:lstStyle/>
-          <a:p>
-            <a:pPr algn="ctr">
-              <a:lnSpc>
-                <a:spcPts val="1056"/>
-              </a:lnSpc>
-              <a:spcBef>
-                <a:spcPts val="0"/>
-              </a:spcBef>
-              <a:spcAft>
-                <a:spcPts val="0"/>
-              </a:spcAft>
-            </a:pPr>
-            <a:r>
-              <a:rPr sz="1100" b="1">
-                <a:solidFill>
-                  <a:srgbClr val="15334A"/>
-                </a:solidFill>
-                <a:latin typeface="Arial"/>
-              </a:rPr>
-              <a:t>HUMAN REVIEW</a:t>
-            </a:r>
-          </a:p>
-          <a:p>
-            <a:pPr algn="ctr">
-              <a:lnSpc>
-                <a:spcPts val="960"/>
-              </a:lnSpc>
-              <a:spcBef>
-                <a:spcPts val="224"/>
-              </a:spcBef>
-              <a:spcAft>
-                <a:spcPts val="0"/>
-              </a:spcAft>
-            </a:pPr>
-            <a:r>
-              <a:rPr sz="1000">
-                <a:solidFill>
-                  <a:srgbClr val="8B6840"/>
-                </a:solidFill>
-                <a:latin typeface="Arial"/>
-              </a:rPr>
-              <a:t>Approve or return</a:t>
-            </a:r>
-          </a:p>
-        </p:txBody>
-      </p:sp>
-      <p:sp>
-        <p:nvSpPr>
-          <p:cNvPr id="33" name="Oval 32"/>
-          <p:cNvSpPr/>
-          <p:nvPr/>
-        </p:nvSpPr>
-        <p:spPr>
-          <a:xfrm>
-            <a:off x="7630160" y="1656080"/>
-            <a:ext cx="182880" cy="182880"/>
-          </a:xfrm>
-          <a:prstGeom prst="ellipse">
-            <a:avLst/>
-          </a:prstGeom>
-          <a:solidFill>
-            <a:srgbClr val="C18A4A"/>
-          </a:solidFill>
-          <a:ln>
-            <a:noFill/>
-          </a:ln>
-        </p:spPr>
-        <p:style>
-          <a:lnRef idx="1">
-            <a:schemeClr val="accent1"/>
-          </a:lnRef>
-          <a:fillRef idx="3">
-            <a:schemeClr val="accent1"/>
-          </a:fillRef>
-          <a:effectRef idx="2">
-            <a:schemeClr val="accent1"/>
-          </a:effectRef>
-          <a:fontRef idx="minor">
-            <a:schemeClr val="lt1"/>
-          </a:fontRef>
-        </p:style>
-        <p:txBody>
-          <a:bodyPr rtlCol="0" anchor="ctr"/>
-          <a:lstStyle/>
-          <a:p>
-            <a:pPr algn="ctr"/>
-          </a:p>
-        </p:txBody>
-      </p:sp>
-      <p:sp>
-        <p:nvSpPr>
-          <p:cNvPr id="34" name="Rectangle 33"/>
-          <p:cNvSpPr/>
-          <p:nvPr/>
-        </p:nvSpPr>
-        <p:spPr>
-          <a:xfrm>
-            <a:off x="7660640" y="1696720"/>
-            <a:ext cx="121920" cy="132080"/>
-          </a:xfrm>
-          <a:custGeom>
-            <a:avLst/>
-            <a:gdLst/>
-            <a:ahLst/>
-            <a:cxnLst/>
-            <a:rect l="0" t="0" r="r" b="b"/>
-            <a:pathLst>
-              <a:path w="121920" h="132080">
-                <a:moveTo>
-                  <a:pt x="20320" y="40640"/>
-                </a:moveTo>
-                <a:cubicBezTo>
-                  <a:pt x="20320" y="18195"/>
-                  <a:pt x="38515" y="0"/>
-                  <a:pt x="60960" y="0"/>
-                </a:cubicBezTo>
-                <a:cubicBezTo>
-                  <a:pt x="83405" y="0"/>
-                  <a:pt x="101600" y="18195"/>
-                  <a:pt x="101600" y="40640"/>
-                </a:cubicBezTo>
-                <a:moveTo>
-                  <a:pt x="0" y="132080"/>
-                </a:moveTo>
-                <a:cubicBezTo>
-                  <a:pt x="20320" y="91440"/>
-                  <a:pt x="101600" y="91440"/>
-                  <a:pt x="121920" y="132080"/>
-                </a:cubicBezTo>
-              </a:path>
-            </a:pathLst>
-          </a:custGeom>
-          <a:noFill/>
-          <a:ln w="19050">
-            <a:solidFill>
-              <a:srgbClr val="FFFFFF"/>
-            </a:solidFill>
-          </a:ln>
-        </p:spPr>
-        <p:style>
-          <a:lnRef idx="1">
-            <a:schemeClr val="accent1"/>
-          </a:lnRef>
-          <a:fillRef idx="3">
-            <a:schemeClr val="accent1"/>
-          </a:fillRef>
-          <a:effectRef idx="2">
-            <a:schemeClr val="accent1"/>
-          </a:effectRef>
-          <a:fontRef idx="minor">
-            <a:schemeClr val="lt1"/>
-          </a:fontRef>
-        </p:style>
-        <p:txBody>
-          <a:bodyPr rtlCol="0" anchor="ctr"/>
-          <a:lstStyle/>
-          <a:p>
-            <a:pPr algn="ctr"/>
-          </a:p>
-        </p:txBody>
-      </p:sp>
-      <p:sp>
-        <p:nvSpPr>
-          <p:cNvPr id="35" name="Rectangle 34"/>
-          <p:cNvSpPr/>
-          <p:nvPr/>
-        </p:nvSpPr>
-        <p:spPr>
-          <a:xfrm>
-            <a:off x="8392160" y="1971040"/>
-            <a:ext cx="1" cy="132080"/>
-          </a:xfrm>
-          <a:custGeom>
-            <a:avLst/>
-            <a:gdLst/>
-            <a:ahLst/>
-            <a:cxnLst/>
-            <a:rect l="0" t="0" r="r" b="b"/>
-            <a:pathLst>
-              <a:path w="1" h="132080">
-                <a:moveTo>
-                  <a:pt x="0" y="132080"/>
-                </a:moveTo>
-                <a:lnTo>
-                  <a:pt x="0" y="0"/>
-                </a:lnTo>
-              </a:path>
-            </a:pathLst>
-          </a:custGeom>
-          <a:noFill/>
-          <a:ln w="31750">
-            <a:solidFill>
-              <a:srgbClr val="C18A4A"/>
-            </a:solidFill>
-          </a:ln>
-        </p:spPr>
-        <p:style>
-          <a:lnRef idx="1">
-            <a:schemeClr val="accent1"/>
-          </a:lnRef>
-          <a:fillRef idx="3">
-            <a:schemeClr val="accent1"/>
-          </a:fillRef>
-          <a:effectRef idx="2">
-            <a:schemeClr val="accent1"/>
-          </a:effectRef>
-          <a:fontRef idx="minor">
-            <a:schemeClr val="lt1"/>
-          </a:fontRef>
-        </p:style>
-        <p:txBody>
-          <a:bodyPr rtlCol="0" anchor="ctr"/>
-          <a:lstStyle/>
-          <a:p>
-            <a:pPr algn="ctr"/>
-          </a:p>
-        </p:txBody>
-      </p:sp>
-      <p:sp>
-        <p:nvSpPr>
-          <p:cNvPr id="36" name="Rectangle 35"/>
-          <p:cNvSpPr/>
-          <p:nvPr/>
-        </p:nvSpPr>
-        <p:spPr>
-          <a:xfrm>
-            <a:off x="8331200" y="1940560"/>
-            <a:ext cx="121920" cy="91440"/>
-          </a:xfrm>
-          <a:custGeom>
-            <a:avLst/>
-            <a:gdLst/>
-            <a:ahLst/>
-            <a:cxnLst/>
-            <a:rect l="0" t="0" r="r" b="b"/>
-            <a:pathLst>
-              <a:path w="121920" h="91440">
-                <a:moveTo>
-                  <a:pt x="0" y="91440"/>
-                </a:moveTo>
-                <a:lnTo>
-                  <a:pt x="60960" y="0"/>
-                </a:lnTo>
-                <a:lnTo>
-                  <a:pt x="121920" y="91440"/>
-                </a:lnTo>
-              </a:path>
-            </a:pathLst>
-          </a:custGeom>
-          <a:noFill/>
-          <a:ln w="31750">
-            <a:solidFill>
-              <a:srgbClr val="C18A4A"/>
-            </a:solidFill>
-          </a:ln>
-        </p:spPr>
-        <p:style>
-          <a:lnRef idx="1">
-            <a:schemeClr val="accent1"/>
-          </a:lnRef>
-          <a:fillRef idx="3">
-            <a:schemeClr val="accent1"/>
-          </a:fillRef>
-          <a:effectRef idx="2">
-            <a:schemeClr val="accent1"/>
-          </a:effectRef>
-          <a:fontRef idx="minor">
-            <a:schemeClr val="lt1"/>
-          </a:fontRef>
-        </p:style>
-        <p:txBody>
-          <a:bodyPr rtlCol="0" anchor="ctr"/>
-          <a:lstStyle/>
-          <a:p>
-            <a:pPr algn="ctr"/>
-          </a:p>
-        </p:txBody>
-      </p:sp>
-      <p:cxnSp>
-        <p:nvCxnSpPr>
-          <p:cNvPr id="37" name="Connector 36"/>
-          <p:cNvCxnSpPr>
-            <a:stCxn id="32" idx="3"/>
-          </p:cNvCxnSpPr>
-          <p:nvPr/>
-        </p:nvCxnSpPr>
-        <p:spPr>
-          <a:xfrm>
-            <a:off x="9347200" y="1747520"/>
-            <a:ext cx="243840" cy="0"/>
-          </a:xfrm>
-          <a:prstGeom prst="line">
-            <a:avLst/>
-          </a:prstGeom>
-          <a:ln w="31750">
-            <a:solidFill>
-              <a:srgbClr val="577E68"/>
-            </a:solidFill>
+            <a:tailEnd type="triangle" w="med" len="med"/>
           </a:ln>
         </p:spPr>
         <p:style>
@@ -5631,657 +4132,91 @@
           </a:fontRef>
         </p:style>
       </p:cxnSp>
-      <p:sp>
-        <p:nvSpPr>
-          <p:cNvPr id="38" name="Rectangle 37"/>
-          <p:cNvSpPr/>
-          <p:nvPr/>
-        </p:nvSpPr>
-        <p:spPr>
-          <a:xfrm>
-            <a:off x="9591040" y="1747520"/>
-            <a:ext cx="81280" cy="1808480"/>
-          </a:xfrm>
-          <a:custGeom>
-            <a:avLst/>
-            <a:gdLst/>
-            <a:ahLst/>
-            <a:cxnLst/>
-            <a:rect l="0" t="0" r="r" b="b"/>
-            <a:pathLst>
-              <a:path w="81280" h="1808480">
-                <a:moveTo>
-                  <a:pt x="0" y="0"/>
-                </a:moveTo>
-                <a:lnTo>
-                  <a:pt x="0" y="1808480"/>
-                </a:lnTo>
-                <a:lnTo>
-                  <a:pt x="81280" y="1808480"/>
-                </a:lnTo>
-              </a:path>
-            </a:pathLst>
-          </a:custGeom>
-          <a:noFill/>
-          <a:ln w="31750">
+      <p:cxnSp>
+        <p:nvCxnSpPr>
+          <p:cNvPr id="15" name="Connector 14"/>
+          <p:cNvCxnSpPr>
+            <a:endCxn id="8" idx="5"/>
+          </p:cNvCxnSpPr>
+          <p:nvPr/>
+        </p:nvCxnSpPr>
+        <p:spPr>
+          <a:xfrm flipV="1">
+            <a:off x="10078720" y="4389120"/>
+            <a:ext cx="528320" cy="812800"/>
+          </a:xfrm>
+          <a:prstGeom prst="line">
+            <a:avLst/>
+          </a:prstGeom>
+          <a:ln w="25400">
             <a:solidFill>
-              <a:srgbClr val="577E68"/>
+              <a:srgbClr val="475569"/>
             </a:solidFill>
+            <a:tailEnd type="triangle" w="med" len="med"/>
           </a:ln>
         </p:spPr>
         <p:style>
-          <a:lnRef idx="1">
+          <a:lnRef idx="2">
             <a:schemeClr val="accent1"/>
           </a:lnRef>
-          <a:fillRef idx="3">
+          <a:fillRef idx="0">
             <a:schemeClr val="accent1"/>
           </a:fillRef>
-          <a:effectRef idx="2">
+          <a:effectRef idx="1">
             <a:schemeClr val="accent1"/>
           </a:effectRef>
           <a:fontRef idx="minor">
-            <a:schemeClr val="lt1"/>
+            <a:schemeClr val="tx1"/>
           </a:fontRef>
         </p:style>
-        <p:txBody>
-          <a:bodyPr rtlCol="0" anchor="ctr"/>
-          <a:lstStyle/>
-          <a:p>
-            <a:pPr algn="ctr"/>
-          </a:p>
-        </p:txBody>
-      </p:sp>
-      <p:sp>
-        <p:nvSpPr>
-          <p:cNvPr id="39" name="Rectangle 38"/>
-          <p:cNvSpPr/>
-          <p:nvPr/>
-        </p:nvSpPr>
-        <p:spPr>
-          <a:xfrm>
-            <a:off x="9601200" y="3495040"/>
-            <a:ext cx="91440" cy="121920"/>
-          </a:xfrm>
-          <a:custGeom>
-            <a:avLst/>
-            <a:gdLst/>
-            <a:ahLst/>
-            <a:cxnLst/>
-            <a:rect l="0" t="0" r="r" b="b"/>
-            <a:pathLst>
-              <a:path w="91440" h="121920">
-                <a:moveTo>
-                  <a:pt x="0" y="0"/>
-                </a:moveTo>
-                <a:lnTo>
-                  <a:pt x="91440" y="60960"/>
-                </a:lnTo>
-                <a:lnTo>
-                  <a:pt x="0" y="121920"/>
-                </a:lnTo>
-              </a:path>
-            </a:pathLst>
-          </a:custGeom>
-          <a:noFill/>
-          <a:ln w="31750">
+      </p:cxnSp>
+      <p:cxnSp>
+        <p:nvCxnSpPr>
+          <p:cNvPr id="16" name="Connector 15"/>
+          <p:cNvCxnSpPr>
+            <a:endCxn id="6" idx="5"/>
+          </p:cNvCxnSpPr>
+          <p:nvPr/>
+        </p:nvCxnSpPr>
+        <p:spPr>
+          <a:xfrm flipH="1" flipV="1">
+            <a:off x="6055360" y="4389120"/>
+            <a:ext cx="121920" cy="812800"/>
+          </a:xfrm>
+          <a:prstGeom prst="line">
+            <a:avLst/>
+          </a:prstGeom>
+          <a:ln w="25400">
             <a:solidFill>
-              <a:srgbClr val="577E68"/>
+              <a:srgbClr val="475569"/>
             </a:solidFill>
+            <a:tailEnd type="triangle" w="med" len="med"/>
           </a:ln>
         </p:spPr>
         <p:style>
-          <a:lnRef idx="1">
+          <a:lnRef idx="2">
             <a:schemeClr val="accent1"/>
           </a:lnRef>
-          <a:fillRef idx="3">
+          <a:fillRef idx="0">
             <a:schemeClr val="accent1"/>
           </a:fillRef>
-          <a:effectRef idx="2">
+          <a:effectRef idx="1">
             <a:schemeClr val="accent1"/>
           </a:effectRef>
           <a:fontRef idx="minor">
-            <a:schemeClr val="lt1"/>
+            <a:schemeClr val="tx1"/>
           </a:fontRef>
         </p:style>
-        <p:txBody>
-          <a:bodyPr rtlCol="0" anchor="ctr"/>
-          <a:lstStyle/>
-          <a:p>
-            <a:pPr algn="ctr"/>
-          </a:p>
-        </p:txBody>
-      </p:sp>
-      <p:sp>
-        <p:nvSpPr>
-          <p:cNvPr id="40" name="Rectangle 39"/>
+      </p:cxnSp>
+      <p:sp>
+        <p:nvSpPr>
+          <p:cNvPr id="17" name="Rectangle 16"/>
           <p:cNvSpPr/>
           <p:nvPr/>
         </p:nvSpPr>
         <p:spPr>
           <a:xfrm>
-            <a:off x="6096000" y="1747520"/>
-            <a:ext cx="1442720" cy="355600"/>
-          </a:xfrm>
-          <a:custGeom>
-            <a:avLst/>
-            <a:gdLst/>
-            <a:ahLst/>
-            <a:cxnLst/>
-            <a:rect l="0" t="0" r="r" b="b"/>
-            <a:pathLst>
-              <a:path w="1442720" h="355600">
-                <a:moveTo>
-                  <a:pt x="1442720" y="0"/>
-                </a:moveTo>
-                <a:lnTo>
-                  <a:pt x="1056640" y="0"/>
-                </a:lnTo>
-                <a:lnTo>
-                  <a:pt x="1056640" y="121920"/>
-                </a:lnTo>
-                <a:lnTo>
-                  <a:pt x="0" y="121920"/>
-                </a:lnTo>
-                <a:lnTo>
-                  <a:pt x="0" y="355600"/>
-                </a:lnTo>
-              </a:path>
-            </a:pathLst>
-          </a:custGeom>
-          <a:noFill/>
-          <a:ln w="31750">
-            <a:solidFill>
-              <a:srgbClr val="B75D4A"/>
-            </a:solidFill>
-          </a:ln>
-        </p:spPr>
-        <p:style>
-          <a:lnRef idx="1">
-            <a:schemeClr val="accent1"/>
-          </a:lnRef>
-          <a:fillRef idx="3">
-            <a:schemeClr val="accent1"/>
-          </a:fillRef>
-          <a:effectRef idx="2">
-            <a:schemeClr val="accent1"/>
-          </a:effectRef>
-          <a:fontRef idx="minor">
-            <a:schemeClr val="lt1"/>
-          </a:fontRef>
-        </p:style>
-        <p:txBody>
-          <a:bodyPr rtlCol="0" anchor="ctr"/>
-          <a:lstStyle/>
-          <a:p>
-            <a:pPr algn="ctr"/>
-          </a:p>
-        </p:txBody>
-      </p:sp>
-      <p:sp>
-        <p:nvSpPr>
-          <p:cNvPr id="41" name="Rectangle 40"/>
-          <p:cNvSpPr/>
-          <p:nvPr/>
-        </p:nvSpPr>
-        <p:spPr>
-          <a:xfrm>
-            <a:off x="6035040" y="2011680"/>
-            <a:ext cx="121920" cy="91440"/>
-          </a:xfrm>
-          <a:custGeom>
-            <a:avLst/>
-            <a:gdLst/>
-            <a:ahLst/>
-            <a:cxnLst/>
-            <a:rect l="0" t="0" r="r" b="b"/>
-            <a:pathLst>
-              <a:path w="121920" h="91440">
-                <a:moveTo>
-                  <a:pt x="0" y="0"/>
-                </a:moveTo>
-                <a:lnTo>
-                  <a:pt x="60960" y="91440"/>
-                </a:lnTo>
-                <a:lnTo>
-                  <a:pt x="121920" y="0"/>
-                </a:lnTo>
-              </a:path>
-            </a:pathLst>
-          </a:custGeom>
-          <a:noFill/>
-          <a:ln w="31750">
-            <a:solidFill>
-              <a:srgbClr val="B75D4A"/>
-            </a:solidFill>
-          </a:ln>
-        </p:spPr>
-        <p:style>
-          <a:lnRef idx="1">
-            <a:schemeClr val="accent1"/>
-          </a:lnRef>
-          <a:fillRef idx="3">
-            <a:schemeClr val="accent1"/>
-          </a:fillRef>
-          <a:effectRef idx="2">
-            <a:schemeClr val="accent1"/>
-          </a:effectRef>
-          <a:fontRef idx="minor">
-            <a:schemeClr val="lt1"/>
-          </a:fontRef>
-        </p:style>
-        <p:txBody>
-          <a:bodyPr rtlCol="0" anchor="ctr"/>
-          <a:lstStyle/>
-          <a:p>
-            <a:pPr algn="ctr"/>
-          </a:p>
-        </p:txBody>
-      </p:sp>
-      <p:sp>
-        <p:nvSpPr>
-          <p:cNvPr id="42" name="Rectangle 41"/>
-          <p:cNvSpPr/>
-          <p:nvPr/>
-        </p:nvSpPr>
-        <p:spPr>
-          <a:xfrm>
-            <a:off x="9753600" y="2103120"/>
-            <a:ext cx="1950720" cy="3048000"/>
-          </a:xfrm>
-          <a:prstGeom prst="rect">
-            <a:avLst/>
-          </a:prstGeom>
-          <a:solidFill>
-            <a:srgbClr val="FFFFFF"/>
-          </a:solidFill>
-          <a:ln w="25400">
-            <a:solidFill>
-              <a:srgbClr val="B9CCD9"/>
-            </a:solidFill>
-          </a:ln>
-        </p:spPr>
-        <p:style>
-          <a:lnRef idx="1">
-            <a:schemeClr val="accent1"/>
-          </a:lnRef>
-          <a:fillRef idx="3">
-            <a:schemeClr val="accent1"/>
-          </a:fillRef>
-          <a:effectRef idx="2">
-            <a:schemeClr val="accent1"/>
-          </a:effectRef>
-          <a:fontRef idx="minor">
-            <a:schemeClr val="lt1"/>
-          </a:fontRef>
-        </p:style>
-        <p:txBody>
-          <a:bodyPr rtlCol="0" anchor="t" wrap="none" lIns="0" rIns="0" tIns="325120" bIns="0"/>
-          <a:lstStyle/>
-          <a:p>
-            <a:pPr algn="ctr">
-              <a:lnSpc>
-                <a:spcPts val="1152"/>
-              </a:lnSpc>
-              <a:spcBef>
-                <a:spcPts val="0"/>
-              </a:spcBef>
-              <a:spcAft>
-                <a:spcPts val="0"/>
-              </a:spcAft>
-            </a:pPr>
-            <a:r>
-              <a:rPr sz="1200" b="1">
-                <a:solidFill>
-                  <a:srgbClr val="6E899D"/>
-                </a:solidFill>
-                <a:latin typeface="Arial"/>
-              </a:rPr>
-              <a:t>05</a:t>
-            </a:r>
-          </a:p>
-          <a:p>
-            <a:pPr algn="ctr">
-              <a:lnSpc>
-                <a:spcPts val="1728"/>
-              </a:lnSpc>
-              <a:spcBef>
-                <a:spcPts val="7328"/>
-              </a:spcBef>
-              <a:spcAft>
-                <a:spcPts val="0"/>
-              </a:spcAft>
-            </a:pPr>
-            <a:r>
-              <a:rPr sz="1800" b="1">
-                <a:solidFill>
-                  <a:srgbClr val="15334A"/>
-                </a:solidFill>
-                <a:latin typeface="Arial"/>
-              </a:rPr>
-              <a:t>Publishing</a:t>
-            </a:r>
-          </a:p>
-          <a:p>
-            <a:pPr algn="ctr">
-              <a:lnSpc>
-                <a:spcPts val="1344"/>
-              </a:lnSpc>
-              <a:spcBef>
-                <a:spcPts val="1712"/>
-              </a:spcBef>
-              <a:spcAft>
-                <a:spcPts val="0"/>
-              </a:spcAft>
-            </a:pPr>
-            <a:r>
-              <a:rPr sz="1400">
-                <a:solidFill>
-                  <a:srgbClr val="557085"/>
-                </a:solidFill>
-                <a:latin typeface="Arial"/>
-              </a:rPr>
-              <a:t>Versioned model</a:t>
-            </a:r>
-          </a:p>
-          <a:p>
-            <a:pPr algn="ctr">
-              <a:lnSpc>
-                <a:spcPts val="1344"/>
-              </a:lnSpc>
-              <a:spcBef>
-                <a:spcPts val="336"/>
-              </a:spcBef>
-              <a:spcAft>
-                <a:spcPts val="0"/>
-              </a:spcAft>
-            </a:pPr>
-            <a:r>
-              <a:rPr sz="1400">
-                <a:solidFill>
-                  <a:srgbClr val="557085"/>
-                </a:solidFill>
-                <a:latin typeface="Arial"/>
-              </a:rPr>
-              <a:t>artifact</a:t>
-            </a:r>
-          </a:p>
-          <a:p>
-            <a:pPr algn="ctr">
-              <a:lnSpc>
-                <a:spcPts val="960"/>
-              </a:lnSpc>
-              <a:spcBef>
-                <a:spcPts val="3456"/>
-              </a:spcBef>
-              <a:spcAft>
-                <a:spcPts val="0"/>
-              </a:spcAft>
-            </a:pPr>
-            <a:r>
-              <a:rPr sz="1000" b="1">
-                <a:solidFill>
-                  <a:srgbClr val="7892A4"/>
-                </a:solidFill>
-                <a:latin typeface="Arial"/>
-              </a:rPr>
-              <a:t>OUTPUT</a:t>
-            </a:r>
-          </a:p>
-          <a:p>
-            <a:pPr algn="r">
-              <a:lnSpc>
-                <a:spcPts val="1056"/>
-              </a:lnSpc>
-              <a:spcBef>
-                <a:spcPts val="0"/>
-              </a:spcBef>
-              <a:spcAft>
-                <a:spcPts val="0"/>
-              </a:spcAft>
-            </a:pPr>
-            <a:r>
-              <a:rPr sz="1100" b="1">
-                <a:solidFill>
-                  <a:srgbClr val="577E68"/>
-                </a:solidFill>
-                <a:latin typeface="Arial"/>
-              </a:rPr>
-              <a:t>ARTIFACT</a:t>
-            </a:r>
-          </a:p>
-        </p:txBody>
-      </p:sp>
-      <p:sp>
-        <p:nvSpPr>
-          <p:cNvPr id="43" name="Rectangle 42"/>
-          <p:cNvSpPr/>
-          <p:nvPr/>
-        </p:nvSpPr>
-        <p:spPr>
-          <a:xfrm>
-            <a:off x="9753600" y="2103120"/>
-            <a:ext cx="1950720" cy="71120"/>
-          </a:xfrm>
-          <a:prstGeom prst="rect">
-            <a:avLst/>
-          </a:prstGeom>
-          <a:solidFill>
-            <a:srgbClr val="577E68"/>
-          </a:solidFill>
-          <a:ln>
-            <a:noFill/>
-          </a:ln>
-        </p:spPr>
-        <p:style>
-          <a:lnRef idx="1">
-            <a:schemeClr val="accent1"/>
-          </a:lnRef>
-          <a:fillRef idx="3">
-            <a:schemeClr val="accent1"/>
-          </a:fillRef>
-          <a:effectRef idx="2">
-            <a:schemeClr val="accent1"/>
-          </a:effectRef>
-          <a:fontRef idx="minor">
-            <a:schemeClr val="lt1"/>
-          </a:fontRef>
-        </p:style>
-        <p:txBody>
-          <a:bodyPr rtlCol="0" anchor="ctr"/>
-          <a:lstStyle/>
-          <a:p>
-            <a:pPr algn="ctr"/>
-          </a:p>
-        </p:txBody>
-      </p:sp>
-      <p:sp>
-        <p:nvSpPr>
-          <p:cNvPr id="44" name="Rectangle 43"/>
-          <p:cNvSpPr/>
-          <p:nvPr/>
-        </p:nvSpPr>
-        <p:spPr>
-          <a:xfrm>
-            <a:off x="9977120" y="2672080"/>
-            <a:ext cx="508000" cy="508000"/>
-          </a:xfrm>
-          <a:prstGeom prst="rect">
-            <a:avLst/>
-          </a:prstGeom>
-          <a:solidFill>
-            <a:srgbClr val="EEF6F1"/>
-          </a:solidFill>
-          <a:ln>
-            <a:noFill/>
-          </a:ln>
-        </p:spPr>
-        <p:style>
-          <a:lnRef idx="1">
-            <a:schemeClr val="accent1"/>
-          </a:lnRef>
-          <a:fillRef idx="3">
-            <a:schemeClr val="accent1"/>
-          </a:fillRef>
-          <a:effectRef idx="2">
-            <a:schemeClr val="accent1"/>
-          </a:effectRef>
-          <a:fontRef idx="minor">
-            <a:schemeClr val="lt1"/>
-          </a:fontRef>
-        </p:style>
-        <p:txBody>
-          <a:bodyPr rtlCol="0" anchor="ctr"/>
-          <a:lstStyle/>
-          <a:p>
-            <a:pPr algn="ctr"/>
-          </a:p>
-        </p:txBody>
-      </p:sp>
-      <p:sp>
-        <p:nvSpPr>
-          <p:cNvPr id="45" name="Rectangle 44"/>
-          <p:cNvSpPr/>
-          <p:nvPr/>
-        </p:nvSpPr>
-        <p:spPr>
-          <a:xfrm>
-            <a:off x="10088880" y="2753360"/>
-            <a:ext cx="264160" cy="335280"/>
-          </a:xfrm>
-          <a:custGeom>
-            <a:avLst/>
-            <a:gdLst/>
-            <a:ahLst/>
-            <a:cxnLst/>
-            <a:rect l="0" t="0" r="r" b="b"/>
-            <a:pathLst>
-              <a:path w="264160" h="335280">
-                <a:moveTo>
-                  <a:pt x="0" y="254000"/>
-                </a:moveTo>
-                <a:lnTo>
-                  <a:pt x="264160" y="254000"/>
-                </a:lnTo>
-                <a:lnTo>
-                  <a:pt x="264160" y="335280"/>
-                </a:lnTo>
-                <a:lnTo>
-                  <a:pt x="0" y="335280"/>
-                </a:lnTo>
-                <a:close/>
-                <a:moveTo>
-                  <a:pt x="132080" y="213360"/>
-                </a:moveTo>
-                <a:lnTo>
-                  <a:pt x="132080" y="0"/>
-                </a:lnTo>
-                <a:moveTo>
-                  <a:pt x="60960" y="71120"/>
-                </a:moveTo>
-                <a:lnTo>
-                  <a:pt x="132080" y="0"/>
-                </a:lnTo>
-                <a:lnTo>
-                  <a:pt x="203200" y="71120"/>
-                </a:lnTo>
-              </a:path>
-            </a:pathLst>
-          </a:custGeom>
-          <a:noFill/>
-          <a:ln w="33020">
-            <a:solidFill>
-              <a:srgbClr val="577E68"/>
-            </a:solidFill>
-          </a:ln>
-        </p:spPr>
-        <p:style>
-          <a:lnRef idx="1">
-            <a:schemeClr val="accent1"/>
-          </a:lnRef>
-          <a:fillRef idx="3">
-            <a:schemeClr val="accent1"/>
-          </a:fillRef>
-          <a:effectRef idx="2">
-            <a:schemeClr val="accent1"/>
-          </a:effectRef>
-          <a:fontRef idx="minor">
-            <a:schemeClr val="lt1"/>
-          </a:fontRef>
-        </p:style>
-        <p:txBody>
-          <a:bodyPr rtlCol="0" anchor="ctr"/>
-          <a:lstStyle/>
-          <a:p>
-            <a:pPr algn="ctr"/>
-          </a:p>
-        </p:txBody>
-      </p:sp>
-      <p:sp>
-        <p:nvSpPr>
-          <p:cNvPr id="46" name="Rectangle 45"/>
-          <p:cNvSpPr/>
-          <p:nvPr/>
-        </p:nvSpPr>
-        <p:spPr>
-          <a:xfrm>
-            <a:off x="9977120" y="4561840"/>
-            <a:ext cx="1503680" cy="1"/>
-          </a:xfrm>
-          <a:custGeom>
-            <a:avLst/>
-            <a:gdLst/>
-            <a:ahLst/>
-            <a:cxnLst/>
-            <a:rect l="0" t="0" r="r" b="b"/>
-            <a:pathLst>
-              <a:path w="1503680" h="1">
-                <a:moveTo>
-                  <a:pt x="0" y="0"/>
-                </a:moveTo>
-                <a:lnTo>
-                  <a:pt x="1503680" y="0"/>
-                </a:lnTo>
-              </a:path>
-            </a:pathLst>
-          </a:custGeom>
-          <a:noFill/>
-          <a:ln w="19050">
-            <a:solidFill>
-              <a:srgbClr val="E2EBF0"/>
-            </a:solidFill>
-          </a:ln>
-        </p:spPr>
-        <p:style>
-          <a:lnRef idx="1">
-            <a:schemeClr val="accent1"/>
-          </a:lnRef>
-          <a:fillRef idx="3">
-            <a:schemeClr val="accent1"/>
-          </a:fillRef>
-          <a:effectRef idx="2">
-            <a:schemeClr val="accent1"/>
-          </a:effectRef>
-          <a:fontRef idx="minor">
-            <a:schemeClr val="lt1"/>
-          </a:fontRef>
-        </p:style>
-        <p:txBody>
-          <a:bodyPr rtlCol="0" anchor="ctr"/>
-          <a:lstStyle/>
-          <a:p>
-            <a:pPr algn="ctr"/>
-          </a:p>
-        </p:txBody>
-      </p:sp>
-      <p:sp>
-        <p:nvSpPr>
-          <p:cNvPr id="47" name="Rectangle 46"/>
-          <p:cNvSpPr/>
-          <p:nvPr/>
-        </p:nvSpPr>
-        <p:spPr>
-          <a:xfrm>
-            <a:off x="487680" y="5608320"/>
+            <a:off x="487680" y="6258560"/>
             <a:ext cx="11216640" cy="1"/>
           </a:xfrm>
           <a:custGeom>
@@ -6304,7 +4239,7 @@
           <a:noFill/>
           <a:ln w="19050">
             <a:solidFill>
-              <a:srgbClr val="D9E5EC"/>
+              <a:srgbClr val="E2E8F0"/>
             </a:solidFill>
           </a:ln>
         </p:spPr>
@@ -6332,14 +4267,14 @@
       </p:sp>
       <p:sp>
         <p:nvSpPr>
-          <p:cNvPr id="48" name="TextBox 47"/>
+          <p:cNvPr id="18" name="TextBox 17"/>
           <p:cNvSpPr txBox="1"/>
           <p:nvPr/>
         </p:nvSpPr>
         <p:spPr>
           <a:xfrm>
-            <a:off x="487680" y="388620"/>
-            <a:ext cx="3076956" cy="171704"/>
+            <a:off x="487680" y="558800"/>
+            <a:ext cx="2686685" cy="158496"/>
           </a:xfrm>
           <a:prstGeom prst="rect">
             <a:avLst/>
@@ -6354,11 +4289,11 @@
           <a:p>
             <a:pPr algn="l"/>
             <a:r>
-              <a:rPr sz="1300" b="1">
-                <a:solidFill>
-                  <a:srgbClr val="5B7890"/>
-                </a:solidFill>
-                <a:latin typeface="Arial"/>
+              <a:rPr sz="1200">
+                <a:solidFill>
+                  <a:srgbClr val="64748B"/>
+                </a:solidFill>
+                <a:latin typeface="DejaVu Sans"/>
               </a:rPr>
               <a:t>REFERENCE ARCHITECTURE • BASELINE</a:t>
             </a:r>
@@ -6367,14 +4302,14 @@
       </p:sp>
       <p:sp>
         <p:nvSpPr>
-          <p:cNvPr id="49" name="TextBox 48"/>
+          <p:cNvPr id="19" name="TextBox 18"/>
           <p:cNvSpPr txBox="1"/>
           <p:nvPr/>
         </p:nvSpPr>
         <p:spPr>
           <a:xfrm>
-            <a:off x="487680" y="604520"/>
-            <a:ext cx="6187440" cy="396240"/>
+            <a:off x="487680" y="812800"/>
+            <a:ext cx="5678488" cy="422656"/>
           </a:xfrm>
           <a:prstGeom prst="rect">
             <a:avLst/>
@@ -6389,11 +4324,11 @@
           <a:p>
             <a:pPr algn="l"/>
             <a:r>
-              <a:rPr sz="3000" b="1">
-                <a:solidFill>
-                  <a:srgbClr val="15334A"/>
-                </a:solidFill>
-                <a:latin typeface="Arial"/>
+              <a:rPr sz="3200" b="1">
+                <a:solidFill>
+                  <a:srgbClr val="1E3A5F"/>
+                </a:solidFill>
+                <a:latin typeface="DejaVu Sans"/>
               </a:rPr>
               <a:t>Training pipeline architecture</a:t>
             </a:r>
@@ -6402,14 +4337,14 @@
       </p:sp>
       <p:sp>
         <p:nvSpPr>
-          <p:cNvPr id="50" name="TextBox 49"/>
+          <p:cNvPr id="20" name="TextBox 19"/>
           <p:cNvSpPr txBox="1"/>
           <p:nvPr/>
         </p:nvSpPr>
         <p:spPr>
           <a:xfrm>
-            <a:off x="487680" y="1013460"/>
-            <a:ext cx="6979920" cy="198120"/>
+            <a:off x="487680" y="1259840"/>
+            <a:ext cx="5936456" cy="211328"/>
           </a:xfrm>
           <a:prstGeom prst="rect">
             <a:avLst/>
@@ -6424,11 +4359,11 @@
           <a:p>
             <a:pPr algn="l"/>
             <a:r>
-              <a:rPr sz="1500">
-                <a:solidFill>
-                  <a:srgbClr val="5B7890"/>
-                </a:solidFill>
-                <a:latin typeface="Arial"/>
+              <a:rPr sz="1600">
+                <a:solidFill>
+                  <a:srgbClr val="374151"/>
+                </a:solidFill>
+                <a:latin typeface="DejaVu Sans"/>
               </a:rPr>
               <a:t>Data moves through a controlled sequence of native, editable stages.</a:t>
             </a:r>
@@ -6437,14 +4372,14 @@
       </p:sp>
       <p:sp>
         <p:nvSpPr>
-          <p:cNvPr id="51" name="TextBox 50"/>
+          <p:cNvPr id="21" name="TextBox 20"/>
           <p:cNvSpPr txBox="1"/>
           <p:nvPr/>
         </p:nvSpPr>
         <p:spPr>
           <a:xfrm>
-            <a:off x="487680" y="1684020"/>
-            <a:ext cx="1551432" cy="145288"/>
+            <a:off x="487680" y="1859280"/>
+            <a:ext cx="1607502" cy="158496"/>
           </a:xfrm>
           <a:prstGeom prst="rect">
             <a:avLst/>
@@ -6459,11 +4394,11 @@
           <a:p>
             <a:pPr algn="l"/>
             <a:r>
-              <a:rPr sz="1100" b="1">
-                <a:solidFill>
-                  <a:srgbClr val="7892A4"/>
-                </a:solidFill>
-                <a:latin typeface="Arial"/>
+              <a:rPr sz="1200">
+                <a:solidFill>
+                  <a:srgbClr val="64748B"/>
+                </a:solidFill>
+                <a:latin typeface="DejaVu Sans"/>
               </a:rPr>
               <a:t>DIRECTED DATA FLOW</a:t>
             </a:r>
@@ -6472,14 +4407,14 @@
       </p:sp>
       <p:sp>
         <p:nvSpPr>
-          <p:cNvPr id="52" name="TextBox 51"/>
+          <p:cNvPr id="22" name="TextBox 21"/>
           <p:cNvSpPr txBox="1"/>
           <p:nvPr/>
         </p:nvSpPr>
         <p:spPr>
           <a:xfrm>
-            <a:off x="8870188" y="1577340"/>
-            <a:ext cx="659892" cy="118872"/>
+            <a:off x="731520" y="2428240"/>
+            <a:ext cx="399098" cy="158496"/>
           </a:xfrm>
           <a:prstGeom prst="rect">
             <a:avLst/>
@@ -6492,29 +4427,29 @@
           </a:bodyPr>
           <a:lstStyle/>
           <a:p>
-            <a:pPr algn="r"/>
-            <a:r>
-              <a:rPr sz="900" b="1">
-                <a:solidFill>
-                  <a:srgbClr val="577E68"/>
-                </a:solidFill>
-                <a:latin typeface="Arial"/>
+            <a:pPr algn="l"/>
+            <a:r>
+              <a:rPr sz="1200">
+                <a:solidFill>
+                  <a:srgbClr val="64748B"/>
+                </a:solidFill>
+                <a:latin typeface="DejaVu Sans"/>
               </a:rPr>
-              <a:t>APPROVE</a:t>
-            </a:r>
-          </a:p>
-        </p:txBody>
-      </p:sp>
-      <p:sp>
-        <p:nvSpPr>
-          <p:cNvPr id="53" name="TextBox 52"/>
+              <a:t>01</a:t>
+            </a:r>
+          </a:p>
+        </p:txBody>
+      </p:sp>
+      <p:sp>
+        <p:nvSpPr>
+          <p:cNvPr id="23" name="TextBox 22"/>
           <p:cNvSpPr txBox="1"/>
           <p:nvPr/>
         </p:nvSpPr>
         <p:spPr>
           <a:xfrm>
-            <a:off x="6075426" y="1739900"/>
-            <a:ext cx="1016508" cy="118872"/>
+            <a:off x="731520" y="4053840"/>
+            <a:ext cx="1350010" cy="158496"/>
           </a:xfrm>
           <a:prstGeom prst="rect">
             <a:avLst/>
@@ -6527,29 +4462,29 @@
           </a:bodyPr>
           <a:lstStyle/>
           <a:p>
-            <a:pPr algn="ctr"/>
-            <a:r>
-              <a:rPr sz="900" b="1">
-                <a:solidFill>
-                  <a:srgbClr val="B75D4A"/>
-                </a:solidFill>
-                <a:latin typeface="Arial"/>
+            <a:pPr algn="l"/>
+            <a:r>
+              <a:rPr sz="1200">
+                <a:solidFill>
+                  <a:srgbClr val="64748B"/>
+                </a:solidFill>
+                <a:latin typeface="DejaVu Sans"/>
               </a:rPr>
-              <a:t>FAIL / RE-RUN</a:t>
-            </a:r>
-          </a:p>
-        </p:txBody>
-      </p:sp>
-      <p:sp>
-        <p:nvSpPr>
-          <p:cNvPr id="54" name="TextBox 53"/>
+              <a:t>OUTPUT: DATASET</a:t>
+            </a:r>
+          </a:p>
+        </p:txBody>
+      </p:sp>
+      <p:sp>
+        <p:nvSpPr>
+          <p:cNvPr id="24" name="TextBox 23"/>
           <p:cNvSpPr txBox="1"/>
           <p:nvPr/>
         </p:nvSpPr>
         <p:spPr>
           <a:xfrm>
-            <a:off x="487680" y="5839460"/>
-            <a:ext cx="1260856" cy="145288"/>
+            <a:off x="3007360" y="2428240"/>
+            <a:ext cx="399098" cy="158496"/>
           </a:xfrm>
           <a:prstGeom prst="rect">
             <a:avLst/>
@@ -6564,27 +4499,27 @@
           <a:p>
             <a:pPr algn="l"/>
             <a:r>
-              <a:rPr sz="1100" b="1">
-                <a:solidFill>
-                  <a:srgbClr val="7892A4"/>
-                </a:solidFill>
-                <a:latin typeface="Arial"/>
+              <a:rPr sz="1200">
+                <a:solidFill>
+                  <a:srgbClr val="64748B"/>
+                </a:solidFill>
+                <a:latin typeface="DejaVu Sans"/>
               </a:rPr>
-              <a:t>BASELINE SCOPE</a:t>
-            </a:r>
-          </a:p>
-        </p:txBody>
-      </p:sp>
-      <p:sp>
-        <p:nvSpPr>
-          <p:cNvPr id="55" name="TextBox 54"/>
+              <a:t>02</a:t>
+            </a:r>
+          </a:p>
+        </p:txBody>
+      </p:sp>
+      <p:sp>
+        <p:nvSpPr>
+          <p:cNvPr id="25" name="TextBox 24"/>
           <p:cNvSpPr txBox="1"/>
           <p:nvPr/>
         </p:nvSpPr>
         <p:spPr>
           <a:xfrm>
-            <a:off x="487680" y="6070600"/>
-            <a:ext cx="4959096" cy="184912"/>
+            <a:off x="3007360" y="4053840"/>
+            <a:ext cx="1431131" cy="158496"/>
           </a:xfrm>
           <a:prstGeom prst="rect">
             <a:avLst/>
@@ -6599,13 +4534,328 @@
           <a:p>
             <a:pPr algn="l"/>
             <a:r>
-              <a:rPr sz="1400">
-                <a:solidFill>
-                  <a:srgbClr val="557085"/>
-                </a:solidFill>
-                <a:latin typeface="Arial"/>
+              <a:rPr sz="1200">
+                <a:solidFill>
+                  <a:srgbClr val="64748B"/>
+                </a:solidFill>
+                <a:latin typeface="DejaVu Sans"/>
               </a:rPr>
-              <a:t>Five bounded stages with explicit forward handoffs.</a:t>
+              <a:t>OUTPUT: FEATURES</a:t>
+            </a:r>
+          </a:p>
+        </p:txBody>
+      </p:sp>
+      <p:sp>
+        <p:nvSpPr>
+          <p:cNvPr id="26" name="TextBox 25"/>
+          <p:cNvSpPr txBox="1"/>
+          <p:nvPr/>
+        </p:nvSpPr>
+        <p:spPr>
+          <a:xfrm>
+            <a:off x="5283200" y="2428240"/>
+            <a:ext cx="399098" cy="158496"/>
+          </a:xfrm>
+          <a:prstGeom prst="rect">
+            <a:avLst/>
+          </a:prstGeom>
+          <a:noFill/>
+        </p:spPr>
+        <p:txBody>
+          <a:bodyPr wrap="none" tIns="0" bIns="0" lIns="0" rIns="0">
+            <a:spAutoFit/>
+          </a:bodyPr>
+          <a:lstStyle/>
+          <a:p>
+            <a:pPr algn="l"/>
+            <a:r>
+              <a:rPr sz="1200">
+                <a:solidFill>
+                  <a:srgbClr val="64748B"/>
+                </a:solidFill>
+                <a:latin typeface="DejaVu Sans"/>
+              </a:rPr>
+              <a:t>03</a:t>
+            </a:r>
+          </a:p>
+        </p:txBody>
+      </p:sp>
+      <p:sp>
+        <p:nvSpPr>
+          <p:cNvPr id="27" name="TextBox 26"/>
+          <p:cNvSpPr txBox="1"/>
+          <p:nvPr/>
+        </p:nvSpPr>
+        <p:spPr>
+          <a:xfrm>
+            <a:off x="5283200" y="4053840"/>
+            <a:ext cx="1247299" cy="158496"/>
+          </a:xfrm>
+          <a:prstGeom prst="rect">
+            <a:avLst/>
+          </a:prstGeom>
+          <a:noFill/>
+        </p:spPr>
+        <p:txBody>
+          <a:bodyPr wrap="none" tIns="0" bIns="0" lIns="0" rIns="0">
+            <a:spAutoFit/>
+          </a:bodyPr>
+          <a:lstStyle/>
+          <a:p>
+            <a:pPr algn="l"/>
+            <a:r>
+              <a:rPr sz="1200">
+                <a:solidFill>
+                  <a:srgbClr val="64748B"/>
+                </a:solidFill>
+                <a:latin typeface="DejaVu Sans"/>
+              </a:rPr>
+              <a:t>OUTPUT: MODEL</a:t>
+            </a:r>
+          </a:p>
+        </p:txBody>
+      </p:sp>
+      <p:sp>
+        <p:nvSpPr>
+          <p:cNvPr id="28" name="TextBox 27"/>
+          <p:cNvSpPr txBox="1"/>
+          <p:nvPr/>
+        </p:nvSpPr>
+        <p:spPr>
+          <a:xfrm>
+            <a:off x="7559040" y="2428240"/>
+            <a:ext cx="399098" cy="158496"/>
+          </a:xfrm>
+          <a:prstGeom prst="rect">
+            <a:avLst/>
+          </a:prstGeom>
+          <a:noFill/>
+        </p:spPr>
+        <p:txBody>
+          <a:bodyPr wrap="none" tIns="0" bIns="0" lIns="0" rIns="0">
+            <a:spAutoFit/>
+          </a:bodyPr>
+          <a:lstStyle/>
+          <a:p>
+            <a:pPr algn="l"/>
+            <a:r>
+              <a:rPr sz="1200">
+                <a:solidFill>
+                  <a:srgbClr val="64748B"/>
+                </a:solidFill>
+                <a:latin typeface="DejaVu Sans"/>
+              </a:rPr>
+              <a:t>04</a:t>
+            </a:r>
+          </a:p>
+        </p:txBody>
+      </p:sp>
+      <p:sp>
+        <p:nvSpPr>
+          <p:cNvPr id="29" name="TextBox 28"/>
+          <p:cNvSpPr txBox="1"/>
+          <p:nvPr/>
+        </p:nvSpPr>
+        <p:spPr>
+          <a:xfrm>
+            <a:off x="7559040" y="4053840"/>
+            <a:ext cx="1347311" cy="158496"/>
+          </a:xfrm>
+          <a:prstGeom prst="rect">
+            <a:avLst/>
+          </a:prstGeom>
+          <a:noFill/>
+        </p:spPr>
+        <p:txBody>
+          <a:bodyPr wrap="none" tIns="0" bIns="0" lIns="0" rIns="0">
+            <a:spAutoFit/>
+          </a:bodyPr>
+          <a:lstStyle/>
+          <a:p>
+            <a:pPr algn="l"/>
+            <a:r>
+              <a:rPr sz="1200">
+                <a:solidFill>
+                  <a:srgbClr val="64748B"/>
+                </a:solidFill>
+                <a:latin typeface="DejaVu Sans"/>
+              </a:rPr>
+              <a:t>OUTPUT: METRICS</a:t>
+            </a:r>
+          </a:p>
+        </p:txBody>
+      </p:sp>
+      <p:sp>
+        <p:nvSpPr>
+          <p:cNvPr id="30" name="TextBox 29"/>
+          <p:cNvSpPr txBox="1"/>
+          <p:nvPr/>
+        </p:nvSpPr>
+        <p:spPr>
+          <a:xfrm>
+            <a:off x="9834880" y="2428240"/>
+            <a:ext cx="399098" cy="158496"/>
+          </a:xfrm>
+          <a:prstGeom prst="rect">
+            <a:avLst/>
+          </a:prstGeom>
+          <a:noFill/>
+        </p:spPr>
+        <p:txBody>
+          <a:bodyPr wrap="none" tIns="0" bIns="0" lIns="0" rIns="0">
+            <a:spAutoFit/>
+          </a:bodyPr>
+          <a:lstStyle/>
+          <a:p>
+            <a:pPr algn="l"/>
+            <a:r>
+              <a:rPr sz="1200">
+                <a:solidFill>
+                  <a:srgbClr val="64748B"/>
+                </a:solidFill>
+                <a:latin typeface="DejaVu Sans"/>
+              </a:rPr>
+              <a:t>05</a:t>
+            </a:r>
+          </a:p>
+        </p:txBody>
+      </p:sp>
+      <p:sp>
+        <p:nvSpPr>
+          <p:cNvPr id="31" name="TextBox 30"/>
+          <p:cNvSpPr txBox="1"/>
+          <p:nvPr/>
+        </p:nvSpPr>
+        <p:spPr>
+          <a:xfrm>
+            <a:off x="9834880" y="4053840"/>
+            <a:ext cx="1376839" cy="158496"/>
+          </a:xfrm>
+          <a:prstGeom prst="rect">
+            <a:avLst/>
+          </a:prstGeom>
+          <a:noFill/>
+        </p:spPr>
+        <p:txBody>
+          <a:bodyPr wrap="none" tIns="0" bIns="0" lIns="0" rIns="0">
+            <a:spAutoFit/>
+          </a:bodyPr>
+          <a:lstStyle/>
+          <a:p>
+            <a:pPr algn="l"/>
+            <a:r>
+              <a:rPr sz="1200">
+                <a:solidFill>
+                  <a:srgbClr val="64748B"/>
+                </a:solidFill>
+                <a:latin typeface="DejaVu Sans"/>
+              </a:rPr>
+              <a:t>OUTPUT: ARTIFACT</a:t>
+            </a:r>
+          </a:p>
+        </p:txBody>
+      </p:sp>
+      <p:sp>
+        <p:nvSpPr>
+          <p:cNvPr id="32" name="TextBox 31"/>
+          <p:cNvSpPr txBox="1"/>
+          <p:nvPr/>
+        </p:nvSpPr>
+        <p:spPr>
+          <a:xfrm>
+            <a:off x="10728960" y="4704080"/>
+            <a:ext cx="813276" cy="158496"/>
+          </a:xfrm>
+          <a:prstGeom prst="rect">
+            <a:avLst/>
+          </a:prstGeom>
+          <a:noFill/>
+        </p:spPr>
+        <p:txBody>
+          <a:bodyPr wrap="none" tIns="0" bIns="0" lIns="0" rIns="0">
+            <a:spAutoFit/>
+          </a:bodyPr>
+          <a:lstStyle/>
+          <a:p>
+            <a:pPr algn="l"/>
+            <a:r>
+              <a:rPr sz="1200">
+                <a:solidFill>
+                  <a:srgbClr val="64748B"/>
+                </a:solidFill>
+                <a:latin typeface="DejaVu Sans"/>
+              </a:rPr>
+              <a:t>APPROVE</a:t>
+            </a:r>
+          </a:p>
+        </p:txBody>
+      </p:sp>
+      <p:sp>
+        <p:nvSpPr>
+          <p:cNvPr id="33" name="TextBox 32"/>
+          <p:cNvSpPr txBox="1"/>
+          <p:nvPr/>
+        </p:nvSpPr>
+        <p:spPr>
+          <a:xfrm>
+            <a:off x="3088164" y="4704080"/>
+            <a:ext cx="1544796" cy="158496"/>
+          </a:xfrm>
+          <a:prstGeom prst="rect">
+            <a:avLst/>
+          </a:prstGeom>
+          <a:noFill/>
+        </p:spPr>
+        <p:txBody>
+          <a:bodyPr wrap="none" tIns="0" bIns="0" lIns="0" rIns="0">
+            <a:spAutoFit/>
+          </a:bodyPr>
+          <a:lstStyle/>
+          <a:p>
+            <a:pPr algn="r"/>
+            <a:r>
+              <a:rPr sz="1200">
+                <a:solidFill>
+                  <a:srgbClr val="64748B"/>
+                </a:solidFill>
+                <a:latin typeface="DejaVu Sans"/>
+              </a:rPr>
+              <a:t>RETURN FOR RE-RUN</a:t>
+            </a:r>
+          </a:p>
+        </p:txBody>
+      </p:sp>
+      <p:sp>
+        <p:nvSpPr>
+          <p:cNvPr id="34" name="TextBox 33"/>
+          <p:cNvSpPr txBox="1"/>
+          <p:nvPr/>
+        </p:nvSpPr>
+        <p:spPr>
+          <a:xfrm>
+            <a:off x="487680" y="6329680"/>
+            <a:ext cx="7029291" cy="158496"/>
+          </a:xfrm>
+          <a:prstGeom prst="rect">
+            <a:avLst/>
+          </a:prstGeom>
+          <a:noFill/>
+        </p:spPr>
+        <p:txBody>
+          <a:bodyPr wrap="none" tIns="0" bIns="0" lIns="0" rIns="0">
+            <a:spAutoFit/>
+          </a:bodyPr>
+          <a:lstStyle/>
+          <a:p>
+            <a:pPr algn="l"/>
+            <a:r>
+              <a:rPr sz="1200">
+                <a:solidFill>
+                  <a:srgbClr val="64748B"/>
+                </a:solidFill>
+                <a:latin typeface="DejaVu Sans"/>
+              </a:rPr>
+              <a:t>Baseline scope: five bounded stages with explicit forward handoffs, and one human gate that can return a run.</a:t>
             </a:r>
           </a:p>
         </p:txBody>
@@ -6628,20 +4878,12 @@
         <p:nvPr/>
       </p:nvGrpSpPr>
       <p:grpSpPr/>
-      <p:pic>
-        <p:nvPicPr>
-          <p:cNvPr id="20" name="Picture 20"/>
-          <p:cNvPicPr preferRelativeResize="0">
-            <a:picLocks noChangeAspect="1"/>
-          </p:cNvPicPr>
-          <p:nvPr/>
-        </p:nvPicPr>
-        <p:blipFill>
-          <a:blip r:embed="rId2"/>
-          <a:stretch>
-            <a:fillRect/>
-          </a:stretch>
-        </p:blipFill>
+      <p:sp>
+        <p:nvSpPr>
+          <p:cNvPr id="2" name="Rectangle 1"/>
+          <p:cNvSpPr/>
+          <p:nvPr/>
+        </p:nvSpPr>
         <p:spPr>
           <a:xfrm>
             <a:off x="0" y="0"/>
@@ -6650,24 +4892,8 @@
           <a:prstGeom prst="rect">
             <a:avLst/>
           </a:prstGeom>
-        </p:spPr>
-      </p:pic>
-      <p:sp>
-        <p:nvSpPr>
-          <p:cNvPr id="2" name="Rectangle 1"/>
-          <p:cNvSpPr/>
-          <p:nvPr/>
-        </p:nvSpPr>
-        <p:spPr>
-          <a:xfrm>
-            <a:off x="447040" y="386080"/>
-            <a:ext cx="4612640" cy="1056640"/>
-          </a:xfrm>
-          <a:prstGeom prst="rect">
-            <a:avLst/>
-          </a:prstGeom>
           <a:solidFill>
-            <a:srgbClr val="0D2B40"/>
+            <a:srgbClr val="FFFFFF"/>
           </a:solidFill>
           <a:ln>
             <a:noFill/>
@@ -6688,12 +4914,116 @@
           </a:fontRef>
         </p:style>
         <p:txBody>
-          <a:bodyPr rtlCol="0" anchor="t" wrap="none" lIns="0" rIns="0" tIns="225552" bIns="0"/>
-          <a:lstStyle/>
-          <a:p>
-            <a:pPr algn="ctr">
+          <a:bodyPr rtlCol="0" anchor="ctr"/>
+          <a:lstStyle/>
+          <a:p>
+            <a:pPr algn="ctr"/>
+          </a:p>
+        </p:txBody>
+      </p:sp>
+      <p:sp>
+        <p:nvSpPr>
+          <p:cNvPr id="3" name="Rectangle 2"/>
+          <p:cNvSpPr/>
+          <p:nvPr/>
+        </p:nvSpPr>
+        <p:spPr>
+          <a:xfrm>
+            <a:off x="487680" y="1625600"/>
+            <a:ext cx="11216640" cy="1"/>
+          </a:xfrm>
+          <a:custGeom>
+            <a:avLst/>
+            <a:gdLst/>
+            <a:ahLst/>
+            <a:cxnLst/>
+            <a:rect l="0" t="0" r="r" b="b"/>
+            <a:pathLst>
+              <a:path w="11216640" h="1">
+                <a:moveTo>
+                  <a:pt x="0" y="0"/>
+                </a:moveTo>
+                <a:lnTo>
+                  <a:pt x="11216640" y="0"/>
+                </a:lnTo>
+              </a:path>
+            </a:pathLst>
+          </a:custGeom>
+          <a:noFill/>
+          <a:ln w="25400">
+            <a:solidFill>
+              <a:srgbClr val="E2E8F0"/>
+            </a:solidFill>
+          </a:ln>
+        </p:spPr>
+        <p:style>
+          <a:lnRef idx="1">
+            <a:schemeClr val="accent1"/>
+          </a:lnRef>
+          <a:fillRef idx="3">
+            <a:schemeClr val="accent1"/>
+          </a:fillRef>
+          <a:effectRef idx="2">
+            <a:schemeClr val="accent1"/>
+          </a:effectRef>
+          <a:fontRef idx="minor">
+            <a:schemeClr val="lt1"/>
+          </a:fontRef>
+        </p:style>
+        <p:txBody>
+          <a:bodyPr rtlCol="0" anchor="ctr"/>
+          <a:lstStyle/>
+          <a:p>
+            <a:pPr algn="ctr"/>
+          </a:p>
+        </p:txBody>
+      </p:sp>
+      <p:sp>
+        <p:nvSpPr>
+          <p:cNvPr id="4" name="Rounded Rectangle 3"/>
+          <p:cNvSpPr/>
+          <p:nvPr/>
+        </p:nvSpPr>
+        <p:spPr>
+          <a:xfrm>
+            <a:off x="487680" y="1950720"/>
+            <a:ext cx="5364480" cy="1056640"/>
+          </a:xfrm>
+          <a:prstGeom prst="roundRect">
+            <a:avLst>
+              <a:gd name="adj" fmla="val 7692"/>
+            </a:avLst>
+          </a:prstGeom>
+          <a:solidFill>
+            <a:srgbClr val="F8FAFC"/>
+          </a:solidFill>
+          <a:ln w="19050">
+            <a:solidFill>
+              <a:srgbClr val="E2E8F0"/>
+            </a:solidFill>
+          </a:ln>
+        </p:spPr>
+        <p:style>
+          <a:lnRef idx="1">
+            <a:schemeClr val="accent1"/>
+          </a:lnRef>
+          <a:fillRef idx="3">
+            <a:schemeClr val="accent1"/>
+          </a:fillRef>
+          <a:effectRef idx="2">
+            <a:schemeClr val="accent1"/>
+          </a:effectRef>
+          <a:fontRef idx="minor">
+            <a:schemeClr val="lt1"/>
+          </a:fontRef>
+        </p:style>
+        <p:txBody>
+          <a:bodyPr rtlCol="0" anchor="t" wrap="none" lIns="0" rIns="0" tIns="309880" bIns="0"/>
+          <a:lstStyle/>
+          <a:p>
+            <a:pPr algn="l" marL="243840">
               <a:lnSpc>
-                <a:spcPts val="1152"/>
+                <a:spcPts val="1728"/>
               </a:lnSpc>
               <a:spcBef>
                 <a:spcPts val="0"/>
@@ -6703,41 +5033,85 @@
               </a:spcAft>
             </a:pPr>
             <a:r>
-              <a:rPr sz="1200" b="1">
-                <a:solidFill>
-                  <a:srgbClr val="B8DDE2"/>
-                </a:solidFill>
-                <a:latin typeface="Arial"/>
+              <a:rPr sz="1800" b="1">
+                <a:solidFill>
+                  <a:srgbClr val="1E3A5F"/>
+                </a:solidFill>
+                <a:latin typeface="DejaVu Sans"/>
               </a:rPr>
-              <a:t>RESEARCH COLLABORATION</a:t>
-            </a:r>
-          </a:p>
-          <a:p>
-            <a:pPr algn="ctr">
+              <a:t>RESEARCHER</a:t>
+            </a:r>
+          </a:p>
+          <a:p>
+            <a:pPr algn="l" marL="243840">
               <a:lnSpc>
-                <a:spcPts val="2496"/>
+                <a:spcPts val="1536"/>
               </a:lnSpc>
               <a:spcBef>
-                <a:spcPts val="1648"/>
+                <a:spcPts val="832"/>
               </a:spcBef>
               <a:spcAft>
                 <a:spcPts val="0"/>
               </a:spcAft>
             </a:pPr>
             <a:r>
-              <a:rPr sz="2600" b="1">
-                <a:solidFill>
-                  <a:srgbClr val="FFFFFF"/>
-                </a:solidFill>
-                <a:latin typeface="Arial"/>
+              <a:rPr sz="1600">
+                <a:solidFill>
+                  <a:srgbClr val="374151"/>
+                </a:solidFill>
+                <a:latin typeface="DejaVu Sans"/>
               </a:rPr>
-              <a:t>Researcher + AI loop</a:t>
-            </a:r>
-          </a:p>
-          <a:p>
-            <a:pPr algn="ctr">
+              <a:t>Frames the question and judges the evidence.</a:t>
+            </a:r>
+          </a:p>
+        </p:txBody>
+      </p:sp>
+      <p:sp>
+        <p:nvSpPr>
+          <p:cNvPr id="5" name="Rounded Rectangle 4"/>
+          <p:cNvSpPr/>
+          <p:nvPr/>
+        </p:nvSpPr>
+        <p:spPr>
+          <a:xfrm>
+            <a:off x="6339840" y="1950720"/>
+            <a:ext cx="5364480" cy="1056640"/>
+          </a:xfrm>
+          <a:prstGeom prst="roundRect">
+            <a:avLst>
+              <a:gd name="adj" fmla="val 7692"/>
+            </a:avLst>
+          </a:prstGeom>
+          <a:solidFill>
+            <a:srgbClr val="F8FAFC"/>
+          </a:solidFill>
+          <a:ln w="19050">
+            <a:solidFill>
+              <a:srgbClr val="E2E8F0"/>
+            </a:solidFill>
+          </a:ln>
+        </p:spPr>
+        <p:style>
+          <a:lnRef idx="1">
+            <a:schemeClr val="accent1"/>
+          </a:lnRef>
+          <a:fillRef idx="3">
+            <a:schemeClr val="accent1"/>
+          </a:fillRef>
+          <a:effectRef idx="2">
+            <a:schemeClr val="accent1"/>
+          </a:effectRef>
+          <a:fontRef idx="minor">
+            <a:schemeClr val="lt1"/>
+          </a:fontRef>
+        </p:style>
+        <p:txBody>
+          <a:bodyPr rtlCol="0" anchor="t" wrap="none" lIns="0" rIns="0" tIns="309880" bIns="0"/>
+          <a:lstStyle/>
+          <a:p>
+            <a:pPr algn="l" marL="243840">
               <a:lnSpc>
-                <a:spcPts val="1248"/>
+                <a:spcPts val="1728"/>
               </a:lnSpc>
               <a:spcBef>
                 <a:spcPts val="0"/>
@@ -6747,36 +5121,62 @@
               </a:spcAft>
             </a:pPr>
             <a:r>
-              <a:rPr sz="1300">
-                <a:solidFill>
-                  <a:srgbClr val="D5E4EA"/>
-                </a:solidFill>
-                <a:latin typeface="Arial"/>
+              <a:rPr sz="1800" b="1">
+                <a:solidFill>
+                  <a:srgbClr val="1E3A5F"/>
+                </a:solidFill>
+                <a:latin typeface="DejaVu Sans"/>
               </a:rPr>
-              <a:t>Editable annotations sit above the illustrative base.</a:t>
-            </a:r>
-          </a:p>
-        </p:txBody>
-      </p:sp>
-      <p:sp>
-        <p:nvSpPr>
-          <p:cNvPr id="3" name="Rectangle 2"/>
+              <a:t>AI LAB</a:t>
+            </a:r>
+          </a:p>
+          <a:p>
+            <a:pPr algn="l" marL="243840">
+              <a:lnSpc>
+                <a:spcPts val="1536"/>
+              </a:lnSpc>
+              <a:spcBef>
+                <a:spcPts val="832"/>
+              </a:spcBef>
+              <a:spcAft>
+                <a:spcPts val="0"/>
+              </a:spcAft>
+            </a:pPr>
+            <a:r>
+              <a:rPr sz="1600">
+                <a:solidFill>
+                  <a:srgbClr val="374151"/>
+                </a:solidFill>
+                <a:latin typeface="DejaVu Sans"/>
+              </a:rPr>
+              <a:t>Surfaces patterns and proposes experiments.</a:t>
+            </a:r>
+          </a:p>
+        </p:txBody>
+      </p:sp>
+      <p:sp>
+        <p:nvSpPr>
+          <p:cNvPr id="6" name="Rounded Rectangle 5"/>
           <p:cNvSpPr/>
           <p:nvPr/>
         </p:nvSpPr>
         <p:spPr>
           <a:xfrm>
-            <a:off x="447040" y="386080"/>
-            <a:ext cx="71120" cy="1056640"/>
-          </a:xfrm>
-          <a:prstGeom prst="rect">
-            <a:avLst/>
+            <a:off x="487680" y="3495040"/>
+            <a:ext cx="3088640" cy="1137920"/>
+          </a:xfrm>
+          <a:prstGeom prst="roundRect">
+            <a:avLst>
+              <a:gd name="adj" fmla="val 7142"/>
+            </a:avLst>
           </a:prstGeom>
           <a:solidFill>
-            <a:srgbClr val="DDA45E"/>
+            <a:srgbClr val="F8FAFC"/>
           </a:solidFill>
-          <a:ln>
-            <a:noFill/>
+          <a:ln w="19050">
+            <a:solidFill>
+              <a:srgbClr val="E2E8F0"/>
+            </a:solidFill>
           </a:ln>
         </p:spPr>
         <p:style>
@@ -6794,57 +5194,12 @@
           </a:fontRef>
         </p:style>
         <p:txBody>
-          <a:bodyPr rtlCol="0" anchor="ctr"/>
-          <a:lstStyle/>
-          <a:p>
-            <a:pPr algn="ctr"/>
-          </a:p>
-        </p:txBody>
-      </p:sp>
-      <p:sp>
-        <p:nvSpPr>
-          <p:cNvPr id="4" name="Rectangle 3"/>
-          <p:cNvSpPr/>
-          <p:nvPr/>
-        </p:nvSpPr>
-        <p:spPr>
-          <a:xfrm>
-            <a:off x="447040" y="4927600"/>
-            <a:ext cx="11297920" cy="1442720"/>
-          </a:xfrm>
-          <a:prstGeom prst="rect">
-            <a:avLst/>
-          </a:prstGeom>
-          <a:solidFill>
-            <a:srgbClr val="FFFFFF"/>
-          </a:solidFill>
-          <a:ln w="25400">
-            <a:solidFill>
-              <a:srgbClr val="D9E5EC"/>
-            </a:solidFill>
-          </a:ln>
-        </p:spPr>
-        <p:style>
-          <a:lnRef idx="1">
-            <a:schemeClr val="accent1"/>
-          </a:lnRef>
-          <a:fillRef idx="3">
-            <a:schemeClr val="accent1"/>
-          </a:fillRef>
-          <a:effectRef idx="2">
-            <a:schemeClr val="accent1"/>
-          </a:effectRef>
-          <a:fontRef idx="minor">
-            <a:schemeClr val="lt1"/>
-          </a:fontRef>
-        </p:style>
-        <p:txBody>
-          <a:bodyPr rtlCol="0" anchor="t" wrap="none" lIns="0" rIns="0" tIns="218440" bIns="0"/>
-          <a:lstStyle/>
-          <a:p>
-            <a:pPr algn="ctr">
+          <a:bodyPr rtlCol="0" anchor="t" wrap="none" lIns="0" rIns="0" tIns="309880" bIns="0"/>
+          <a:lstStyle/>
+          <a:p>
+            <a:pPr algn="l" marL="243840">
               <a:lnSpc>
-                <a:spcPts val="960"/>
+                <a:spcPts val="1728"/>
               </a:lnSpc>
               <a:spcBef>
                 <a:spcPts val="0"/>
@@ -6854,59 +5209,61 @@
               </a:spcAft>
             </a:pPr>
             <a:r>
-              <a:rPr sz="1000" b="1">
-                <a:solidFill>
-                  <a:srgbClr val="6E899D"/>
-                </a:solidFill>
-                <a:latin typeface="Arial"/>
+              <a:rPr sz="1800" b="1">
+                <a:solidFill>
+                  <a:srgbClr val="1E3A5F"/>
+                </a:solidFill>
+                <a:latin typeface="DejaVu Sans"/>
               </a:rPr>
-              <a:t>EDITABLE COLLABORATION LOOP</a:t>
-            </a:r>
-          </a:p>
-          <a:p>
-            <a:pPr algn="ctr">
+              <a:t>QUESTION</a:t>
+            </a:r>
+          </a:p>
+          <a:p>
+            <a:pPr algn="l" marL="243840">
               <a:lnSpc>
-                <a:spcPts val="960"/>
+                <a:spcPts val="1536"/>
               </a:lnSpc>
               <a:spcBef>
-                <a:spcPts val="7040"/>
+                <a:spcPts val="832"/>
               </a:spcBef>
               <a:spcAft>
                 <a:spcPts val="0"/>
               </a:spcAft>
             </a:pPr>
             <a:r>
-              <a:rPr sz="1000">
-                <a:solidFill>
-                  <a:srgbClr val="7892A4"/>
-                </a:solidFill>
-                <a:latin typeface="Arial"/>
+              <a:rPr sz="1600">
+                <a:solidFill>
+                  <a:srgbClr val="374151"/>
+                </a:solidFill>
+                <a:latin typeface="DejaVu Sans"/>
               </a:rPr>
-              <a:t>Illustrative AI-generated base only • factual callouts remain editable overlays</a:t>
-            </a:r>
-          </a:p>
-        </p:txBody>
-      </p:sp>
-      <p:sp>
-        <p:nvSpPr>
-          <p:cNvPr id="5" name="Rectangle 4"/>
+              <a:t>Frame what is being asked.</a:t>
+            </a:r>
+          </a:p>
+        </p:txBody>
+      </p:sp>
+      <p:sp>
+        <p:nvSpPr>
+          <p:cNvPr id="7" name="Rounded Rectangle 6"/>
           <p:cNvSpPr/>
           <p:nvPr/>
         </p:nvSpPr>
         <p:spPr>
           <a:xfrm>
-            <a:off x="731520" y="5262880"/>
-            <a:ext cx="2214880" cy="589280"/>
-          </a:xfrm>
-          <a:prstGeom prst="rect">
-            <a:avLst/>
+            <a:off x="8615680" y="3495040"/>
+            <a:ext cx="3088640" cy="1137920"/>
+          </a:xfrm>
+          <a:prstGeom prst="roundRect">
+            <a:avLst>
+              <a:gd name="adj" fmla="val 7142"/>
+            </a:avLst>
           </a:prstGeom>
           <a:solidFill>
-            <a:srgbClr val="F7FBFC"/>
+            <a:srgbClr val="F8FAFC"/>
           </a:solidFill>
-          <a:ln w="25400">
+          <a:ln w="19050">
             <a:solidFill>
-              <a:srgbClr val="4F86A3"/>
+              <a:srgbClr val="E2E8F0"/>
             </a:solidFill>
           </a:ln>
         </p:spPr>
@@ -6925,12 +5282,12 @@
           </a:fontRef>
         </p:style>
         <p:txBody>
-          <a:bodyPr rtlCol="0" anchor="t" wrap="none" lIns="0" rIns="0" tIns="203200" bIns="0"/>
-          <a:lstStyle/>
-          <a:p>
-            <a:pPr algn="ctr">
+          <a:bodyPr rtlCol="0" anchor="t" wrap="none" lIns="0" rIns="0" tIns="309880" bIns="0"/>
+          <a:lstStyle/>
+          <a:p>
+            <a:pPr algn="l" marL="243840">
               <a:lnSpc>
-                <a:spcPts val="1152"/>
+                <a:spcPts val="1728"/>
               </a:lnSpc>
               <a:spcBef>
                 <a:spcPts val="0"/>
@@ -6940,58 +5297,62 @@
               </a:spcAft>
             </a:pPr>
             <a:r>
-              <a:rPr sz="1200" b="1">
-                <a:solidFill>
-                  <a:srgbClr val="15334A"/>
-                </a:solidFill>
-                <a:latin typeface="Arial"/>
+              <a:rPr sz="1800" b="1">
+                <a:solidFill>
+                  <a:srgbClr val="1E3A5F"/>
+                </a:solidFill>
+                <a:latin typeface="DejaVu Sans"/>
               </a:rPr>
-              <a:t>RESEARCHER</a:t>
-            </a:r>
-          </a:p>
-          <a:p>
-            <a:pPr algn="ctr">
+              <a:t>EXPERIMENT</a:t>
+            </a:r>
+          </a:p>
+          <a:p>
+            <a:pPr algn="l" marL="243840">
               <a:lnSpc>
-                <a:spcPts val="1152"/>
+                <a:spcPts val="1536"/>
               </a:lnSpc>
               <a:spcBef>
-                <a:spcPts val="368"/>
+                <a:spcPts val="832"/>
               </a:spcBef>
               <a:spcAft>
                 <a:spcPts val="0"/>
               </a:spcAft>
             </a:pPr>
             <a:r>
-              <a:rPr sz="1200">
-                <a:solidFill>
-                  <a:srgbClr val="557085"/>
-                </a:solidFill>
-                <a:latin typeface="Arial"/>
+              <a:rPr sz="1600">
+                <a:solidFill>
+                  <a:srgbClr val="374151"/>
+                </a:solidFill>
+                <a:latin typeface="DejaVu Sans"/>
               </a:rPr>
-              <a:t>Frames the question</a:t>
-            </a:r>
-          </a:p>
-        </p:txBody>
-      </p:sp>
-      <p:sp>
-        <p:nvSpPr>
-          <p:cNvPr id="6" name="Oval 5"/>
+              <a:t>Probe it against the data.</a:t>
+            </a:r>
+          </a:p>
+        </p:txBody>
+      </p:sp>
+      <p:sp>
+        <p:nvSpPr>
+          <p:cNvPr id="8" name="Rounded Rectangle 7"/>
           <p:cNvSpPr/>
           <p:nvPr/>
         </p:nvSpPr>
         <p:spPr>
           <a:xfrm>
-            <a:off x="863600" y="5466080"/>
-            <a:ext cx="182880" cy="182880"/>
-          </a:xfrm>
-          <a:prstGeom prst="ellipse">
-            <a:avLst/>
+            <a:off x="4551680" y="4958080"/>
+            <a:ext cx="3088640" cy="1137920"/>
+          </a:xfrm>
+          <a:prstGeom prst="roundRect">
+            <a:avLst>
+              <a:gd name="adj" fmla="val 7142"/>
+            </a:avLst>
           </a:prstGeom>
           <a:solidFill>
-            <a:srgbClr val="DDA45E"/>
+            <a:srgbClr val="F8FAFC"/>
           </a:solidFill>
-          <a:ln>
-            <a:noFill/>
+          <a:ln w="19050">
+            <a:solidFill>
+              <a:srgbClr val="E2E8F0"/>
+            </a:solidFill>
           </a:ln>
         </p:spPr>
         <p:style>
@@ -7009,129 +5370,12 @@
           </a:fontRef>
         </p:style>
         <p:txBody>
-          <a:bodyPr rtlCol="0" anchor="ctr"/>
-          <a:lstStyle/>
-          <a:p>
-            <a:pPr algn="ctr"/>
-          </a:p>
-        </p:txBody>
-      </p:sp>
-      <p:sp>
-        <p:nvSpPr>
-          <p:cNvPr id="7" name="Rectangle 6"/>
-          <p:cNvSpPr/>
-          <p:nvPr/>
-        </p:nvSpPr>
-        <p:spPr>
-          <a:xfrm>
-            <a:off x="894080" y="5516880"/>
-            <a:ext cx="121920" cy="121920"/>
-          </a:xfrm>
-          <a:custGeom>
-            <a:avLst/>
-            <a:gdLst/>
-            <a:ahLst/>
-            <a:cxnLst/>
-            <a:rect l="0" t="0" r="r" b="b"/>
-            <a:pathLst>
-              <a:path w="121920" h="121920">
-                <a:moveTo>
-                  <a:pt x="20320" y="40640"/>
-                </a:moveTo>
-                <a:cubicBezTo>
-                  <a:pt x="20320" y="18195"/>
-                  <a:pt x="38515" y="0"/>
-                  <a:pt x="60960" y="0"/>
-                </a:cubicBezTo>
-                <a:cubicBezTo>
-                  <a:pt x="83405" y="0"/>
-                  <a:pt x="101600" y="18195"/>
-                  <a:pt x="101600" y="40640"/>
-                </a:cubicBezTo>
-                <a:moveTo>
-                  <a:pt x="0" y="121920"/>
-                </a:moveTo>
-                <a:cubicBezTo>
-                  <a:pt x="20320" y="81280"/>
-                  <a:pt x="101600" y="81280"/>
-                  <a:pt x="121920" y="121920"/>
-                </a:cubicBezTo>
-              </a:path>
-            </a:pathLst>
-          </a:custGeom>
-          <a:noFill/>
-          <a:ln w="19050">
-            <a:solidFill>
-              <a:srgbClr val="FFFFFF"/>
-            </a:solidFill>
-          </a:ln>
-        </p:spPr>
-        <p:style>
-          <a:lnRef idx="1">
-            <a:schemeClr val="accent1"/>
-          </a:lnRef>
-          <a:fillRef idx="3">
-            <a:schemeClr val="accent1"/>
-          </a:fillRef>
-          <a:effectRef idx="2">
-            <a:schemeClr val="accent1"/>
-          </a:effectRef>
-          <a:fontRef idx="minor">
-            <a:schemeClr val="lt1"/>
-          </a:fontRef>
-        </p:style>
-        <p:txBody>
-          <a:bodyPr rtlCol="0" anchor="ctr"/>
-          <a:lstStyle/>
-          <a:p>
-            <a:pPr algn="ctr"/>
-          </a:p>
-        </p:txBody>
-      </p:sp>
-      <p:sp>
-        <p:nvSpPr>
-          <p:cNvPr id="8" name="Rectangle 7"/>
-          <p:cNvSpPr/>
-          <p:nvPr/>
-        </p:nvSpPr>
-        <p:spPr>
-          <a:xfrm>
-            <a:off x="9083040" y="5262880"/>
-            <a:ext cx="2214880" cy="589280"/>
-          </a:xfrm>
-          <a:prstGeom prst="rect">
-            <a:avLst/>
-          </a:prstGeom>
-          <a:solidFill>
-            <a:srgbClr val="F7FBFC"/>
-          </a:solidFill>
-          <a:ln w="25400">
-            <a:solidFill>
-              <a:srgbClr val="4F9A9A"/>
-            </a:solidFill>
-          </a:ln>
-        </p:spPr>
-        <p:style>
-          <a:lnRef idx="1">
-            <a:schemeClr val="accent1"/>
-          </a:lnRef>
-          <a:fillRef idx="3">
-            <a:schemeClr val="accent1"/>
-          </a:fillRef>
-          <a:effectRef idx="2">
-            <a:schemeClr val="accent1"/>
-          </a:effectRef>
-          <a:fontRef idx="minor">
-            <a:schemeClr val="lt1"/>
-          </a:fontRef>
-        </p:style>
-        <p:txBody>
-          <a:bodyPr rtlCol="0" anchor="t" wrap="none" lIns="0" rIns="0" tIns="203200" bIns="0"/>
-          <a:lstStyle/>
-          <a:p>
-            <a:pPr algn="ctr">
+          <a:bodyPr rtlCol="0" anchor="t" wrap="none" lIns="0" rIns="0" tIns="309880" bIns="0"/>
+          <a:lstStyle/>
+          <a:p>
+            <a:pPr algn="l" marL="243840">
               <a:lnSpc>
-                <a:spcPts val="1152"/>
+                <a:spcPts val="1728"/>
               </a:lnSpc>
               <a:spcBef>
                 <a:spcPts val="0"/>
@@ -7141,92 +5385,164 @@
               </a:spcAft>
             </a:pPr>
             <a:r>
-              <a:rPr sz="1200" b="1">
-                <a:solidFill>
-                  <a:srgbClr val="15334A"/>
-                </a:solidFill>
-                <a:latin typeface="Arial"/>
+              <a:rPr sz="1800" b="1">
+                <a:solidFill>
+                  <a:srgbClr val="1E3A5F"/>
+                </a:solidFill>
+                <a:latin typeface="DejaVu Sans"/>
               </a:rPr>
-              <a:t>AI LAB</a:t>
-            </a:r>
-          </a:p>
-          <a:p>
-            <a:pPr algn="ctr">
+              <a:t>JUDGMENT</a:t>
+            </a:r>
+          </a:p>
+          <a:p>
+            <a:pPr algn="l" marL="243840">
               <a:lnSpc>
-                <a:spcPts val="1152"/>
+                <a:spcPts val="1536"/>
               </a:lnSpc>
               <a:spcBef>
-                <a:spcPts val="368"/>
+                <a:spcPts val="832"/>
               </a:spcBef>
               <a:spcAft>
                 <a:spcPts val="0"/>
               </a:spcAft>
             </a:pPr>
             <a:r>
-              <a:rPr sz="1200">
-                <a:solidFill>
-                  <a:srgbClr val="557085"/>
-                </a:solidFill>
-                <a:latin typeface="Arial"/>
+              <a:rPr sz="1600">
+                <a:solidFill>
+                  <a:srgbClr val="374151"/>
+                </a:solidFill>
+                <a:latin typeface="DejaVu Sans"/>
               </a:rPr>
-              <a:t>Surfaces patterns</a:t>
-            </a:r>
-          </a:p>
-        </p:txBody>
-      </p:sp>
-      <p:sp>
-        <p:nvSpPr>
-          <p:cNvPr id="9" name="Oval 8"/>
-          <p:cNvSpPr/>
-          <p:nvPr/>
-        </p:nvSpPr>
-        <p:spPr>
-          <a:xfrm>
-            <a:off x="9215120" y="5466080"/>
-            <a:ext cx="182880" cy="182880"/>
-          </a:xfrm>
-          <a:prstGeom prst="ellipse">
-            <a:avLst/>
-          </a:prstGeom>
-          <a:solidFill>
-            <a:srgbClr val="4F9A9A"/>
-          </a:solidFill>
-          <a:ln>
-            <a:noFill/>
+              <a:t>Review what the probe showed.</a:t>
+            </a:r>
+          </a:p>
+        </p:txBody>
+      </p:sp>
+      <p:cxnSp>
+        <p:nvCxnSpPr>
+          <p:cNvPr id="9" name="Connector 8"/>
+          <p:cNvCxnSpPr>
+            <a:stCxn id="6" idx="3"/>
+            <a:endCxn id="7" idx="7"/>
+          </p:cNvCxnSpPr>
+          <p:nvPr/>
+        </p:nvCxnSpPr>
+        <p:spPr>
+          <a:xfrm>
+            <a:off x="3576320" y="4064000"/>
+            <a:ext cx="5039360" cy="0"/>
+          </a:xfrm>
+          <a:prstGeom prst="line">
+            <a:avLst/>
+          </a:prstGeom>
+          <a:ln w="25400">
+            <a:solidFill>
+              <a:srgbClr val="475569"/>
+            </a:solidFill>
+            <a:tailEnd type="triangle" w="med" len="med"/>
           </a:ln>
         </p:spPr>
         <p:style>
-          <a:lnRef idx="1">
+          <a:lnRef idx="2">
             <a:schemeClr val="accent1"/>
           </a:lnRef>
-          <a:fillRef idx="3">
+          <a:fillRef idx="0">
             <a:schemeClr val="accent1"/>
           </a:fillRef>
-          <a:effectRef idx="2">
+          <a:effectRef idx="1">
             <a:schemeClr val="accent1"/>
           </a:effectRef>
           <a:fontRef idx="minor">
-            <a:schemeClr val="lt1"/>
+            <a:schemeClr val="tx1"/>
           </a:fontRef>
         </p:style>
-        <p:txBody>
-          <a:bodyPr rtlCol="0" anchor="ctr"/>
-          <a:lstStyle/>
-          <a:p>
-            <a:pPr algn="ctr"/>
-          </a:p>
-        </p:txBody>
-      </p:sp>
-      <p:sp>
-        <p:nvSpPr>
-          <p:cNvPr id="10" name="Rectangle 9"/>
+      </p:cxnSp>
+      <p:cxnSp>
+        <p:nvCxnSpPr>
+          <p:cNvPr id="10" name="Connector 9"/>
+          <p:cNvCxnSpPr>
+            <a:stCxn id="7" idx="5"/>
+          </p:cNvCxnSpPr>
+          <p:nvPr/>
+        </p:nvCxnSpPr>
+        <p:spPr>
+          <a:xfrm flipH="1">
+            <a:off x="7640320" y="4632960"/>
+            <a:ext cx="2519680" cy="568960"/>
+          </a:xfrm>
+          <a:prstGeom prst="line">
+            <a:avLst/>
+          </a:prstGeom>
+          <a:ln w="25400">
+            <a:solidFill>
+              <a:srgbClr val="475569"/>
+            </a:solidFill>
+            <a:tailEnd type="triangle" w="med" len="med"/>
+          </a:ln>
+        </p:spPr>
+        <p:style>
+          <a:lnRef idx="2">
+            <a:schemeClr val="accent1"/>
+          </a:lnRef>
+          <a:fillRef idx="0">
+            <a:schemeClr val="accent1"/>
+          </a:fillRef>
+          <a:effectRef idx="1">
+            <a:schemeClr val="accent1"/>
+          </a:effectRef>
+          <a:fontRef idx="minor">
+            <a:schemeClr val="tx1"/>
+          </a:fontRef>
+        </p:style>
+      </p:cxnSp>
+      <p:cxnSp>
+        <p:nvCxnSpPr>
+          <p:cNvPr id="11" name="Connector 10"/>
+          <p:cNvCxnSpPr>
+            <a:endCxn id="6" idx="5"/>
+          </p:cNvCxnSpPr>
+          <p:nvPr/>
+        </p:nvCxnSpPr>
+        <p:spPr>
+          <a:xfrm flipH="1" flipV="1">
+            <a:off x="2032000" y="4632960"/>
+            <a:ext cx="2519680" cy="568960"/>
+          </a:xfrm>
+          <a:prstGeom prst="line">
+            <a:avLst/>
+          </a:prstGeom>
+          <a:ln w="25400">
+            <a:solidFill>
+              <a:srgbClr val="475569"/>
+            </a:solidFill>
+            <a:tailEnd type="triangle" w="med" len="med"/>
+          </a:ln>
+        </p:spPr>
+        <p:style>
+          <a:lnRef idx="2">
+            <a:schemeClr val="accent1"/>
+          </a:lnRef>
+          <a:fillRef idx="0">
+            <a:schemeClr val="accent1"/>
+          </a:fillRef>
+          <a:effectRef idx="1">
+            <a:schemeClr val="accent1"/>
+          </a:effectRef>
+          <a:fontRef idx="minor">
+            <a:schemeClr val="tx1"/>
+          </a:fontRef>
+        </p:style>
+      </p:cxnSp>
+      <p:sp>
+        <p:nvSpPr>
+          <p:cNvPr id="12" name="Rectangle 11"/>
           <p:cNvSpPr/>
           <p:nvPr/>
         </p:nvSpPr>
         <p:spPr>
           <a:xfrm>
-            <a:off x="9255760" y="5506720"/>
-            <a:ext cx="101600" cy="101600"/>
+            <a:off x="487680" y="6258560"/>
+            <a:ext cx="11216640" cy="1"/>
           </a:xfrm>
           <a:custGeom>
             <a:avLst/>
@@ -7235,30 +5551,12 @@
             <a:cxnLst/>
             <a:rect l="0" t="0" r="r" b="b"/>
             <a:pathLst>
-              <a:path w="101600" h="101600">
+              <a:path w="11216640" h="1">
                 <a:moveTo>
-                  <a:pt x="0" y="50800"/>
+                  <a:pt x="0" y="0"/>
                 </a:moveTo>
                 <a:lnTo>
-                  <a:pt x="101600" y="50800"/>
-                </a:lnTo>
-                <a:moveTo>
-                  <a:pt x="50800" y="0"/>
-                </a:moveTo>
-                <a:lnTo>
-                  <a:pt x="50800" y="101600"/>
-                </a:lnTo>
-                <a:moveTo>
-                  <a:pt x="10160" y="10160"/>
-                </a:moveTo>
-                <a:lnTo>
-                  <a:pt x="91440" y="91440"/>
-                </a:lnTo>
-                <a:moveTo>
-                  <a:pt x="91440" y="10160"/>
-                </a:moveTo>
-                <a:lnTo>
-                  <a:pt x="10160" y="91440"/>
+                  <a:pt x="11216640" y="0"/>
                 </a:lnTo>
               </a:path>
             </a:pathLst>
@@ -7266,7 +5564,7 @@
           <a:noFill/>
           <a:ln w="19050">
             <a:solidFill>
-              <a:srgbClr val="FFFFFF"/>
+              <a:srgbClr val="E2E8F0"/>
             </a:solidFill>
           </a:ln>
         </p:spPr>
@@ -7294,612 +5592,176 @@
       </p:sp>
       <p:sp>
         <p:nvSpPr>
-          <p:cNvPr id="11" name="Rectangle 10"/>
-          <p:cNvSpPr/>
-          <p:nvPr/>
-        </p:nvSpPr>
-        <p:spPr>
-          <a:xfrm>
-            <a:off x="3149600" y="5262880"/>
-            <a:ext cx="1341120" cy="589280"/>
+          <p:cNvPr id="13" name="TextBox 12"/>
+          <p:cNvSpPr txBox="1"/>
+          <p:nvPr/>
+        </p:nvSpPr>
+        <p:spPr>
+          <a:xfrm>
+            <a:off x="487680" y="558800"/>
+            <a:ext cx="1970088" cy="158496"/>
           </a:xfrm>
           <a:prstGeom prst="rect">
             <a:avLst/>
           </a:prstGeom>
-          <a:solidFill>
-            <a:srgbClr val="EEF5F8"/>
-          </a:solidFill>
-          <a:ln w="19050">
-            <a:solidFill>
-              <a:srgbClr val="B9CCD9"/>
-            </a:solidFill>
-          </a:ln>
-        </p:spPr>
-        <p:style>
-          <a:lnRef idx="1">
-            <a:schemeClr val="accent1"/>
-          </a:lnRef>
-          <a:fillRef idx="3">
-            <a:schemeClr val="accent1"/>
-          </a:fillRef>
-          <a:effectRef idx="2">
-            <a:schemeClr val="accent1"/>
-          </a:effectRef>
-          <a:fontRef idx="minor">
-            <a:schemeClr val="lt1"/>
-          </a:fontRef>
-        </p:style>
-        <p:txBody>
-          <a:bodyPr rtlCol="0" anchor="t" wrap="none" lIns="0" rIns="0" tIns="210820" bIns="0"/>
-          <a:lstStyle/>
-          <a:p>
-            <a:pPr algn="ctr">
-              <a:lnSpc>
-                <a:spcPts val="1056"/>
-              </a:lnSpc>
-              <a:spcBef>
-                <a:spcPts val="0"/>
-              </a:spcBef>
-              <a:spcAft>
-                <a:spcPts val="0"/>
-              </a:spcAft>
-            </a:pPr>
-            <a:r>
-              <a:rPr sz="1100" b="1">
-                <a:solidFill>
-                  <a:srgbClr val="15334A"/>
-                </a:solidFill>
-                <a:latin typeface="Arial"/>
+          <a:noFill/>
+        </p:spPr>
+        <p:txBody>
+          <a:bodyPr wrap="none" tIns="0" bIns="0" lIns="0" rIns="0">
+            <a:spAutoFit/>
+          </a:bodyPr>
+          <a:lstStyle/>
+          <a:p>
+            <a:pPr algn="l"/>
+            <a:r>
+              <a:rPr sz="1200">
+                <a:solidFill>
+                  <a:srgbClr val="64748B"/>
+                </a:solidFill>
+                <a:latin typeface="DejaVu Sans"/>
               </a:rPr>
-              <a:t>QUESTION</a:t>
-            </a:r>
-          </a:p>
-          <a:p>
-            <a:pPr algn="ctr">
-              <a:lnSpc>
-                <a:spcPts val="1056"/>
-              </a:lnSpc>
-              <a:spcBef>
-                <a:spcPts val="464"/>
-              </a:spcBef>
-              <a:spcAft>
-                <a:spcPts val="0"/>
-              </a:spcAft>
-            </a:pPr>
-            <a:r>
-              <a:rPr sz="1100">
-                <a:solidFill>
-                  <a:srgbClr val="557085"/>
-                </a:solidFill>
-                <a:latin typeface="Arial"/>
+              <a:t>RESEARCH COLLABORATION</a:t>
+            </a:r>
+          </a:p>
+        </p:txBody>
+      </p:sp>
+      <p:sp>
+        <p:nvSpPr>
+          <p:cNvPr id="14" name="TextBox 13"/>
+          <p:cNvSpPr txBox="1"/>
+          <p:nvPr/>
+        </p:nvSpPr>
+        <p:spPr>
+          <a:xfrm>
+            <a:off x="487680" y="812800"/>
+            <a:ext cx="4088924" cy="422656"/>
+          </a:xfrm>
+          <a:prstGeom prst="rect">
+            <a:avLst/>
+          </a:prstGeom>
+          <a:noFill/>
+        </p:spPr>
+        <p:txBody>
+          <a:bodyPr wrap="none" tIns="0" bIns="0" lIns="0" rIns="0">
+            <a:spAutoFit/>
+          </a:bodyPr>
+          <a:lstStyle/>
+          <a:p>
+            <a:pPr algn="l"/>
+            <a:r>
+              <a:rPr sz="3200" b="1">
+                <a:solidFill>
+                  <a:srgbClr val="1E3A5F"/>
+                </a:solidFill>
+                <a:latin typeface="DejaVu Sans"/>
               </a:rPr>
-              <a:t>frame</a:t>
-            </a:r>
-          </a:p>
-        </p:txBody>
-      </p:sp>
-      <p:sp>
-        <p:nvSpPr>
-          <p:cNvPr id="12" name="Rectangle 11"/>
-          <p:cNvSpPr/>
-          <p:nvPr/>
-        </p:nvSpPr>
-        <p:spPr>
-          <a:xfrm>
-            <a:off x="4734560" y="5262880"/>
-            <a:ext cx="1341120" cy="589280"/>
+              <a:t>Researcher + AI loop</a:t>
+            </a:r>
+          </a:p>
+        </p:txBody>
+      </p:sp>
+      <p:sp>
+        <p:nvSpPr>
+          <p:cNvPr id="15" name="TextBox 14"/>
+          <p:cNvSpPr txBox="1"/>
+          <p:nvPr/>
+        </p:nvSpPr>
+        <p:spPr>
+          <a:xfrm>
+            <a:off x="487680" y="1259840"/>
+            <a:ext cx="4539615" cy="211328"/>
           </a:xfrm>
           <a:prstGeom prst="rect">
             <a:avLst/>
           </a:prstGeom>
-          <a:solidFill>
-            <a:srgbClr val="EEF7F7"/>
-          </a:solidFill>
-          <a:ln w="19050">
-            <a:solidFill>
-              <a:srgbClr val="B9CCD9"/>
-            </a:solidFill>
-          </a:ln>
-        </p:spPr>
-        <p:style>
-          <a:lnRef idx="1">
-            <a:schemeClr val="accent1"/>
-          </a:lnRef>
-          <a:fillRef idx="3">
-            <a:schemeClr val="accent1"/>
-          </a:fillRef>
-          <a:effectRef idx="2">
-            <a:schemeClr val="accent1"/>
-          </a:effectRef>
-          <a:fontRef idx="minor">
-            <a:schemeClr val="lt1"/>
-          </a:fontRef>
-        </p:style>
-        <p:txBody>
-          <a:bodyPr rtlCol="0" anchor="t" wrap="none" lIns="0" rIns="0" tIns="210820" bIns="0"/>
-          <a:lstStyle/>
-          <a:p>
-            <a:pPr algn="ctr">
-              <a:lnSpc>
-                <a:spcPts val="1056"/>
-              </a:lnSpc>
-              <a:spcBef>
-                <a:spcPts val="0"/>
-              </a:spcBef>
-              <a:spcAft>
-                <a:spcPts val="0"/>
-              </a:spcAft>
-            </a:pPr>
-            <a:r>
-              <a:rPr sz="1100" b="1">
-                <a:solidFill>
-                  <a:srgbClr val="15334A"/>
-                </a:solidFill>
-                <a:latin typeface="Arial"/>
+          <a:noFill/>
+        </p:spPr>
+        <p:txBody>
+          <a:bodyPr wrap="none" tIns="0" bIns="0" lIns="0" rIns="0">
+            <a:spAutoFit/>
+          </a:bodyPr>
+          <a:lstStyle/>
+          <a:p>
+            <a:pPr algn="l"/>
+            <a:r>
+              <a:rPr sz="1600">
+                <a:solidFill>
+                  <a:srgbClr val="374151"/>
+                </a:solidFill>
+                <a:latin typeface="DejaVu Sans"/>
               </a:rPr>
-              <a:t>EXPERIMENT</a:t>
-            </a:r>
-          </a:p>
-          <a:p>
-            <a:pPr algn="ctr">
-              <a:lnSpc>
-                <a:spcPts val="1056"/>
-              </a:lnSpc>
-              <a:spcBef>
-                <a:spcPts val="464"/>
-              </a:spcBef>
-              <a:spcAft>
-                <a:spcPts val="0"/>
-              </a:spcAft>
-            </a:pPr>
-            <a:r>
-              <a:rPr sz="1100">
-                <a:solidFill>
-                  <a:srgbClr val="557085"/>
-                </a:solidFill>
-                <a:latin typeface="Arial"/>
+              <a:t>Every mark on this slide is editable vector geometry.</a:t>
+            </a:r>
+          </a:p>
+        </p:txBody>
+      </p:sp>
+      <p:sp>
+        <p:nvSpPr>
+          <p:cNvPr id="16" name="TextBox 15"/>
+          <p:cNvSpPr txBox="1"/>
+          <p:nvPr/>
+        </p:nvSpPr>
+        <p:spPr>
+          <a:xfrm>
+            <a:off x="487680" y="3241040"/>
+            <a:ext cx="2266632" cy="158496"/>
+          </a:xfrm>
+          <a:prstGeom prst="rect">
+            <a:avLst/>
+          </a:prstGeom>
+          <a:noFill/>
+        </p:spPr>
+        <p:txBody>
+          <a:bodyPr wrap="none" tIns="0" bIns="0" lIns="0" rIns="0">
+            <a:spAutoFit/>
+          </a:bodyPr>
+          <a:lstStyle/>
+          <a:p>
+            <a:pPr algn="l"/>
+            <a:r>
+              <a:rPr sz="1200">
+                <a:solidFill>
+                  <a:srgbClr val="64748B"/>
+                </a:solidFill>
+                <a:latin typeface="DejaVu Sans"/>
               </a:rPr>
-              <a:t>probe</a:t>
-            </a:r>
-          </a:p>
-        </p:txBody>
-      </p:sp>
-      <p:sp>
-        <p:nvSpPr>
-          <p:cNvPr id="13" name="Rectangle 12"/>
-          <p:cNvSpPr/>
-          <p:nvPr/>
-        </p:nvSpPr>
-        <p:spPr>
-          <a:xfrm>
-            <a:off x="6319520" y="5262880"/>
-            <a:ext cx="1341120" cy="589280"/>
+              <a:t>EDITABLE COLLABORATION LOOP</a:t>
+            </a:r>
+          </a:p>
+        </p:txBody>
+      </p:sp>
+      <p:sp>
+        <p:nvSpPr>
+          <p:cNvPr id="17" name="TextBox 16"/>
+          <p:cNvSpPr txBox="1"/>
+          <p:nvPr/>
+        </p:nvSpPr>
+        <p:spPr>
+          <a:xfrm>
+            <a:off x="487680" y="6329680"/>
+            <a:ext cx="5818981" cy="158496"/>
           </a:xfrm>
           <a:prstGeom prst="rect">
             <a:avLst/>
           </a:prstGeom>
-          <a:solidFill>
-            <a:srgbClr val="FBF5EC"/>
-          </a:solidFill>
-          <a:ln w="19050">
-            <a:solidFill>
-              <a:srgbClr val="D7BB91"/>
-            </a:solidFill>
-          </a:ln>
-        </p:spPr>
-        <p:style>
-          <a:lnRef idx="1">
-            <a:schemeClr val="accent1"/>
-          </a:lnRef>
-          <a:fillRef idx="3">
-            <a:schemeClr val="accent1"/>
-          </a:fillRef>
-          <a:effectRef idx="2">
-            <a:schemeClr val="accent1"/>
-          </a:effectRef>
-          <a:fontRef idx="minor">
-            <a:schemeClr val="lt1"/>
-          </a:fontRef>
-        </p:style>
-        <p:txBody>
-          <a:bodyPr rtlCol="0" anchor="t" wrap="none" lIns="0" rIns="0" tIns="210820" bIns="0"/>
-          <a:lstStyle/>
-          <a:p>
-            <a:pPr algn="ctr">
-              <a:lnSpc>
-                <a:spcPts val="1056"/>
-              </a:lnSpc>
-              <a:spcBef>
-                <a:spcPts val="0"/>
-              </a:spcBef>
-              <a:spcAft>
-                <a:spcPts val="0"/>
-              </a:spcAft>
-            </a:pPr>
-            <a:r>
-              <a:rPr sz="1100" b="1">
-                <a:solidFill>
-                  <a:srgbClr val="15334A"/>
-                </a:solidFill>
-                <a:latin typeface="Arial"/>
+          <a:noFill/>
+        </p:spPr>
+        <p:txBody>
+          <a:bodyPr wrap="none" tIns="0" bIns="0" lIns="0" rIns="0">
+            <a:spAutoFit/>
+          </a:bodyPr>
+          <a:lstStyle/>
+          <a:p>
+            <a:pPr algn="l"/>
+            <a:r>
+              <a:rPr sz="1200">
+                <a:solidFill>
+                  <a:srgbClr val="64748B"/>
+                </a:solidFill>
+                <a:latin typeface="DejaVu Sans"/>
               </a:rPr>
-              <a:t>JUDGMENT</a:t>
-            </a:r>
-          </a:p>
-          <a:p>
-            <a:pPr algn="ctr">
-              <a:lnSpc>
-                <a:spcPts val="1056"/>
-              </a:lnSpc>
-              <a:spcBef>
-                <a:spcPts val="464"/>
-              </a:spcBef>
-              <a:spcAft>
-                <a:spcPts val="0"/>
-              </a:spcAft>
-            </a:pPr>
-            <a:r>
-              <a:rPr sz="1100">
-                <a:solidFill>
-                  <a:srgbClr val="8B6840"/>
-                </a:solidFill>
-                <a:latin typeface="Arial"/>
-              </a:rPr>
-              <a:t>review</a:t>
-            </a:r>
-          </a:p>
-        </p:txBody>
-      </p:sp>
-      <p:sp>
-        <p:nvSpPr>
-          <p:cNvPr id="14" name="Rectangle 13"/>
-          <p:cNvSpPr/>
-          <p:nvPr/>
-        </p:nvSpPr>
-        <p:spPr>
-          <a:xfrm>
-            <a:off x="4490720" y="5557520"/>
-            <a:ext cx="162560" cy="1"/>
-          </a:xfrm>
-          <a:custGeom>
-            <a:avLst/>
-            <a:gdLst/>
-            <a:ahLst/>
-            <a:cxnLst/>
-            <a:rect l="0" t="0" r="r" b="b"/>
-            <a:pathLst>
-              <a:path w="162560" h="1">
-                <a:moveTo>
-                  <a:pt x="0" y="0"/>
-                </a:moveTo>
-                <a:lnTo>
-                  <a:pt x="162560" y="0"/>
-                </a:lnTo>
-              </a:path>
-            </a:pathLst>
-          </a:custGeom>
-          <a:noFill/>
-          <a:ln w="31750">
-            <a:solidFill>
-              <a:srgbClr val="6B9AB2"/>
-            </a:solidFill>
-          </a:ln>
-        </p:spPr>
-        <p:style>
-          <a:lnRef idx="1">
-            <a:schemeClr val="accent1"/>
-          </a:lnRef>
-          <a:fillRef idx="3">
-            <a:schemeClr val="accent1"/>
-          </a:fillRef>
-          <a:effectRef idx="2">
-            <a:schemeClr val="accent1"/>
-          </a:effectRef>
-          <a:fontRef idx="minor">
-            <a:schemeClr val="lt1"/>
-          </a:fontRef>
-        </p:style>
-        <p:txBody>
-          <a:bodyPr rtlCol="0" anchor="ctr"/>
-          <a:lstStyle/>
-          <a:p>
-            <a:pPr algn="ctr"/>
-          </a:p>
-        </p:txBody>
-      </p:sp>
-      <p:sp>
-        <p:nvSpPr>
-          <p:cNvPr id="15" name="Rectangle 14"/>
-          <p:cNvSpPr/>
-          <p:nvPr/>
-        </p:nvSpPr>
-        <p:spPr>
-          <a:xfrm>
-            <a:off x="4592320" y="5496560"/>
-            <a:ext cx="81280" cy="121920"/>
-          </a:xfrm>
-          <a:custGeom>
-            <a:avLst/>
-            <a:gdLst/>
-            <a:ahLst/>
-            <a:cxnLst/>
-            <a:rect l="0" t="0" r="r" b="b"/>
-            <a:pathLst>
-              <a:path w="81280" h="121920">
-                <a:moveTo>
-                  <a:pt x="0" y="0"/>
-                </a:moveTo>
-                <a:lnTo>
-                  <a:pt x="81280" y="60960"/>
-                </a:lnTo>
-                <a:lnTo>
-                  <a:pt x="0" y="121920"/>
-                </a:lnTo>
-              </a:path>
-            </a:pathLst>
-          </a:custGeom>
-          <a:noFill/>
-          <a:ln w="31750">
-            <a:solidFill>
-              <a:srgbClr val="6B9AB2"/>
-            </a:solidFill>
-          </a:ln>
-        </p:spPr>
-        <p:style>
-          <a:lnRef idx="1">
-            <a:schemeClr val="accent1"/>
-          </a:lnRef>
-          <a:fillRef idx="3">
-            <a:schemeClr val="accent1"/>
-          </a:fillRef>
-          <a:effectRef idx="2">
-            <a:schemeClr val="accent1"/>
-          </a:effectRef>
-          <a:fontRef idx="minor">
-            <a:schemeClr val="lt1"/>
-          </a:fontRef>
-        </p:style>
-        <p:txBody>
-          <a:bodyPr rtlCol="0" anchor="ctr"/>
-          <a:lstStyle/>
-          <a:p>
-            <a:pPr algn="ctr"/>
-          </a:p>
-        </p:txBody>
-      </p:sp>
-      <p:sp>
-        <p:nvSpPr>
-          <p:cNvPr id="16" name="Rectangle 15"/>
-          <p:cNvSpPr/>
-          <p:nvPr/>
-        </p:nvSpPr>
-        <p:spPr>
-          <a:xfrm>
-            <a:off x="6075680" y="5557520"/>
-            <a:ext cx="162560" cy="1"/>
-          </a:xfrm>
-          <a:custGeom>
-            <a:avLst/>
-            <a:gdLst/>
-            <a:ahLst/>
-            <a:cxnLst/>
-            <a:rect l="0" t="0" r="r" b="b"/>
-            <a:pathLst>
-              <a:path w="162560" h="1">
-                <a:moveTo>
-                  <a:pt x="0" y="0"/>
-                </a:moveTo>
-                <a:lnTo>
-                  <a:pt x="162560" y="0"/>
-                </a:lnTo>
-              </a:path>
-            </a:pathLst>
-          </a:custGeom>
-          <a:noFill/>
-          <a:ln w="31750">
-            <a:solidFill>
-              <a:srgbClr val="6B9AB2"/>
-            </a:solidFill>
-          </a:ln>
-        </p:spPr>
-        <p:style>
-          <a:lnRef idx="1">
-            <a:schemeClr val="accent1"/>
-          </a:lnRef>
-          <a:fillRef idx="3">
-            <a:schemeClr val="accent1"/>
-          </a:fillRef>
-          <a:effectRef idx="2">
-            <a:schemeClr val="accent1"/>
-          </a:effectRef>
-          <a:fontRef idx="minor">
-            <a:schemeClr val="lt1"/>
-          </a:fontRef>
-        </p:style>
-        <p:txBody>
-          <a:bodyPr rtlCol="0" anchor="ctr"/>
-          <a:lstStyle/>
-          <a:p>
-            <a:pPr algn="ctr"/>
-          </a:p>
-        </p:txBody>
-      </p:sp>
-      <p:sp>
-        <p:nvSpPr>
-          <p:cNvPr id="17" name="Rectangle 16"/>
-          <p:cNvSpPr/>
-          <p:nvPr/>
-        </p:nvSpPr>
-        <p:spPr>
-          <a:xfrm>
-            <a:off x="6177280" y="5496560"/>
-            <a:ext cx="81280" cy="121920"/>
-          </a:xfrm>
-          <a:custGeom>
-            <a:avLst/>
-            <a:gdLst/>
-            <a:ahLst/>
-            <a:cxnLst/>
-            <a:rect l="0" t="0" r="r" b="b"/>
-            <a:pathLst>
-              <a:path w="81280" h="121920">
-                <a:moveTo>
-                  <a:pt x="0" y="0"/>
-                </a:moveTo>
-                <a:lnTo>
-                  <a:pt x="81280" y="60960"/>
-                </a:lnTo>
-                <a:lnTo>
-                  <a:pt x="0" y="121920"/>
-                </a:lnTo>
-              </a:path>
-            </a:pathLst>
-          </a:custGeom>
-          <a:noFill/>
-          <a:ln w="31750">
-            <a:solidFill>
-              <a:srgbClr val="6B9AB2"/>
-            </a:solidFill>
-          </a:ln>
-        </p:spPr>
-        <p:style>
-          <a:lnRef idx="1">
-            <a:schemeClr val="accent1"/>
-          </a:lnRef>
-          <a:fillRef idx="3">
-            <a:schemeClr val="accent1"/>
-          </a:fillRef>
-          <a:effectRef idx="2">
-            <a:schemeClr val="accent1"/>
-          </a:effectRef>
-          <a:fontRef idx="minor">
-            <a:schemeClr val="lt1"/>
-          </a:fontRef>
-        </p:style>
-        <p:txBody>
-          <a:bodyPr rtlCol="0" anchor="ctr"/>
-          <a:lstStyle/>
-          <a:p>
-            <a:pPr algn="ctr"/>
-          </a:p>
-        </p:txBody>
-      </p:sp>
-      <p:sp>
-        <p:nvSpPr>
-          <p:cNvPr id="18" name="Rectangle 17"/>
-          <p:cNvSpPr/>
-          <p:nvPr/>
-        </p:nvSpPr>
-        <p:spPr>
-          <a:xfrm>
-            <a:off x="2946400" y="5994400"/>
-            <a:ext cx="4714240" cy="274320"/>
-          </a:xfrm>
-          <a:custGeom>
-            <a:avLst/>
-            <a:gdLst/>
-            <a:ahLst/>
-            <a:cxnLst/>
-            <a:rect l="0" t="0" r="r" b="b"/>
-            <a:pathLst>
-              <a:path w="4714240" h="274320">
-                <a:moveTo>
-                  <a:pt x="4714240" y="0"/>
-                </a:moveTo>
-                <a:cubicBezTo>
-                  <a:pt x="3352800" y="274320"/>
-                  <a:pt x="1605280" y="274320"/>
-                  <a:pt x="0" y="0"/>
-                </a:cubicBezTo>
-              </a:path>
-            </a:pathLst>
-          </a:custGeom>
-          <a:noFill/>
-          <a:ln w="31750">
-            <a:solidFill>
-              <a:srgbClr val="4F9A9A"/>
-            </a:solidFill>
-          </a:ln>
-        </p:spPr>
-        <p:style>
-          <a:lnRef idx="1">
-            <a:schemeClr val="accent1"/>
-          </a:lnRef>
-          <a:fillRef idx="3">
-            <a:schemeClr val="accent1"/>
-          </a:fillRef>
-          <a:effectRef idx="2">
-            <a:schemeClr val="accent1"/>
-          </a:effectRef>
-          <a:fontRef idx="minor">
-            <a:schemeClr val="lt1"/>
-          </a:fontRef>
-        </p:style>
-        <p:txBody>
-          <a:bodyPr rtlCol="0" anchor="ctr"/>
-          <a:lstStyle/>
-          <a:p>
-            <a:pPr algn="ctr"/>
-          </a:p>
-        </p:txBody>
-      </p:sp>
-      <p:sp>
-        <p:nvSpPr>
-          <p:cNvPr id="19" name="Rectangle 18"/>
-          <p:cNvSpPr/>
-          <p:nvPr/>
-        </p:nvSpPr>
-        <p:spPr>
-          <a:xfrm>
-            <a:off x="2926080" y="5933440"/>
-            <a:ext cx="121920" cy="121920"/>
-          </a:xfrm>
-          <a:custGeom>
-            <a:avLst/>
-            <a:gdLst/>
-            <a:ahLst/>
-            <a:cxnLst/>
-            <a:rect l="0" t="0" r="r" b="b"/>
-            <a:pathLst>
-              <a:path w="121920" h="121920">
-                <a:moveTo>
-                  <a:pt x="121920" y="0"/>
-                </a:moveTo>
-                <a:lnTo>
-                  <a:pt x="0" y="60960"/>
-                </a:lnTo>
-                <a:lnTo>
-                  <a:pt x="121920" y="121920"/>
-                </a:lnTo>
-              </a:path>
-            </a:pathLst>
-          </a:custGeom>
-          <a:noFill/>
-          <a:ln w="31750">
-            <a:solidFill>
-              <a:srgbClr val="4F9A9A"/>
-            </a:solidFill>
-          </a:ln>
-        </p:spPr>
-        <p:style>
-          <a:lnRef idx="1">
-            <a:schemeClr val="accent1"/>
-          </a:lnRef>
-          <a:fillRef idx="3">
-            <a:schemeClr val="accent1"/>
-          </a:fillRef>
-          <a:effectRef idx="2">
-            <a:schemeClr val="accent1"/>
-          </a:effectRef>
-          <a:fontRef idx="minor">
-            <a:schemeClr val="lt1"/>
-          </a:fontRef>
-        </p:style>
-        <p:txBody>
-          <a:bodyPr rtlCol="0" anchor="ctr"/>
-          <a:lstStyle/>
-          <a:p>
-            <a:pPr algn="ctr"/>
+              <a:t>Deterministic vector diagram; the generated raster layer was downgraded out of this slide.</a:t>
+            </a:r>
           </a:p>
         </p:txBody>
       </p:sp>
@@ -7936,7 +5798,7 @@
             <a:avLst/>
           </a:prstGeom>
           <a:solidFill>
-            <a:srgbClr val="F7FAFC"/>
+            <a:srgbClr val="FFFFFF"/>
           </a:solidFill>
           <a:ln>
             <a:noFill/>
@@ -7972,8 +5834,8 @@
         </p:nvSpPr>
         <p:spPr>
           <a:xfrm>
-            <a:off x="609600" y="1402080"/>
-            <a:ext cx="10972800" cy="1"/>
+            <a:off x="487680" y="1625600"/>
+            <a:ext cx="11216640" cy="1"/>
           </a:xfrm>
           <a:custGeom>
             <a:avLst/>
@@ -7982,12 +5844,12 @@
             <a:cxnLst/>
             <a:rect l="0" t="0" r="r" b="b"/>
             <a:pathLst>
-              <a:path w="10972800" h="1">
+              <a:path w="11216640" h="1">
                 <a:moveTo>
                   <a:pt x="0" y="0"/>
                 </a:moveTo>
                 <a:lnTo>
-                  <a:pt x="10972800" y="0"/>
+                  <a:pt x="11216640" y="0"/>
                 </a:lnTo>
               </a:path>
             </a:pathLst>
@@ -7995,7 +5857,7 @@
           <a:noFill/>
           <a:ln w="25400">
             <a:solidFill>
-              <a:srgbClr val="D9E5EC"/>
+              <a:srgbClr val="E2E8F0"/>
             </a:solidFill>
           </a:ln>
         </p:spPr>
@@ -8021,76 +5883,92 @@
           </a:p>
         </p:txBody>
       </p:sp>
-      <p:cxnSp>
-        <p:nvCxnSpPr>
-          <p:cNvPr id="4" name="Connector 3"/>
-          <p:cNvCxnSpPr/>
-          <p:nvPr/>
-        </p:nvCxnSpPr>
-        <p:spPr>
-          <a:xfrm>
-            <a:off x="1422400" y="1828800"/>
-            <a:ext cx="9753600" cy="0"/>
-          </a:xfrm>
-          <a:prstGeom prst="line">
-            <a:avLst/>
-          </a:prstGeom>
-          <a:ln w="19050">
-            <a:solidFill>
-              <a:srgbClr val="D9E5EC"/>
-            </a:solidFill>
+      <p:sp>
+        <p:nvSpPr>
+          <p:cNvPr id="4" name="Rectangle 3"/>
+          <p:cNvSpPr/>
+          <p:nvPr/>
+        </p:nvSpPr>
+        <p:spPr>
+          <a:xfrm>
+            <a:off x="8696960" y="894080"/>
+            <a:ext cx="162560" cy="162560"/>
+          </a:xfrm>
+          <a:prstGeom prst="rect">
+            <a:avLst/>
+          </a:prstGeom>
+          <a:solidFill>
+            <a:srgbClr val="1E3A5F"/>
+          </a:solidFill>
+          <a:ln>
+            <a:noFill/>
           </a:ln>
         </p:spPr>
         <p:style>
-          <a:lnRef idx="2">
+          <a:lnRef idx="1">
             <a:schemeClr val="accent1"/>
           </a:lnRef>
-          <a:fillRef idx="0">
+          <a:fillRef idx="3">
             <a:schemeClr val="accent1"/>
           </a:fillRef>
-          <a:effectRef idx="1">
+          <a:effectRef idx="2">
             <a:schemeClr val="accent1"/>
           </a:effectRef>
           <a:fontRef idx="minor">
-            <a:schemeClr val="tx1"/>
+            <a:schemeClr val="lt1"/>
           </a:fontRef>
         </p:style>
-      </p:cxnSp>
-      <p:cxnSp>
-        <p:nvCxnSpPr>
-          <p:cNvPr id="5" name="Connector 4"/>
-          <p:cNvCxnSpPr/>
-          <p:nvPr/>
-        </p:nvCxnSpPr>
-        <p:spPr>
-          <a:xfrm>
-            <a:off x="1422400" y="2692400"/>
-            <a:ext cx="9753600" cy="0"/>
-          </a:xfrm>
-          <a:prstGeom prst="line">
-            <a:avLst/>
-          </a:prstGeom>
-          <a:ln w="19050">
-            <a:solidFill>
-              <a:srgbClr val="E7EEF2"/>
-            </a:solidFill>
+        <p:txBody>
+          <a:bodyPr rtlCol="0" anchor="ctr"/>
+          <a:lstStyle/>
+          <a:p>
+            <a:pPr algn="ctr"/>
+          </a:p>
+        </p:txBody>
+      </p:sp>
+      <p:sp>
+        <p:nvSpPr>
+          <p:cNvPr id="5" name="Rectangle 4"/>
+          <p:cNvSpPr/>
+          <p:nvPr/>
+        </p:nvSpPr>
+        <p:spPr>
+          <a:xfrm>
+            <a:off x="9916160" y="894080"/>
+            <a:ext cx="162560" cy="162560"/>
+          </a:xfrm>
+          <a:prstGeom prst="rect">
+            <a:avLst/>
+          </a:prstGeom>
+          <a:solidFill>
+            <a:srgbClr val="0F766E"/>
+          </a:solidFill>
+          <a:ln>
+            <a:noFill/>
           </a:ln>
         </p:spPr>
         <p:style>
-          <a:lnRef idx="2">
+          <a:lnRef idx="1">
             <a:schemeClr val="accent1"/>
           </a:lnRef>
-          <a:fillRef idx="0">
+          <a:fillRef idx="3">
             <a:schemeClr val="accent1"/>
           </a:fillRef>
-          <a:effectRef idx="1">
+          <a:effectRef idx="2">
             <a:schemeClr val="accent1"/>
           </a:effectRef>
           <a:fontRef idx="minor">
-            <a:schemeClr val="tx1"/>
+            <a:schemeClr val="lt1"/>
           </a:fontRef>
         </p:style>
-      </p:cxnSp>
+        <p:txBody>
+          <a:bodyPr rtlCol="0" anchor="ctr"/>
+          <a:lstStyle/>
+          <a:p>
+            <a:pPr algn="ctr"/>
+          </a:p>
+        </p:txBody>
+      </p:sp>
       <p:cxnSp>
         <p:nvCxnSpPr>
           <p:cNvPr id="6" name="Connector 5"/>
@@ -8099,15 +5977,15 @@
         </p:nvCxnSpPr>
         <p:spPr>
           <a:xfrm>
-            <a:off x="1422400" y="3556000"/>
-            <a:ext cx="9753600" cy="0"/>
+            <a:off x="1381760" y="2032000"/>
+            <a:ext cx="10078720" cy="0"/>
           </a:xfrm>
           <a:prstGeom prst="line">
             <a:avLst/>
           </a:prstGeom>
           <a:ln w="19050">
             <a:solidFill>
-              <a:srgbClr val="E7EEF2"/>
+              <a:srgbClr val="E2E8F0"/>
             </a:solidFill>
           </a:ln>
         </p:spPr>
@@ -8134,15 +6012,15 @@
         </p:nvCxnSpPr>
         <p:spPr>
           <a:xfrm>
-            <a:off x="1422400" y="4419600"/>
-            <a:ext cx="9753600" cy="0"/>
+            <a:off x="1381760" y="2844800"/>
+            <a:ext cx="10078720" cy="0"/>
           </a:xfrm>
           <a:prstGeom prst="line">
             <a:avLst/>
           </a:prstGeom>
           <a:ln w="19050">
             <a:solidFill>
-              <a:srgbClr val="E7EEF2"/>
+              <a:srgbClr val="E2E8F0"/>
             </a:solidFill>
           </a:ln>
         </p:spPr>
@@ -8169,15 +6047,15 @@
         </p:nvCxnSpPr>
         <p:spPr>
           <a:xfrm>
-            <a:off x="1422400" y="5283200"/>
-            <a:ext cx="9753600" cy="0"/>
+            <a:off x="1381760" y="3657600"/>
+            <a:ext cx="10078720" cy="0"/>
           </a:xfrm>
           <a:prstGeom prst="line">
             <a:avLst/>
           </a:prstGeom>
-          <a:ln w="25400">
+          <a:ln w="19050">
             <a:solidFill>
-              <a:srgbClr val="B9CCD9"/>
+              <a:srgbClr val="E2E8F0"/>
             </a:solidFill>
           </a:ln>
         </p:spPr>
@@ -8204,15 +6082,15 @@
         </p:nvCxnSpPr>
         <p:spPr>
           <a:xfrm>
-            <a:off x="1422400" y="1828800"/>
-            <a:ext cx="0" cy="3454400"/>
+            <a:off x="1381760" y="4470400"/>
+            <a:ext cx="10078720" cy="0"/>
           </a:xfrm>
           <a:prstGeom prst="line">
             <a:avLst/>
           </a:prstGeom>
-          <a:ln w="25400">
+          <a:ln w="19050">
             <a:solidFill>
-              <a:srgbClr val="6B8799"/>
+              <a:srgbClr val="E2E8F0"/>
             </a:solidFill>
           </a:ln>
         </p:spPr>
@@ -8239,15 +6117,15 @@
         </p:nvCxnSpPr>
         <p:spPr>
           <a:xfrm>
-            <a:off x="1422400" y="5283200"/>
-            <a:ext cx="9753600" cy="0"/>
+            <a:off x="1381760" y="2032000"/>
+            <a:ext cx="0" cy="3251200"/>
           </a:xfrm>
           <a:prstGeom prst="line">
             <a:avLst/>
           </a:prstGeom>
           <a:ln w="25400">
             <a:solidFill>
-              <a:srgbClr val="6B8799"/>
+              <a:srgbClr val="475569"/>
             </a:solidFill>
           </a:ln>
         </p:spPr>
@@ -8274,15 +6152,15 @@
         </p:nvCxnSpPr>
         <p:spPr>
           <a:xfrm>
-            <a:off x="1341120" y="1828800"/>
-            <a:ext cx="81280" cy="0"/>
+            <a:off x="1381760" y="5283200"/>
+            <a:ext cx="10078720" cy="0"/>
           </a:xfrm>
           <a:prstGeom prst="line">
             <a:avLst/>
           </a:prstGeom>
           <a:ln w="25400">
             <a:solidFill>
-              <a:srgbClr val="6B8799"/>
+              <a:srgbClr val="475569"/>
             </a:solidFill>
           </a:ln>
         </p:spPr>
@@ -8309,7 +6187,7 @@
         </p:nvCxnSpPr>
         <p:spPr>
           <a:xfrm>
-            <a:off x="1341120" y="2692400"/>
+            <a:off x="1300480" y="2032000"/>
             <a:ext cx="81280" cy="0"/>
           </a:xfrm>
           <a:prstGeom prst="line">
@@ -8317,7 +6195,7 @@
           </a:prstGeom>
           <a:ln w="25400">
             <a:solidFill>
-              <a:srgbClr val="6B8799"/>
+              <a:srgbClr val="475569"/>
             </a:solidFill>
           </a:ln>
         </p:spPr>
@@ -8344,7 +6222,7 @@
         </p:nvCxnSpPr>
         <p:spPr>
           <a:xfrm>
-            <a:off x="1341120" y="3556000"/>
+            <a:off x="1300480" y="2844800"/>
             <a:ext cx="81280" cy="0"/>
           </a:xfrm>
           <a:prstGeom prst="line">
@@ -8352,7 +6230,7 @@
           </a:prstGeom>
           <a:ln w="25400">
             <a:solidFill>
-              <a:srgbClr val="6B8799"/>
+              <a:srgbClr val="475569"/>
             </a:solidFill>
           </a:ln>
         </p:spPr>
@@ -8379,7 +6257,7 @@
         </p:nvCxnSpPr>
         <p:spPr>
           <a:xfrm>
-            <a:off x="1341120" y="4419600"/>
+            <a:off x="1300480" y="3657600"/>
             <a:ext cx="81280" cy="0"/>
           </a:xfrm>
           <a:prstGeom prst="line">
@@ -8387,7 +6265,7 @@
           </a:prstGeom>
           <a:ln w="25400">
             <a:solidFill>
-              <a:srgbClr val="6B8799"/>
+              <a:srgbClr val="475569"/>
             </a:solidFill>
           </a:ln>
         </p:spPr>
@@ -8414,7 +6292,7 @@
         </p:nvCxnSpPr>
         <p:spPr>
           <a:xfrm>
-            <a:off x="1341120" y="5283200"/>
+            <a:off x="1300480" y="4470400"/>
             <a:ext cx="81280" cy="0"/>
           </a:xfrm>
           <a:prstGeom prst="line">
@@ -8422,7 +6300,7 @@
           </a:prstGeom>
           <a:ln w="25400">
             <a:solidFill>
-              <a:srgbClr val="6B8799"/>
+              <a:srgbClr val="475569"/>
             </a:solidFill>
           </a:ln>
         </p:spPr>
@@ -8441,22 +6319,57 @@
           </a:fontRef>
         </p:style>
       </p:cxnSp>
-      <p:sp>
-        <p:nvSpPr>
-          <p:cNvPr id="16" name="Rectangle 15"/>
+      <p:cxnSp>
+        <p:nvCxnSpPr>
+          <p:cNvPr id="16" name="Connector 15"/>
+          <p:cNvCxnSpPr/>
+          <p:nvPr/>
+        </p:nvCxnSpPr>
+        <p:spPr>
+          <a:xfrm>
+            <a:off x="1300480" y="5283200"/>
+            <a:ext cx="81280" cy="0"/>
+          </a:xfrm>
+          <a:prstGeom prst="line">
+            <a:avLst/>
+          </a:prstGeom>
+          <a:ln w="25400">
+            <a:solidFill>
+              <a:srgbClr val="475569"/>
+            </a:solidFill>
+          </a:ln>
+        </p:spPr>
+        <p:style>
+          <a:lnRef idx="2">
+            <a:schemeClr val="accent1"/>
+          </a:lnRef>
+          <a:fillRef idx="0">
+            <a:schemeClr val="accent1"/>
+          </a:fillRef>
+          <a:effectRef idx="1">
+            <a:schemeClr val="accent1"/>
+          </a:effectRef>
+          <a:fontRef idx="minor">
+            <a:schemeClr val="tx1"/>
+          </a:fontRef>
+        </p:style>
+      </p:cxnSp>
+      <p:sp>
+        <p:nvSpPr>
+          <p:cNvPr id="17" name="Rectangle 16"/>
           <p:cNvSpPr/>
           <p:nvPr/>
         </p:nvSpPr>
         <p:spPr>
           <a:xfrm>
-            <a:off x="2397760" y="2792578"/>
-            <a:ext cx="1137920" cy="2490622"/>
+            <a:off x="1788160" y="2939085"/>
+            <a:ext cx="1625600" cy="2344115"/>
           </a:xfrm>
           <a:prstGeom prst="rect">
             <a:avLst/>
           </a:prstGeom>
           <a:solidFill>
-            <a:srgbClr val="5B7890"/>
+            <a:srgbClr val="1E3A5F"/>
           </a:solidFill>
           <a:ln>
             <a:noFill/>
@@ -8486,20 +6399,20 @@
       </p:sp>
       <p:sp>
         <p:nvSpPr>
-          <p:cNvPr id="17" name="Rectangle 16"/>
+          <p:cNvPr id="18" name="Rectangle 17"/>
           <p:cNvSpPr/>
           <p:nvPr/>
         </p:nvSpPr>
         <p:spPr>
           <a:xfrm>
-            <a:off x="4632960" y="2464410"/>
-            <a:ext cx="1137920" cy="2818790"/>
+            <a:off x="4307840" y="2630221"/>
+            <a:ext cx="1625600" cy="2652979"/>
           </a:xfrm>
           <a:prstGeom prst="rect">
             <a:avLst/>
           </a:prstGeom>
           <a:solidFill>
-            <a:srgbClr val="6B9AB2"/>
+            <a:srgbClr val="1E3A5F"/>
           </a:solidFill>
           <a:ln>
             <a:noFill/>
@@ -8529,20 +6442,20 @@
       </p:sp>
       <p:sp>
         <p:nvSpPr>
-          <p:cNvPr id="18" name="Rectangle 17"/>
+          <p:cNvPr id="19" name="Rectangle 18"/>
           <p:cNvSpPr/>
           <p:nvPr/>
         </p:nvSpPr>
         <p:spPr>
           <a:xfrm>
-            <a:off x="6868160" y="1884070"/>
-            <a:ext cx="1137920" cy="3399130"/>
+            <a:off x="6827520" y="2084019"/>
+            <a:ext cx="1625600" cy="3199181"/>
           </a:xfrm>
           <a:prstGeom prst="rect">
             <a:avLst/>
           </a:prstGeom>
           <a:solidFill>
-            <a:srgbClr val="4F9A9A"/>
+            <a:srgbClr val="0F766E"/>
           </a:solidFill>
           <a:ln>
             <a:noFill/>
@@ -8572,20 +6485,20 @@
       </p:sp>
       <p:sp>
         <p:nvSpPr>
-          <p:cNvPr id="19" name="Rectangle 18"/>
+          <p:cNvPr id="20" name="Rectangle 19"/>
           <p:cNvSpPr/>
           <p:nvPr/>
         </p:nvSpPr>
         <p:spPr>
           <a:xfrm>
-            <a:off x="9103360" y="1828800"/>
-            <a:ext cx="1137920" cy="3454400"/>
+            <a:off x="9347200" y="2032000"/>
+            <a:ext cx="1625600" cy="3251200"/>
           </a:xfrm>
           <a:prstGeom prst="rect">
             <a:avLst/>
           </a:prstGeom>
           <a:solidFill>
-            <a:srgbClr val="D29A52"/>
+            <a:srgbClr val="0F766E"/>
           </a:solidFill>
           <a:ln>
             <a:noFill/>
@@ -8615,100 +6528,14 @@
       </p:sp>
       <p:sp>
         <p:nvSpPr>
-          <p:cNvPr id="20" name="Rectangle 19"/>
-          <p:cNvSpPr/>
-          <p:nvPr/>
-        </p:nvSpPr>
-        <p:spPr>
-          <a:xfrm>
-            <a:off x="7924800" y="731520"/>
-            <a:ext cx="142240" cy="142240"/>
-          </a:xfrm>
-          <a:prstGeom prst="rect">
-            <a:avLst/>
-          </a:prstGeom>
-          <a:solidFill>
-            <a:srgbClr val="5B7890"/>
-          </a:solidFill>
-          <a:ln>
-            <a:noFill/>
-          </a:ln>
-        </p:spPr>
-        <p:style>
-          <a:lnRef idx="1">
-            <a:schemeClr val="accent1"/>
-          </a:lnRef>
-          <a:fillRef idx="3">
-            <a:schemeClr val="accent1"/>
-          </a:fillRef>
-          <a:effectRef idx="2">
-            <a:schemeClr val="accent1"/>
-          </a:effectRef>
-          <a:fontRef idx="minor">
-            <a:schemeClr val="lt1"/>
-          </a:fontRef>
-        </p:style>
-        <p:txBody>
-          <a:bodyPr rtlCol="0" anchor="ctr"/>
-          <a:lstStyle/>
-          <a:p>
-            <a:pPr algn="ctr"/>
-          </a:p>
-        </p:txBody>
-      </p:sp>
-      <p:sp>
-        <p:nvSpPr>
           <p:cNvPr id="21" name="Rectangle 20"/>
           <p:cNvSpPr/>
           <p:nvPr/>
         </p:nvSpPr>
         <p:spPr>
           <a:xfrm>
-            <a:off x="9001760" y="731520"/>
-            <a:ext cx="142240" cy="142240"/>
-          </a:xfrm>
-          <a:prstGeom prst="rect">
-            <a:avLst/>
-          </a:prstGeom>
-          <a:solidFill>
-            <a:srgbClr val="4F9A9A"/>
-          </a:solidFill>
-          <a:ln>
-            <a:noFill/>
-          </a:ln>
-        </p:spPr>
-        <p:style>
-          <a:lnRef idx="1">
-            <a:schemeClr val="accent1"/>
-          </a:lnRef>
-          <a:fillRef idx="3">
-            <a:schemeClr val="accent1"/>
-          </a:fillRef>
-          <a:effectRef idx="2">
-            <a:schemeClr val="accent1"/>
-          </a:effectRef>
-          <a:fontRef idx="minor">
-            <a:schemeClr val="lt1"/>
-          </a:fontRef>
-        </p:style>
-        <p:txBody>
-          <a:bodyPr rtlCol="0" anchor="ctr"/>
-          <a:lstStyle/>
-          <a:p>
-            <a:pPr algn="ctr"/>
-          </a:p>
-        </p:txBody>
-      </p:sp>
-      <p:sp>
-        <p:nvSpPr>
-          <p:cNvPr id="22" name="Rectangle 21"/>
-          <p:cNvSpPr/>
-          <p:nvPr/>
-        </p:nvSpPr>
-        <p:spPr>
-          <a:xfrm>
-            <a:off x="609600" y="6339840"/>
-            <a:ext cx="10972800" cy="1"/>
+            <a:off x="487680" y="6177280"/>
+            <a:ext cx="11216640" cy="1"/>
           </a:xfrm>
           <a:custGeom>
             <a:avLst/>
@@ -8717,12 +6544,12 @@
             <a:cxnLst/>
             <a:rect l="0" t="0" r="r" b="b"/>
             <a:pathLst>
-              <a:path w="10972800" h="1">
+              <a:path w="11216640" h="1">
                 <a:moveTo>
                   <a:pt x="0" y="0"/>
                 </a:moveTo>
                 <a:lnTo>
-                  <a:pt x="10972800" y="0"/>
+                  <a:pt x="11216640" y="0"/>
                 </a:lnTo>
               </a:path>
             </a:pathLst>
@@ -8730,7 +6557,7 @@
           <a:noFill/>
           <a:ln w="19050">
             <a:solidFill>
-              <a:srgbClr val="D9E5EC"/>
+              <a:srgbClr val="E2E8F0"/>
             </a:solidFill>
           </a:ln>
         </p:spPr>
@@ -8758,14 +6585,14 @@
       </p:sp>
       <p:sp>
         <p:nvSpPr>
-          <p:cNvPr id="23" name="TextBox 22"/>
+          <p:cNvPr id="22" name="TextBox 21"/>
           <p:cNvSpPr txBox="1"/>
           <p:nvPr/>
         </p:nvSpPr>
         <p:spPr>
           <a:xfrm>
-            <a:off x="609600" y="388620"/>
-            <a:ext cx="2218436" cy="171704"/>
+            <a:off x="487680" y="558800"/>
+            <a:ext cx="1900714" cy="158496"/>
           </a:xfrm>
           <a:prstGeom prst="rect">
             <a:avLst/>
@@ -8780,11 +6607,11 @@
           <a:p>
             <a:pPr algn="l"/>
             <a:r>
-              <a:rPr sz="1300" b="1">
-                <a:solidFill>
-                  <a:srgbClr val="5B7890"/>
-                </a:solidFill>
-                <a:latin typeface="Arial"/>
+              <a:rPr sz="1200">
+                <a:solidFill>
+                  <a:srgbClr val="64748B"/>
+                </a:solidFill>
+                <a:latin typeface="DejaVu Sans"/>
               </a:rPr>
               <a:t>DETERMINISTIC DATA VIEW</a:t>
             </a:r>
@@ -8793,14 +6620,14 @@
       </p:sp>
       <p:sp>
         <p:nvSpPr>
-          <p:cNvPr id="24" name="TextBox 23"/>
+          <p:cNvPr id="23" name="TextBox 22"/>
           <p:cNvSpPr txBox="1"/>
           <p:nvPr/>
         </p:nvSpPr>
         <p:spPr>
           <a:xfrm>
-            <a:off x="609600" y="624840"/>
-            <a:ext cx="4008120" cy="396240"/>
+            <a:off x="487680" y="812800"/>
+            <a:ext cx="4137025" cy="422656"/>
           </a:xfrm>
           <a:prstGeom prst="rect">
             <a:avLst/>
@@ -8815,11 +6642,11 @@
           <a:p>
             <a:pPr algn="l"/>
             <a:r>
-              <a:rPr sz="3000" b="1">
-                <a:solidFill>
-                  <a:srgbClr val="15334A"/>
-                </a:solidFill>
-                <a:latin typeface="Arial"/>
+              <a:rPr sz="3200" b="1">
+                <a:solidFill>
+                  <a:srgbClr val="1E3A5F"/>
+                </a:solidFill>
+                <a:latin typeface="DejaVu Sans"/>
               </a:rPr>
               <a:t>Accuracy comparison</a:t>
             </a:r>
@@ -8828,14 +6655,14 @@
       </p:sp>
       <p:sp>
         <p:nvSpPr>
-          <p:cNvPr id="25" name="TextBox 24"/>
+          <p:cNvPr id="24" name="TextBox 23"/>
           <p:cNvSpPr txBox="1"/>
           <p:nvPr/>
         </p:nvSpPr>
         <p:spPr>
           <a:xfrm>
-            <a:off x="609600" y="1033780"/>
-            <a:ext cx="5196840" cy="198120"/>
+            <a:off x="487680" y="1259840"/>
+            <a:ext cx="4358958" cy="211328"/>
           </a:xfrm>
           <a:prstGeom prst="rect">
             <a:avLst/>
@@ -8850,11 +6677,11 @@
           <a:p>
             <a:pPr algn="l"/>
             <a:r>
-              <a:rPr sz="1500">
-                <a:solidFill>
-                  <a:srgbClr val="5B7890"/>
-                </a:solidFill>
-                <a:latin typeface="Arial"/>
+              <a:rPr sz="1600">
+                <a:solidFill>
+                  <a:srgbClr val="374151"/>
+                </a:solidFill>
+                <a:latin typeface="DejaVu Sans"/>
               </a:rPr>
               <a:t>Four checkpoints rendered directly from data.json.</a:t>
             </a:r>
@@ -8863,14 +6690,14 @@
       </p:sp>
       <p:sp>
         <p:nvSpPr>
-          <p:cNvPr id="26" name="TextBox 25"/>
+          <p:cNvPr id="25" name="TextBox 24"/>
           <p:cNvSpPr txBox="1"/>
           <p:nvPr/>
         </p:nvSpPr>
         <p:spPr>
           <a:xfrm>
-            <a:off x="717296" y="1788160"/>
-            <a:ext cx="481584" cy="158496"/>
+            <a:off x="8940800" y="904240"/>
+            <a:ext cx="933450" cy="211328"/>
           </a:xfrm>
           <a:prstGeom prst="rect">
             <a:avLst/>
@@ -8883,29 +6710,29 @@
           </a:bodyPr>
           <a:lstStyle/>
           <a:p>
-            <a:pPr algn="r"/>
-            <a:r>
-              <a:rPr sz="1200">
-                <a:solidFill>
-                  <a:srgbClr val="557085"/>
-                </a:solidFill>
-                <a:latin typeface="Arial"/>
+            <a:pPr algn="l"/>
+            <a:r>
+              <a:rPr sz="1600">
+                <a:solidFill>
+                  <a:srgbClr val="374151"/>
+                </a:solidFill>
+                <a:latin typeface="DejaVu Sans"/>
               </a:rPr>
-              <a:t>100</a:t>
-            </a:r>
-          </a:p>
-        </p:txBody>
-      </p:sp>
-      <p:sp>
-        <p:nvSpPr>
-          <p:cNvPr id="27" name="TextBox 26"/>
+              <a:t>Baseline</a:t>
+            </a:r>
+          </a:p>
+        </p:txBody>
+      </p:sp>
+      <p:sp>
+        <p:nvSpPr>
+          <p:cNvPr id="26" name="TextBox 25"/>
           <p:cNvSpPr txBox="1"/>
           <p:nvPr/>
         </p:nvSpPr>
         <p:spPr>
           <a:xfrm>
-            <a:off x="796544" y="2651760"/>
-            <a:ext cx="402336" cy="158496"/>
+            <a:off x="10160000" y="904240"/>
+            <a:ext cx="854551" cy="211328"/>
           </a:xfrm>
           <a:prstGeom prst="rect">
             <a:avLst/>
@@ -8918,29 +6745,29 @@
           </a:bodyPr>
           <a:lstStyle/>
           <a:p>
-            <a:pPr algn="r"/>
-            <a:r>
-              <a:rPr sz="1200">
-                <a:solidFill>
-                  <a:srgbClr val="557085"/>
-                </a:solidFill>
-                <a:latin typeface="Arial"/>
+            <a:pPr algn="l"/>
+            <a:r>
+              <a:rPr sz="1600">
+                <a:solidFill>
+                  <a:srgbClr val="374151"/>
+                </a:solidFill>
+                <a:latin typeface="DejaVu Sans"/>
               </a:rPr>
-              <a:t>75</a:t>
-            </a:r>
-          </a:p>
-        </p:txBody>
-      </p:sp>
-      <p:sp>
-        <p:nvSpPr>
-          <p:cNvPr id="28" name="TextBox 27"/>
+              <a:t>Current</a:t>
+            </a:r>
+          </a:p>
+        </p:txBody>
+      </p:sp>
+      <p:sp>
+        <p:nvSpPr>
+          <p:cNvPr id="27" name="TextBox 26"/>
           <p:cNvSpPr txBox="1"/>
           <p:nvPr/>
         </p:nvSpPr>
         <p:spPr>
           <a:xfrm>
-            <a:off x="796544" y="3515360"/>
-            <a:ext cx="402336" cy="158496"/>
+            <a:off x="583565" y="1971040"/>
+            <a:ext cx="554355" cy="211328"/>
           </a:xfrm>
           <a:prstGeom prst="rect">
             <a:avLst/>
@@ -8955,27 +6782,27 @@
           <a:p>
             <a:pPr algn="r"/>
             <a:r>
-              <a:rPr sz="1200">
-                <a:solidFill>
-                  <a:srgbClr val="557085"/>
-                </a:solidFill>
-                <a:latin typeface="Arial"/>
+              <a:rPr sz="1600">
+                <a:solidFill>
+                  <a:srgbClr val="374151"/>
+                </a:solidFill>
+                <a:latin typeface="DejaVu Sans"/>
               </a:rPr>
-              <a:t>50</a:t>
-            </a:r>
-          </a:p>
-        </p:txBody>
-      </p:sp>
-      <p:sp>
-        <p:nvSpPr>
-          <p:cNvPr id="29" name="TextBox 28"/>
+              <a:t>100</a:t>
+            </a:r>
+          </a:p>
+        </p:txBody>
+      </p:sp>
+      <p:sp>
+        <p:nvSpPr>
+          <p:cNvPr id="28" name="TextBox 27"/>
           <p:cNvSpPr txBox="1"/>
           <p:nvPr/>
         </p:nvSpPr>
         <p:spPr>
           <a:xfrm>
-            <a:off x="796544" y="4378960"/>
-            <a:ext cx="402336" cy="158496"/>
+            <a:off x="687070" y="2783840"/>
+            <a:ext cx="450850" cy="211328"/>
           </a:xfrm>
           <a:prstGeom prst="rect">
             <a:avLst/>
@@ -8990,27 +6817,27 @@
           <a:p>
             <a:pPr algn="r"/>
             <a:r>
-              <a:rPr sz="1200">
-                <a:solidFill>
-                  <a:srgbClr val="557085"/>
-                </a:solidFill>
-                <a:latin typeface="Arial"/>
+              <a:rPr sz="1600">
+                <a:solidFill>
+                  <a:srgbClr val="374151"/>
+                </a:solidFill>
+                <a:latin typeface="DejaVu Sans"/>
               </a:rPr>
-              <a:t>25</a:t>
-            </a:r>
-          </a:p>
-        </p:txBody>
-      </p:sp>
-      <p:sp>
-        <p:nvSpPr>
-          <p:cNvPr id="30" name="TextBox 29"/>
+              <a:t>75</a:t>
+            </a:r>
+          </a:p>
+        </p:txBody>
+      </p:sp>
+      <p:sp>
+        <p:nvSpPr>
+          <p:cNvPr id="29" name="TextBox 28"/>
           <p:cNvSpPr txBox="1"/>
           <p:nvPr/>
         </p:nvSpPr>
         <p:spPr>
           <a:xfrm>
-            <a:off x="875792" y="5242560"/>
-            <a:ext cx="323088" cy="158496"/>
+            <a:off x="687070" y="3596640"/>
+            <a:ext cx="450850" cy="211328"/>
           </a:xfrm>
           <a:prstGeom prst="rect">
             <a:avLst/>
@@ -9025,27 +6852,27 @@
           <a:p>
             <a:pPr algn="r"/>
             <a:r>
-              <a:rPr sz="1200">
-                <a:solidFill>
-                  <a:srgbClr val="557085"/>
-                </a:solidFill>
-                <a:latin typeface="Arial"/>
+              <a:rPr sz="1600">
+                <a:solidFill>
+                  <a:srgbClr val="374151"/>
+                </a:solidFill>
+                <a:latin typeface="DejaVu Sans"/>
               </a:rPr>
-              <a:t>0</a:t>
-            </a:r>
-          </a:p>
-        </p:txBody>
-      </p:sp>
-      <p:sp>
-        <p:nvSpPr>
-          <p:cNvPr id="31" name="TextBox 30"/>
+              <a:t>50</a:t>
+            </a:r>
+          </a:p>
+        </p:txBody>
+      </p:sp>
+      <p:sp>
+        <p:nvSpPr>
+          <p:cNvPr id="30" name="TextBox 29"/>
           <p:cNvSpPr txBox="1"/>
           <p:nvPr/>
         </p:nvSpPr>
         <p:spPr>
           <a:xfrm>
-            <a:off x="1422400" y="1541780"/>
-            <a:ext cx="1115568" cy="145288"/>
+            <a:off x="687070" y="4409440"/>
+            <a:ext cx="450850" cy="211328"/>
           </a:xfrm>
           <a:prstGeom prst="rect">
             <a:avLst/>
@@ -9058,29 +6885,29 @@
           </a:bodyPr>
           <a:lstStyle/>
           <a:p>
-            <a:pPr algn="l"/>
-            <a:r>
-              <a:rPr sz="1100" b="1">
-                <a:solidFill>
-                  <a:srgbClr val="557085"/>
-                </a:solidFill>
-                <a:latin typeface="Arial"/>
+            <a:pPr algn="r"/>
+            <a:r>
+              <a:rPr sz="1600">
+                <a:solidFill>
+                  <a:srgbClr val="374151"/>
+                </a:solidFill>
+                <a:latin typeface="DejaVu Sans"/>
               </a:rPr>
-              <a:t>ACCURACY (%)</a:t>
-            </a:r>
-          </a:p>
-        </p:txBody>
-      </p:sp>
-      <p:sp>
-        <p:nvSpPr>
-          <p:cNvPr id="32" name="TextBox 31"/>
+              <a:t>25</a:t>
+            </a:r>
+          </a:p>
+        </p:txBody>
+      </p:sp>
+      <p:sp>
+        <p:nvSpPr>
+          <p:cNvPr id="31" name="TextBox 30"/>
           <p:cNvSpPr txBox="1"/>
           <p:nvPr/>
         </p:nvSpPr>
         <p:spPr>
           <a:xfrm>
-            <a:off x="5781040" y="5984240"/>
-            <a:ext cx="1036320" cy="158496"/>
+            <a:off x="790575" y="5222240"/>
+            <a:ext cx="347345" cy="211328"/>
           </a:xfrm>
           <a:prstGeom prst="rect">
             <a:avLst/>
@@ -9093,29 +6920,29 @@
           </a:bodyPr>
           <a:lstStyle/>
           <a:p>
-            <a:pPr algn="ctr"/>
-            <a:r>
-              <a:rPr sz="1200" b="1">
-                <a:solidFill>
-                  <a:srgbClr val="557085"/>
-                </a:solidFill>
-                <a:latin typeface="Arial"/>
+            <a:pPr algn="r"/>
+            <a:r>
+              <a:rPr sz="1600">
+                <a:solidFill>
+                  <a:srgbClr val="374151"/>
+                </a:solidFill>
+                <a:latin typeface="DejaVu Sans"/>
               </a:rPr>
-              <a:t>CHECKPOINT</a:t>
-            </a:r>
-          </a:p>
-        </p:txBody>
-      </p:sp>
-      <p:sp>
-        <p:nvSpPr>
-          <p:cNvPr id="33" name="TextBox 32"/>
+              <a:t>0</a:t>
+            </a:r>
+          </a:p>
+        </p:txBody>
+      </p:sp>
+      <p:sp>
+        <p:nvSpPr>
+          <p:cNvPr id="32" name="TextBox 31"/>
           <p:cNvSpPr txBox="1"/>
           <p:nvPr/>
         </p:nvSpPr>
         <p:spPr>
           <a:xfrm>
-            <a:off x="2597150" y="2506980"/>
-            <a:ext cx="739140" cy="198120"/>
+            <a:off x="1381760" y="1778000"/>
+            <a:ext cx="1153001" cy="158496"/>
           </a:xfrm>
           <a:prstGeom prst="rect">
             <a:avLst/>
@@ -9128,29 +6955,29 @@
           </a:bodyPr>
           <a:lstStyle/>
           <a:p>
-            <a:pPr algn="ctr"/>
-            <a:r>
-              <a:rPr sz="1500" b="1">
-                <a:solidFill>
-                  <a:srgbClr val="15334A"/>
-                </a:solidFill>
-                <a:latin typeface="Arial"/>
+            <a:pPr algn="l"/>
+            <a:r>
+              <a:rPr sz="1200">
+                <a:solidFill>
+                  <a:srgbClr val="64748B"/>
+                </a:solidFill>
+                <a:latin typeface="DejaVu Sans"/>
               </a:rPr>
-              <a:t>72.1%</a:t>
-            </a:r>
-          </a:p>
-        </p:txBody>
-      </p:sp>
-      <p:sp>
-        <p:nvSpPr>
-          <p:cNvPr id="34" name="TextBox 33"/>
+              <a:t>ACCURACY (%)</a:t>
+            </a:r>
+          </a:p>
+        </p:txBody>
+      </p:sp>
+      <p:sp>
+        <p:nvSpPr>
+          <p:cNvPr id="33" name="TextBox 32"/>
           <p:cNvSpPr txBox="1"/>
           <p:nvPr/>
         </p:nvSpPr>
         <p:spPr>
           <a:xfrm>
-            <a:off x="4832350" y="2181860"/>
-            <a:ext cx="739140" cy="198120"/>
+            <a:off x="5904071" y="5842000"/>
+            <a:ext cx="1034098" cy="158496"/>
           </a:xfrm>
           <a:prstGeom prst="rect">
             <a:avLst/>
@@ -9165,27 +6992,27 @@
           <a:p>
             <a:pPr algn="ctr"/>
             <a:r>
-              <a:rPr sz="1500" b="1">
-                <a:solidFill>
-                  <a:srgbClr val="15334A"/>
-                </a:solidFill>
-                <a:latin typeface="Arial"/>
+              <a:rPr sz="1200">
+                <a:solidFill>
+                  <a:srgbClr val="64748B"/>
+                </a:solidFill>
+                <a:latin typeface="DejaVu Sans"/>
               </a:rPr>
-              <a:t>81.6%</a:t>
-            </a:r>
-          </a:p>
-        </p:txBody>
-      </p:sp>
-      <p:sp>
-        <p:nvSpPr>
-          <p:cNvPr id="35" name="TextBox 34"/>
+              <a:t>CHECKPOINT</a:t>
+            </a:r>
+          </a:p>
+        </p:txBody>
+      </p:sp>
+      <p:sp>
+        <p:nvSpPr>
+          <p:cNvPr id="34" name="TextBox 33"/>
           <p:cNvSpPr txBox="1"/>
           <p:nvPr/>
         </p:nvSpPr>
         <p:spPr>
           <a:xfrm>
-            <a:off x="7067550" y="1602740"/>
-            <a:ext cx="739140" cy="198120"/>
+            <a:off x="2161699" y="2677160"/>
+            <a:ext cx="878522" cy="237744"/>
           </a:xfrm>
           <a:prstGeom prst="rect">
             <a:avLst/>
@@ -9200,27 +7027,27 @@
           <a:p>
             <a:pPr algn="ctr"/>
             <a:r>
-              <a:rPr sz="1500" b="1">
-                <a:solidFill>
-                  <a:srgbClr val="15334A"/>
-                </a:solidFill>
-                <a:latin typeface="Arial"/>
+              <a:rPr sz="1800" b="1">
+                <a:solidFill>
+                  <a:srgbClr val="1E3A5F"/>
+                </a:solidFill>
+                <a:latin typeface="DejaVu Sans"/>
               </a:rPr>
-              <a:t>98.4%</a:t>
-            </a:r>
-          </a:p>
-        </p:txBody>
-      </p:sp>
-      <p:sp>
-        <p:nvSpPr>
-          <p:cNvPr id="36" name="TextBox 35"/>
+              <a:t>72.1%</a:t>
+            </a:r>
+          </a:p>
+        </p:txBody>
+      </p:sp>
+      <p:sp>
+        <p:nvSpPr>
+          <p:cNvPr id="35" name="TextBox 34"/>
           <p:cNvSpPr txBox="1"/>
           <p:nvPr/>
         </p:nvSpPr>
         <p:spPr>
           <a:xfrm>
-            <a:off x="9253220" y="1551940"/>
-            <a:ext cx="838200" cy="198120"/>
+            <a:off x="4681379" y="2372360"/>
+            <a:ext cx="878522" cy="237744"/>
           </a:xfrm>
           <a:prstGeom prst="rect">
             <a:avLst/>
@@ -9235,27 +7062,27 @@
           <a:p>
             <a:pPr algn="ctr"/>
             <a:r>
-              <a:rPr sz="1500" b="1">
-                <a:solidFill>
-                  <a:srgbClr val="15334A"/>
-                </a:solidFill>
-                <a:latin typeface="Arial"/>
+              <a:rPr sz="1800" b="1">
+                <a:solidFill>
+                  <a:srgbClr val="1E3A5F"/>
+                </a:solidFill>
+                <a:latin typeface="DejaVu Sans"/>
               </a:rPr>
-              <a:t>100.0%</a:t>
-            </a:r>
-          </a:p>
-        </p:txBody>
-      </p:sp>
-      <p:sp>
-        <p:nvSpPr>
-          <p:cNvPr id="37" name="TextBox 36"/>
+              <a:t>81.6%</a:t>
+            </a:r>
+          </a:p>
+        </p:txBody>
+      </p:sp>
+      <p:sp>
+        <p:nvSpPr>
+          <p:cNvPr id="36" name="TextBox 35"/>
           <p:cNvSpPr txBox="1"/>
           <p:nvPr/>
         </p:nvSpPr>
         <p:spPr>
           <a:xfrm>
-            <a:off x="2382520" y="5481320"/>
-            <a:ext cx="1168400" cy="184912"/>
+            <a:off x="7201059" y="1823720"/>
+            <a:ext cx="878522" cy="237744"/>
           </a:xfrm>
           <a:prstGeom prst="rect">
             <a:avLst/>
@@ -9270,27 +7097,27 @@
           <a:p>
             <a:pPr algn="ctr"/>
             <a:r>
-              <a:rPr sz="1400" b="1">
-                <a:solidFill>
-                  <a:srgbClr val="15334A"/>
-                </a:solidFill>
-                <a:latin typeface="Arial"/>
+              <a:rPr sz="1800" b="1">
+                <a:solidFill>
+                  <a:srgbClr val="0F766E"/>
+                </a:solidFill>
+                <a:latin typeface="DejaVu Sans"/>
               </a:rPr>
-              <a:t>Baseline A</a:t>
-            </a:r>
-          </a:p>
-        </p:txBody>
-      </p:sp>
-      <p:sp>
-        <p:nvSpPr>
-          <p:cNvPr id="38" name="TextBox 37"/>
+              <a:t>98.4%</a:t>
+            </a:r>
+          </a:p>
+        </p:txBody>
+      </p:sp>
+      <p:sp>
+        <p:nvSpPr>
+          <p:cNvPr id="37" name="TextBox 36"/>
           <p:cNvSpPr txBox="1"/>
           <p:nvPr/>
         </p:nvSpPr>
         <p:spPr>
           <a:xfrm>
-            <a:off x="4617720" y="5481320"/>
-            <a:ext cx="1168400" cy="184912"/>
+            <a:off x="9657080" y="1772920"/>
+            <a:ext cx="1005840" cy="237744"/>
           </a:xfrm>
           <a:prstGeom prst="rect">
             <a:avLst/>
@@ -9305,27 +7132,27 @@
           <a:p>
             <a:pPr algn="ctr"/>
             <a:r>
-              <a:rPr sz="1400" b="1">
-                <a:solidFill>
-                  <a:srgbClr val="15334A"/>
-                </a:solidFill>
-                <a:latin typeface="Arial"/>
+              <a:rPr sz="1800" b="1">
+                <a:solidFill>
+                  <a:srgbClr val="0F766E"/>
+                </a:solidFill>
+                <a:latin typeface="DejaVu Sans"/>
               </a:rPr>
-              <a:t>Baseline B</a:t>
-            </a:r>
-          </a:p>
-        </p:txBody>
-      </p:sp>
-      <p:sp>
-        <p:nvSpPr>
-          <p:cNvPr id="39" name="TextBox 38"/>
+              <a:t>100.0%</a:t>
+            </a:r>
+          </a:p>
+        </p:txBody>
+      </p:sp>
+      <p:sp>
+        <p:nvSpPr>
+          <p:cNvPr id="38" name="TextBox 37"/>
           <p:cNvSpPr txBox="1"/>
           <p:nvPr/>
         </p:nvSpPr>
         <p:spPr>
           <a:xfrm>
-            <a:off x="6899148" y="5481320"/>
-            <a:ext cx="1075944" cy="184912"/>
+            <a:off x="2052717" y="5486400"/>
+            <a:ext cx="1096486" cy="211328"/>
           </a:xfrm>
           <a:prstGeom prst="rect">
             <a:avLst/>
@@ -9340,27 +7167,27 @@
           <a:p>
             <a:pPr algn="ctr"/>
             <a:r>
-              <a:rPr sz="1400" b="1">
-                <a:solidFill>
-                  <a:srgbClr val="15334A"/>
-                </a:solidFill>
-                <a:latin typeface="Arial"/>
+              <a:rPr sz="1600">
+                <a:solidFill>
+                  <a:srgbClr val="374151"/>
+                </a:solidFill>
+                <a:latin typeface="DejaVu Sans"/>
               </a:rPr>
-              <a:t>Current A</a:t>
-            </a:r>
-          </a:p>
-        </p:txBody>
-      </p:sp>
-      <p:sp>
-        <p:nvSpPr>
-          <p:cNvPr id="40" name="TextBox 39"/>
+              <a:t>Baseline A</a:t>
+            </a:r>
+          </a:p>
+        </p:txBody>
+      </p:sp>
+      <p:sp>
+        <p:nvSpPr>
+          <p:cNvPr id="39" name="TextBox 38"/>
           <p:cNvSpPr txBox="1"/>
           <p:nvPr/>
         </p:nvSpPr>
         <p:spPr>
           <a:xfrm>
-            <a:off x="9134348" y="5481320"/>
-            <a:ext cx="1075944" cy="184912"/>
+            <a:off x="4572238" y="5486400"/>
+            <a:ext cx="1096804" cy="211328"/>
           </a:xfrm>
           <a:prstGeom prst="rect">
             <a:avLst/>
@@ -9375,27 +7202,27 @@
           <a:p>
             <a:pPr algn="ctr"/>
             <a:r>
-              <a:rPr sz="1400" b="1">
-                <a:solidFill>
-                  <a:srgbClr val="15334A"/>
-                </a:solidFill>
-                <a:latin typeface="Arial"/>
+              <a:rPr sz="1600">
+                <a:solidFill>
+                  <a:srgbClr val="374151"/>
+                </a:solidFill>
+                <a:latin typeface="DejaVu Sans"/>
               </a:rPr>
-              <a:t>Current B</a:t>
-            </a:r>
-          </a:p>
-        </p:txBody>
-      </p:sp>
-      <p:sp>
-        <p:nvSpPr>
-          <p:cNvPr id="41" name="TextBox 40"/>
+              <a:t>Baseline B</a:t>
+            </a:r>
+          </a:p>
+        </p:txBody>
+      </p:sp>
+      <p:sp>
+        <p:nvSpPr>
+          <p:cNvPr id="40" name="TextBox 39"/>
           <p:cNvSpPr txBox="1"/>
           <p:nvPr/>
         </p:nvSpPr>
         <p:spPr>
           <a:xfrm>
-            <a:off x="8158480" y="762000"/>
-            <a:ext cx="877824" cy="158496"/>
+            <a:off x="7131526" y="5486400"/>
+            <a:ext cx="1017588" cy="211328"/>
           </a:xfrm>
           <a:prstGeom prst="rect">
             <a:avLst/>
@@ -9408,29 +7235,29 @@
           </a:bodyPr>
           <a:lstStyle/>
           <a:p>
-            <a:pPr algn="l"/>
-            <a:r>
-              <a:rPr sz="1200">
-                <a:solidFill>
-                  <a:srgbClr val="557085"/>
-                </a:solidFill>
-                <a:latin typeface="Arial"/>
+            <a:pPr algn="ctr"/>
+            <a:r>
+              <a:rPr sz="1600">
+                <a:solidFill>
+                  <a:srgbClr val="374151"/>
+                </a:solidFill>
+                <a:latin typeface="DejaVu Sans"/>
               </a:rPr>
-              <a:t>Baseline</a:t>
-            </a:r>
-          </a:p>
-        </p:txBody>
-      </p:sp>
-      <p:sp>
-        <p:nvSpPr>
-          <p:cNvPr id="42" name="TextBox 41"/>
+              <a:t>Current A</a:t>
+            </a:r>
+          </a:p>
+        </p:txBody>
+      </p:sp>
+      <p:sp>
+        <p:nvSpPr>
+          <p:cNvPr id="41" name="TextBox 40"/>
           <p:cNvSpPr txBox="1"/>
           <p:nvPr/>
         </p:nvSpPr>
         <p:spPr>
           <a:xfrm>
-            <a:off x="9235440" y="762000"/>
-            <a:ext cx="798576" cy="158496"/>
+            <a:off x="9651048" y="5486400"/>
+            <a:ext cx="1017905" cy="211328"/>
           </a:xfrm>
           <a:prstGeom prst="rect">
             <a:avLst/>
@@ -9443,29 +7270,29 @@
           </a:bodyPr>
           <a:lstStyle/>
           <a:p>
-            <a:pPr algn="l"/>
-            <a:r>
-              <a:rPr sz="1200">
-                <a:solidFill>
-                  <a:srgbClr val="557085"/>
-                </a:solidFill>
-                <a:latin typeface="Arial"/>
+            <a:pPr algn="ctr"/>
+            <a:r>
+              <a:rPr sz="1600">
+                <a:solidFill>
+                  <a:srgbClr val="374151"/>
+                </a:solidFill>
+                <a:latin typeface="DejaVu Sans"/>
               </a:rPr>
-              <a:t>Current</a:t>
-            </a:r>
-          </a:p>
-        </p:txBody>
-      </p:sp>
-      <p:sp>
-        <p:nvSpPr>
-          <p:cNvPr id="43" name="TextBox 42"/>
+              <a:t>Current B</a:t>
+            </a:r>
+          </a:p>
+        </p:txBody>
+      </p:sp>
+      <p:sp>
+        <p:nvSpPr>
+          <p:cNvPr id="42" name="TextBox 41"/>
           <p:cNvSpPr txBox="1"/>
           <p:nvPr/>
         </p:nvSpPr>
         <p:spPr>
           <a:xfrm>
-            <a:off x="609600" y="6510020"/>
-            <a:ext cx="4457192" cy="145288"/>
+            <a:off x="487680" y="6329680"/>
+            <a:ext cx="3896836" cy="158496"/>
           </a:xfrm>
           <a:prstGeom prst="rect">
             <a:avLst/>
@@ -9480,11 +7307,11 @@
           <a:p>
             <a:pPr algn="l"/>
             <a:r>
-              <a:rPr sz="1100">
-                <a:solidFill>
-                  <a:srgbClr val="7892A4"/>
-                </a:solidFill>
-                <a:latin typeface="Arial"/>
+              <a:rPr sz="1200">
+                <a:solidFill>
+                  <a:srgbClr val="64748B"/>
+                </a:solidFill>
+                <a:latin typeface="DejaVu Sans"/>
               </a:rPr>
               <a:t>Source data: accuracy-comparison/data.json • unit: percent</a:t>
             </a:r>
